--- a/static/course/Computational_Methods_for_Forestry_Research/Unit-II/unit2_programming_fundamentals_r.pptx
+++ b/static/course/Computational_Methods_for_Forestry_Research/Unit-II/unit2_programming_fundamentals_r.pptx
@@ -17,6 +17,8 @@
     <p:sldId id="262" r:id="rId12"/>
     <p:sldId id="263" r:id="rId13"/>
     <p:sldId id="264" r:id="rId14"/>
+    <p:sldId id="265" r:id="rId15"/>
+    <p:sldId id="266" r:id="rId16"/>
   </p:sldIdLst>
   <p:sldSz cy="6858000" cx="12191675"/>
   <p:notesSz cx="6858000" cy="9144000"/>
@@ -845,6 +847,308 @@
 </p:notes>
 </file>
 
+<file path=ppt/notesSlides/notesSlide10.xml><?xml version="1.0" encoding="utf-8"?>
+<p:notes xmlns:a="http://schemas.openxmlformats.org/drawingml/2006/main" xmlns:r="http://schemas.openxmlformats.org/officeDocument/2006/relationships" xmlns:mc="http://schemas.openxmlformats.org/markup-compatibility/2006" xmlns:mv="urn:schemas-microsoft-com:mac:vml" xmlns:p="http://schemas.openxmlformats.org/presentationml/2006/main" xmlns:c="http://schemas.openxmlformats.org/drawingml/2006/chart" xmlns:dgm="http://schemas.openxmlformats.org/drawingml/2006/diagram" xmlns:o="urn:schemas-microsoft-com:office:office" xmlns:v="urn:schemas-microsoft-com:vml" xmlns:pvml="urn:schemas-microsoft-com:office:powerpoint" xmlns:com="http://schemas.openxmlformats.org/drawingml/2006/compatibility" xmlns:p14="http://schemas.microsoft.com/office/powerpoint/2010/main" xmlns:p15="http://schemas.microsoft.com/office/powerpoint/2012/main" xmlns:ahyp="http://schemas.microsoft.com/office/drawing/2018/hyperlinkcolor" showMasterPhAnim="0" showMasterSp="0">
+  <p:cSld>
+    <p:spTree>
+      <p:nvGrpSpPr>
+        <p:cNvPr id="177" name="Shape 177"/>
+        <p:cNvGrpSpPr/>
+        <p:nvPr/>
+      </p:nvGrpSpPr>
+      <p:grpSpPr>
+        <a:xfrm>
+          <a:off x="0" y="0"/>
+          <a:ext cx="0" cy="0"/>
+          <a:chOff x="0" y="0"/>
+          <a:chExt cx="0" cy="0"/>
+        </a:xfrm>
+      </p:grpSpPr>
+      <p:sp>
+        <p:nvSpPr>
+          <p:cNvPr id="178" name="Google Shape;178;p7:notes"/>
+          <p:cNvSpPr/>
+          <p:nvPr>
+            <p:ph idx="2" type="sldImg"/>
+          </p:nvPr>
+        </p:nvSpPr>
+        <p:spPr>
+          <a:xfrm>
+            <a:off x="0" y="0"/>
+            <a:ext cx="3000000" cy="3000000"/>
+          </a:xfrm>
+          <a:custGeom>
+            <a:rect b="b" l="l" r="r" t="t"/>
+            <a:pathLst>
+              <a:path extrusionOk="0" h="120000" w="120000">
+                <a:moveTo>
+                  <a:pt x="0" y="0"/>
+                </a:moveTo>
+                <a:lnTo>
+                  <a:pt x="120000" y="0"/>
+                </a:lnTo>
+                <a:lnTo>
+                  <a:pt x="120000" y="120000"/>
+                </a:lnTo>
+                <a:lnTo>
+                  <a:pt x="0" y="120000"/>
+                </a:lnTo>
+                <a:close/>
+              </a:path>
+            </a:pathLst>
+          </a:custGeom>
+          <a:noFill/>
+          <a:ln>
+            <a:noFill/>
+          </a:ln>
+        </p:spPr>
+      </p:sp>
+      <p:sp>
+        <p:nvSpPr>
+          <p:cNvPr id="179" name="Google Shape;179;p7:notes"/>
+          <p:cNvSpPr txBox="1"/>
+          <p:nvPr>
+            <p:ph idx="1" type="body"/>
+          </p:nvPr>
+        </p:nvSpPr>
+        <p:spPr>
+          <a:xfrm>
+            <a:off x="0" y="0"/>
+            <a:ext cx="3000000" cy="3000000"/>
+          </a:xfrm>
+          <a:prstGeom prst="rect">
+            <a:avLst/>
+          </a:prstGeom>
+          <a:noFill/>
+          <a:ln>
+            <a:noFill/>
+          </a:ln>
+        </p:spPr>
+        <p:txBody>
+          <a:bodyPr anchorCtr="0" anchor="t" bIns="45700" lIns="91425" spcFirstLastPara="1" rIns="91425" wrap="square" tIns="45700">
+            <a:noAutofit/>
+          </a:bodyPr>
+          <a:lstStyle/>
+          <a:p>
+            <a:pPr indent="0" lvl="0" marL="0" rtl="0" algn="l">
+              <a:spcBef>
+                <a:spcPts val="0"/>
+              </a:spcBef>
+              <a:spcAft>
+                <a:spcPts val="0"/>
+              </a:spcAft>
+              <a:buNone/>
+            </a:pPr>
+            <a:r>
+              <a:rPr lang="en-US"/>
+              <a:t>Explain tidy data principles (Wickham 2014) in the context of forest inventories.</a:t>
+            </a:r>
+            <a:endParaRPr/>
+          </a:p>
+        </p:txBody>
+      </p:sp>
+      <p:sp>
+        <p:nvSpPr>
+          <p:cNvPr id="180" name="Google Shape;180;p7:notes"/>
+          <p:cNvSpPr txBox="1"/>
+          <p:nvPr>
+            <p:ph idx="12" type="sldNum"/>
+          </p:nvPr>
+        </p:nvSpPr>
+        <p:spPr>
+          <a:xfrm>
+            <a:off x="0" y="0"/>
+            <a:ext cx="3000000" cy="3000000"/>
+          </a:xfrm>
+          <a:prstGeom prst="rect">
+            <a:avLst/>
+          </a:prstGeom>
+          <a:noFill/>
+          <a:ln>
+            <a:noFill/>
+          </a:ln>
+        </p:spPr>
+        <p:txBody>
+          <a:bodyPr anchorCtr="0" anchor="ctr" bIns="91425" lIns="91425" spcFirstLastPara="1" rIns="91425" wrap="square" tIns="91425">
+            <a:noAutofit/>
+          </a:bodyPr>
+          <a:lstStyle/>
+          <a:p>
+            <a:pPr indent="0" lvl="0" marL="0" rtl="0" algn="l">
+              <a:spcBef>
+                <a:spcPts val="0"/>
+              </a:spcBef>
+              <a:spcAft>
+                <a:spcPts val="0"/>
+              </a:spcAft>
+              <a:buNone/>
+            </a:pPr>
+            <a:r>
+              <a:t/>
+            </a:r>
+            <a:endParaRPr/>
+          </a:p>
+        </p:txBody>
+      </p:sp>
+    </p:spTree>
+  </p:cSld>
+  <p:clrMapOvr>
+    <a:masterClrMapping/>
+  </p:clrMapOvr>
+</p:notes>
+</file>
+
+<file path=ppt/notesSlides/notesSlide11.xml><?xml version="1.0" encoding="utf-8"?>
+<p:notes xmlns:a="http://schemas.openxmlformats.org/drawingml/2006/main" xmlns:r="http://schemas.openxmlformats.org/officeDocument/2006/relationships" xmlns:mc="http://schemas.openxmlformats.org/markup-compatibility/2006" xmlns:mv="urn:schemas-microsoft-com:mac:vml" xmlns:p="http://schemas.openxmlformats.org/presentationml/2006/main" xmlns:c="http://schemas.openxmlformats.org/drawingml/2006/chart" xmlns:dgm="http://schemas.openxmlformats.org/drawingml/2006/diagram" xmlns:o="urn:schemas-microsoft-com:office:office" xmlns:v="urn:schemas-microsoft-com:vml" xmlns:pvml="urn:schemas-microsoft-com:office:powerpoint" xmlns:com="http://schemas.openxmlformats.org/drawingml/2006/compatibility" xmlns:p14="http://schemas.microsoft.com/office/powerpoint/2010/main" xmlns:p15="http://schemas.microsoft.com/office/powerpoint/2012/main" xmlns:ahyp="http://schemas.microsoft.com/office/drawing/2018/hyperlinkcolor" showMasterPhAnim="0" showMasterSp="0">
+  <p:cSld>
+    <p:spTree>
+      <p:nvGrpSpPr>
+        <p:cNvPr id="187" name="Shape 187"/>
+        <p:cNvGrpSpPr/>
+        <p:nvPr/>
+      </p:nvGrpSpPr>
+      <p:grpSpPr>
+        <a:xfrm>
+          <a:off x="0" y="0"/>
+          <a:ext cx="0" cy="0"/>
+          <a:chOff x="0" y="0"/>
+          <a:chExt cx="0" cy="0"/>
+        </a:xfrm>
+      </p:grpSpPr>
+      <p:sp>
+        <p:nvSpPr>
+          <p:cNvPr id="188" name="Google Shape;188;p8:notes"/>
+          <p:cNvSpPr/>
+          <p:nvPr>
+            <p:ph idx="2" type="sldImg"/>
+          </p:nvPr>
+        </p:nvSpPr>
+        <p:spPr>
+          <a:xfrm>
+            <a:off x="0" y="0"/>
+            <a:ext cx="3000000" cy="3000000"/>
+          </a:xfrm>
+          <a:custGeom>
+            <a:rect b="b" l="l" r="r" t="t"/>
+            <a:pathLst>
+              <a:path extrusionOk="0" h="120000" w="120000">
+                <a:moveTo>
+                  <a:pt x="0" y="0"/>
+                </a:moveTo>
+                <a:lnTo>
+                  <a:pt x="120000" y="0"/>
+                </a:lnTo>
+                <a:lnTo>
+                  <a:pt x="120000" y="120000"/>
+                </a:lnTo>
+                <a:lnTo>
+                  <a:pt x="0" y="120000"/>
+                </a:lnTo>
+                <a:close/>
+              </a:path>
+            </a:pathLst>
+          </a:custGeom>
+          <a:noFill/>
+          <a:ln>
+            <a:noFill/>
+          </a:ln>
+        </p:spPr>
+      </p:sp>
+      <p:sp>
+        <p:nvSpPr>
+          <p:cNvPr id="189" name="Google Shape;189;p8:notes"/>
+          <p:cNvSpPr txBox="1"/>
+          <p:nvPr>
+            <p:ph idx="1" type="body"/>
+          </p:nvPr>
+        </p:nvSpPr>
+        <p:spPr>
+          <a:xfrm>
+            <a:off x="0" y="0"/>
+            <a:ext cx="3000000" cy="3000000"/>
+          </a:xfrm>
+          <a:prstGeom prst="rect">
+            <a:avLst/>
+          </a:prstGeom>
+          <a:noFill/>
+          <a:ln>
+            <a:noFill/>
+          </a:ln>
+        </p:spPr>
+        <p:txBody>
+          <a:bodyPr anchorCtr="0" anchor="t" bIns="45700" lIns="91425" spcFirstLastPara="1" rIns="91425" wrap="square" tIns="45700">
+            <a:noAutofit/>
+          </a:bodyPr>
+          <a:lstStyle/>
+          <a:p>
+            <a:pPr indent="0" lvl="0" marL="0" rtl="0" algn="l">
+              <a:spcBef>
+                <a:spcPts val="0"/>
+              </a:spcBef>
+              <a:spcAft>
+                <a:spcPts val="0"/>
+              </a:spcAft>
+              <a:buNone/>
+            </a:pPr>
+            <a:r>
+              <a:rPr lang="en-US"/>
+              <a:t>Conclude Unit II and introduce Unit III (Data Cleaning and APIs).</a:t>
+            </a:r>
+            <a:endParaRPr/>
+          </a:p>
+        </p:txBody>
+      </p:sp>
+      <p:sp>
+        <p:nvSpPr>
+          <p:cNvPr id="190" name="Google Shape;190;p8:notes"/>
+          <p:cNvSpPr txBox="1"/>
+          <p:nvPr>
+            <p:ph idx="12" type="sldNum"/>
+          </p:nvPr>
+        </p:nvSpPr>
+        <p:spPr>
+          <a:xfrm>
+            <a:off x="0" y="0"/>
+            <a:ext cx="3000000" cy="3000000"/>
+          </a:xfrm>
+          <a:prstGeom prst="rect">
+            <a:avLst/>
+          </a:prstGeom>
+          <a:noFill/>
+          <a:ln>
+            <a:noFill/>
+          </a:ln>
+        </p:spPr>
+        <p:txBody>
+          <a:bodyPr anchorCtr="0" anchor="ctr" bIns="91425" lIns="91425" spcFirstLastPara="1" rIns="91425" wrap="square" tIns="91425">
+            <a:noAutofit/>
+          </a:bodyPr>
+          <a:lstStyle/>
+          <a:p>
+            <a:pPr indent="0" lvl="0" marL="0" rtl="0" algn="l">
+              <a:spcBef>
+                <a:spcPts val="0"/>
+              </a:spcBef>
+              <a:spcAft>
+                <a:spcPts val="0"/>
+              </a:spcAft>
+              <a:buNone/>
+            </a:pPr>
+            <a:r>
+              <a:t/>
+            </a:r>
+            <a:endParaRPr/>
+          </a:p>
+        </p:txBody>
+      </p:sp>
+    </p:spTree>
+  </p:cSld>
+  <p:clrMapOvr>
+    <a:masterClrMapping/>
+  </p:clrMapOvr>
+</p:notes>
+</file>
+
 <file path=ppt/notesSlides/notesSlide2.xml><?xml version="1.0" encoding="utf-8"?>
 <p:notes xmlns:a="http://schemas.openxmlformats.org/drawingml/2006/main" xmlns:r="http://schemas.openxmlformats.org/officeDocument/2006/relationships" xmlns:mc="http://schemas.openxmlformats.org/markup-compatibility/2006" xmlns:mv="urn:schemas-microsoft-com:mac:vml" xmlns:p="http://schemas.openxmlformats.org/presentationml/2006/main" xmlns:c="http://schemas.openxmlformats.org/drawingml/2006/chart" xmlns:dgm="http://schemas.openxmlformats.org/drawingml/2006/diagram" xmlns:o="urn:schemas-microsoft-com:office:office" xmlns:v="urn:schemas-microsoft-com:vml" xmlns:pvml="urn:schemas-microsoft-com:office:powerpoint" xmlns:com="http://schemas.openxmlformats.org/drawingml/2006/compatibility" xmlns:p14="http://schemas.microsoft.com/office/powerpoint/2010/main" xmlns:p15="http://schemas.microsoft.com/office/powerpoint/2012/main" xmlns:ahyp="http://schemas.microsoft.com/office/drawing/2018/hyperlinkcolor" showMasterPhAnim="0" showMasterSp="0">
   <p:cSld>
@@ -1416,7 +1720,205 @@
       </p:grpSpPr>
       <p:sp>
         <p:nvSpPr>
-          <p:cNvPr id="132" name="Google Shape;132;p5:notes"/>
+          <p:cNvPr id="132" name="Google Shape;132;h46b11b5f327210a8_9_0:notes"/>
+          <p:cNvSpPr/>
+          <p:nvPr>
+            <p:ph idx="2" type="sldImg"/>
+          </p:nvPr>
+        </p:nvSpPr>
+        <p:spPr>
+          <a:xfrm>
+            <a:off x="1143225" y="685800"/>
+            <a:ext cx="4572225" cy="3429000"/>
+          </a:xfrm>
+          <a:custGeom>
+            <a:rect b="b" l="l" r="r" t="t"/>
+            <a:pathLst>
+              <a:path extrusionOk="0" h="120000" w="120000">
+                <a:moveTo>
+                  <a:pt x="0" y="0"/>
+                </a:moveTo>
+                <a:lnTo>
+                  <a:pt x="120000" y="0"/>
+                </a:lnTo>
+                <a:lnTo>
+                  <a:pt x="120000" y="120000"/>
+                </a:lnTo>
+                <a:lnTo>
+                  <a:pt x="0" y="120000"/>
+                </a:lnTo>
+                <a:close/>
+              </a:path>
+            </a:pathLst>
+          </a:custGeom>
+        </p:spPr>
+      </p:sp>
+      <p:sp>
+        <p:nvSpPr>
+          <p:cNvPr id="133" name="Google Shape;133;h46b11b5f327210a8_9_0:notes"/>
+          <p:cNvSpPr txBox="1"/>
+          <p:nvPr>
+            <p:ph idx="1" type="body"/>
+          </p:nvPr>
+        </p:nvSpPr>
+        <p:spPr>
+          <a:xfrm>
+            <a:off x="685800" y="4343400"/>
+            <a:ext cx="5486400" cy="4114800"/>
+          </a:xfrm>
+          <a:prstGeom prst="rect">
+            <a:avLst/>
+          </a:prstGeom>
+        </p:spPr>
+        <p:txBody>
+          <a:bodyPr anchorCtr="0" anchor="t" bIns="91425" lIns="91425" spcFirstLastPara="1" rIns="91425" wrap="square" tIns="91425">
+            <a:noAutofit/>
+          </a:bodyPr>
+          <a:lstStyle/>
+          <a:p>
+            <a:pPr indent="0" lvl="0" marL="0" rtl="0" algn="l">
+              <a:spcBef>
+                <a:spcPts val="0"/>
+              </a:spcBef>
+              <a:spcAft>
+                <a:spcPts val="0"/>
+              </a:spcAft>
+              <a:buNone/>
+            </a:pPr>
+            <a:r>
+              <a:t/>
+            </a:r>
+            <a:endParaRPr/>
+          </a:p>
+        </p:txBody>
+      </p:sp>
+    </p:spTree>
+  </p:cSld>
+  <p:clrMapOvr>
+    <a:masterClrMapping/>
+  </p:clrMapOvr>
+</p:notes>
+</file>
+
+<file path=ppt/notesSlides/notesSlide7.xml><?xml version="1.0" encoding="utf-8"?>
+<p:notes xmlns:a="http://schemas.openxmlformats.org/drawingml/2006/main" xmlns:r="http://schemas.openxmlformats.org/officeDocument/2006/relationships" xmlns:mc="http://schemas.openxmlformats.org/markup-compatibility/2006" xmlns:mv="urn:schemas-microsoft-com:mac:vml" xmlns:p="http://schemas.openxmlformats.org/presentationml/2006/main" xmlns:c="http://schemas.openxmlformats.org/drawingml/2006/chart" xmlns:dgm="http://schemas.openxmlformats.org/drawingml/2006/diagram" xmlns:o="urn:schemas-microsoft-com:office:office" xmlns:v="urn:schemas-microsoft-com:vml" xmlns:pvml="urn:schemas-microsoft-com:office:powerpoint" xmlns:com="http://schemas.openxmlformats.org/drawingml/2006/compatibility" xmlns:p14="http://schemas.microsoft.com/office/powerpoint/2010/main" xmlns:p15="http://schemas.microsoft.com/office/powerpoint/2012/main" xmlns:ahyp="http://schemas.microsoft.com/office/drawing/2018/hyperlinkcolor" showMasterPhAnim="0" showMasterSp="0">
+  <p:cSld>
+    <p:spTree>
+      <p:nvGrpSpPr>
+        <p:cNvPr id="143" name="Shape 143"/>
+        <p:cNvGrpSpPr/>
+        <p:nvPr/>
+      </p:nvGrpSpPr>
+      <p:grpSpPr>
+        <a:xfrm>
+          <a:off x="0" y="0"/>
+          <a:ext cx="0" cy="0"/>
+          <a:chOff x="0" y="0"/>
+          <a:chExt cx="0" cy="0"/>
+        </a:xfrm>
+      </p:grpSpPr>
+      <p:sp>
+        <p:nvSpPr>
+          <p:cNvPr id="144" name="Google Shape;144;h46b11b5f327210a8_8_0:notes"/>
+          <p:cNvSpPr/>
+          <p:nvPr>
+            <p:ph idx="2" type="sldImg"/>
+          </p:nvPr>
+        </p:nvSpPr>
+        <p:spPr>
+          <a:xfrm>
+            <a:off x="1143225" y="685800"/>
+            <a:ext cx="4572225" cy="3429000"/>
+          </a:xfrm>
+          <a:custGeom>
+            <a:rect b="b" l="l" r="r" t="t"/>
+            <a:pathLst>
+              <a:path extrusionOk="0" h="120000" w="120000">
+                <a:moveTo>
+                  <a:pt x="0" y="0"/>
+                </a:moveTo>
+                <a:lnTo>
+                  <a:pt x="120000" y="0"/>
+                </a:lnTo>
+                <a:lnTo>
+                  <a:pt x="120000" y="120000"/>
+                </a:lnTo>
+                <a:lnTo>
+                  <a:pt x="0" y="120000"/>
+                </a:lnTo>
+                <a:close/>
+              </a:path>
+            </a:pathLst>
+          </a:custGeom>
+        </p:spPr>
+      </p:sp>
+      <p:sp>
+        <p:nvSpPr>
+          <p:cNvPr id="145" name="Google Shape;145;h46b11b5f327210a8_8_0:notes"/>
+          <p:cNvSpPr txBox="1"/>
+          <p:nvPr>
+            <p:ph idx="1" type="body"/>
+          </p:nvPr>
+        </p:nvSpPr>
+        <p:spPr>
+          <a:xfrm>
+            <a:off x="685800" y="4343400"/>
+            <a:ext cx="5486400" cy="4114800"/>
+          </a:xfrm>
+          <a:prstGeom prst="rect">
+            <a:avLst/>
+          </a:prstGeom>
+        </p:spPr>
+        <p:txBody>
+          <a:bodyPr anchorCtr="0" anchor="t" bIns="91425" lIns="91425" spcFirstLastPara="1" rIns="91425" wrap="square" tIns="91425">
+            <a:noAutofit/>
+          </a:bodyPr>
+          <a:lstStyle/>
+          <a:p>
+            <a:pPr indent="0" lvl="0" marL="0" rtl="0" algn="l">
+              <a:spcBef>
+                <a:spcPts val="0"/>
+              </a:spcBef>
+              <a:spcAft>
+                <a:spcPts val="0"/>
+              </a:spcAft>
+              <a:buNone/>
+            </a:pPr>
+            <a:r>
+              <a:t/>
+            </a:r>
+            <a:endParaRPr/>
+          </a:p>
+        </p:txBody>
+      </p:sp>
+    </p:spTree>
+  </p:cSld>
+  <p:clrMapOvr>
+    <a:masterClrMapping/>
+  </p:clrMapOvr>
+</p:notes>
+</file>
+
+<file path=ppt/notesSlides/notesSlide8.xml><?xml version="1.0" encoding="utf-8"?>
+<p:notes xmlns:a="http://schemas.openxmlformats.org/drawingml/2006/main" xmlns:r="http://schemas.openxmlformats.org/officeDocument/2006/relationships" xmlns:mc="http://schemas.openxmlformats.org/markup-compatibility/2006" xmlns:mv="urn:schemas-microsoft-com:mac:vml" xmlns:p="http://schemas.openxmlformats.org/presentationml/2006/main" xmlns:c="http://schemas.openxmlformats.org/drawingml/2006/chart" xmlns:dgm="http://schemas.openxmlformats.org/drawingml/2006/diagram" xmlns:o="urn:schemas-microsoft-com:office:office" xmlns:v="urn:schemas-microsoft-com:vml" xmlns:pvml="urn:schemas-microsoft-com:office:powerpoint" xmlns:com="http://schemas.openxmlformats.org/drawingml/2006/compatibility" xmlns:p14="http://schemas.microsoft.com/office/powerpoint/2010/main" xmlns:p15="http://schemas.microsoft.com/office/powerpoint/2012/main" xmlns:ahyp="http://schemas.microsoft.com/office/drawing/2018/hyperlinkcolor" showMasterPhAnim="0" showMasterSp="0">
+  <p:cSld>
+    <p:spTree>
+      <p:nvGrpSpPr>
+        <p:cNvPr id="155" name="Shape 155"/>
+        <p:cNvGrpSpPr/>
+        <p:nvPr/>
+      </p:nvGrpSpPr>
+      <p:grpSpPr>
+        <a:xfrm>
+          <a:off x="0" y="0"/>
+          <a:ext cx="0" cy="0"/>
+          <a:chOff x="0" y="0"/>
+          <a:chExt cx="0" cy="0"/>
+        </a:xfrm>
+      </p:grpSpPr>
+      <p:sp>
+        <p:nvSpPr>
+          <p:cNvPr id="156" name="Google Shape;156;p5:notes"/>
           <p:cNvSpPr/>
           <p:nvPr>
             <p:ph idx="2" type="sldImg"/>
@@ -1455,7 +1957,7 @@
       </p:sp>
       <p:sp>
         <p:nvSpPr>
-          <p:cNvPr id="133" name="Google Shape;133;p5:notes"/>
+          <p:cNvPr id="157" name="Google Shape;157;p5:notes"/>
           <p:cNvSpPr txBox="1"/>
           <p:nvPr>
             <p:ph idx="1" type="body"/>
@@ -1499,7 +2001,7 @@
       </p:sp>
       <p:sp>
         <p:nvSpPr>
-          <p:cNvPr id="134" name="Google Shape;134;p5:notes"/>
+          <p:cNvPr id="158" name="Google Shape;158;p5:notes"/>
           <p:cNvSpPr txBox="1"/>
           <p:nvPr>
             <p:ph idx="12" type="sldNum"/>
@@ -1548,12 +2050,12 @@
 </p:notes>
 </file>
 
-<file path=ppt/notesSlides/notesSlide7.xml><?xml version="1.0" encoding="utf-8"?>
+<file path=ppt/notesSlides/notesSlide9.xml><?xml version="1.0" encoding="utf-8"?>
 <p:notes xmlns:a="http://schemas.openxmlformats.org/drawingml/2006/main" xmlns:r="http://schemas.openxmlformats.org/officeDocument/2006/relationships" xmlns:mc="http://schemas.openxmlformats.org/markup-compatibility/2006" xmlns:mv="urn:schemas-microsoft-com:mac:vml" xmlns:p="http://schemas.openxmlformats.org/presentationml/2006/main" xmlns:c="http://schemas.openxmlformats.org/drawingml/2006/chart" xmlns:dgm="http://schemas.openxmlformats.org/drawingml/2006/diagram" xmlns:o="urn:schemas-microsoft-com:office:office" xmlns:v="urn:schemas-microsoft-com:vml" xmlns:pvml="urn:schemas-microsoft-com:office:powerpoint" xmlns:com="http://schemas.openxmlformats.org/drawingml/2006/compatibility" xmlns:p14="http://schemas.microsoft.com/office/powerpoint/2010/main" xmlns:p15="http://schemas.microsoft.com/office/powerpoint/2012/main" xmlns:ahyp="http://schemas.microsoft.com/office/drawing/2018/hyperlinkcolor" showMasterPhAnim="0" showMasterSp="0">
   <p:cSld>
     <p:spTree>
       <p:nvGrpSpPr>
-        <p:cNvPr id="144" name="Shape 144"/>
+        <p:cNvPr id="168" name="Shape 168"/>
         <p:cNvGrpSpPr/>
         <p:nvPr/>
       </p:nvGrpSpPr>
@@ -1567,7 +2069,7 @@
       </p:grpSpPr>
       <p:sp>
         <p:nvSpPr>
-          <p:cNvPr id="145" name="Google Shape;145;p6:notes"/>
+          <p:cNvPr id="169" name="Google Shape;169;p6:notes"/>
           <p:cNvSpPr/>
           <p:nvPr>
             <p:ph idx="2" type="sldImg"/>
@@ -1606,7 +2108,7 @@
       </p:sp>
       <p:sp>
         <p:nvSpPr>
-          <p:cNvPr id="146" name="Google Shape;146;p6:notes"/>
+          <p:cNvPr id="170" name="Google Shape;170;p6:notes"/>
           <p:cNvSpPr txBox="1"/>
           <p:nvPr>
             <p:ph idx="1" type="body"/>
@@ -1650,309 +2152,7 @@
       </p:sp>
       <p:sp>
         <p:nvSpPr>
-          <p:cNvPr id="147" name="Google Shape;147;p6:notes"/>
-          <p:cNvSpPr txBox="1"/>
-          <p:nvPr>
-            <p:ph idx="12" type="sldNum"/>
-          </p:nvPr>
-        </p:nvSpPr>
-        <p:spPr>
-          <a:xfrm>
-            <a:off x="0" y="0"/>
-            <a:ext cx="3000000" cy="3000000"/>
-          </a:xfrm>
-          <a:prstGeom prst="rect">
-            <a:avLst/>
-          </a:prstGeom>
-          <a:noFill/>
-          <a:ln>
-            <a:noFill/>
-          </a:ln>
-        </p:spPr>
-        <p:txBody>
-          <a:bodyPr anchorCtr="0" anchor="ctr" bIns="91425" lIns="91425" spcFirstLastPara="1" rIns="91425" wrap="square" tIns="91425">
-            <a:noAutofit/>
-          </a:bodyPr>
-          <a:lstStyle/>
-          <a:p>
-            <a:pPr indent="0" lvl="0" marL="0" rtl="0" algn="l">
-              <a:spcBef>
-                <a:spcPts val="0"/>
-              </a:spcBef>
-              <a:spcAft>
-                <a:spcPts val="0"/>
-              </a:spcAft>
-              <a:buNone/>
-            </a:pPr>
-            <a:r>
-              <a:t/>
-            </a:r>
-            <a:endParaRPr/>
-          </a:p>
-        </p:txBody>
-      </p:sp>
-    </p:spTree>
-  </p:cSld>
-  <p:clrMapOvr>
-    <a:masterClrMapping/>
-  </p:clrMapOvr>
-</p:notes>
-</file>
-
-<file path=ppt/notesSlides/notesSlide8.xml><?xml version="1.0" encoding="utf-8"?>
-<p:notes xmlns:a="http://schemas.openxmlformats.org/drawingml/2006/main" xmlns:r="http://schemas.openxmlformats.org/officeDocument/2006/relationships" xmlns:mc="http://schemas.openxmlformats.org/markup-compatibility/2006" xmlns:mv="urn:schemas-microsoft-com:mac:vml" xmlns:p="http://schemas.openxmlformats.org/presentationml/2006/main" xmlns:c="http://schemas.openxmlformats.org/drawingml/2006/chart" xmlns:dgm="http://schemas.openxmlformats.org/drawingml/2006/diagram" xmlns:o="urn:schemas-microsoft-com:office:office" xmlns:v="urn:schemas-microsoft-com:vml" xmlns:pvml="urn:schemas-microsoft-com:office:powerpoint" xmlns:com="http://schemas.openxmlformats.org/drawingml/2006/compatibility" xmlns:p14="http://schemas.microsoft.com/office/powerpoint/2010/main" xmlns:p15="http://schemas.microsoft.com/office/powerpoint/2012/main" xmlns:ahyp="http://schemas.microsoft.com/office/drawing/2018/hyperlinkcolor" showMasterPhAnim="0" showMasterSp="0">
-  <p:cSld>
-    <p:spTree>
-      <p:nvGrpSpPr>
-        <p:cNvPr id="153" name="Shape 153"/>
-        <p:cNvGrpSpPr/>
-        <p:nvPr/>
-      </p:nvGrpSpPr>
-      <p:grpSpPr>
-        <a:xfrm>
-          <a:off x="0" y="0"/>
-          <a:ext cx="0" cy="0"/>
-          <a:chOff x="0" y="0"/>
-          <a:chExt cx="0" cy="0"/>
-        </a:xfrm>
-      </p:grpSpPr>
-      <p:sp>
-        <p:nvSpPr>
-          <p:cNvPr id="154" name="Google Shape;154;p7:notes"/>
-          <p:cNvSpPr/>
-          <p:nvPr>
-            <p:ph idx="2" type="sldImg"/>
-          </p:nvPr>
-        </p:nvSpPr>
-        <p:spPr>
-          <a:xfrm>
-            <a:off x="0" y="0"/>
-            <a:ext cx="3000000" cy="3000000"/>
-          </a:xfrm>
-          <a:custGeom>
-            <a:rect b="b" l="l" r="r" t="t"/>
-            <a:pathLst>
-              <a:path extrusionOk="0" h="120000" w="120000">
-                <a:moveTo>
-                  <a:pt x="0" y="0"/>
-                </a:moveTo>
-                <a:lnTo>
-                  <a:pt x="120000" y="0"/>
-                </a:lnTo>
-                <a:lnTo>
-                  <a:pt x="120000" y="120000"/>
-                </a:lnTo>
-                <a:lnTo>
-                  <a:pt x="0" y="120000"/>
-                </a:lnTo>
-                <a:close/>
-              </a:path>
-            </a:pathLst>
-          </a:custGeom>
-          <a:noFill/>
-          <a:ln>
-            <a:noFill/>
-          </a:ln>
-        </p:spPr>
-      </p:sp>
-      <p:sp>
-        <p:nvSpPr>
-          <p:cNvPr id="155" name="Google Shape;155;p7:notes"/>
-          <p:cNvSpPr txBox="1"/>
-          <p:nvPr>
-            <p:ph idx="1" type="body"/>
-          </p:nvPr>
-        </p:nvSpPr>
-        <p:spPr>
-          <a:xfrm>
-            <a:off x="0" y="0"/>
-            <a:ext cx="3000000" cy="3000000"/>
-          </a:xfrm>
-          <a:prstGeom prst="rect">
-            <a:avLst/>
-          </a:prstGeom>
-          <a:noFill/>
-          <a:ln>
-            <a:noFill/>
-          </a:ln>
-        </p:spPr>
-        <p:txBody>
-          <a:bodyPr anchorCtr="0" anchor="t" bIns="45700" lIns="91425" spcFirstLastPara="1" rIns="91425" wrap="square" tIns="45700">
-            <a:noAutofit/>
-          </a:bodyPr>
-          <a:lstStyle/>
-          <a:p>
-            <a:pPr indent="0" lvl="0" marL="0" rtl="0" algn="l">
-              <a:spcBef>
-                <a:spcPts val="0"/>
-              </a:spcBef>
-              <a:spcAft>
-                <a:spcPts val="0"/>
-              </a:spcAft>
-              <a:buNone/>
-            </a:pPr>
-            <a:r>
-              <a:rPr lang="en-US"/>
-              <a:t>Explain tidy data principles (Wickham 2014) in the context of forest inventories.</a:t>
-            </a:r>
-            <a:endParaRPr/>
-          </a:p>
-        </p:txBody>
-      </p:sp>
-      <p:sp>
-        <p:nvSpPr>
-          <p:cNvPr id="156" name="Google Shape;156;p7:notes"/>
-          <p:cNvSpPr txBox="1"/>
-          <p:nvPr>
-            <p:ph idx="12" type="sldNum"/>
-          </p:nvPr>
-        </p:nvSpPr>
-        <p:spPr>
-          <a:xfrm>
-            <a:off x="0" y="0"/>
-            <a:ext cx="3000000" cy="3000000"/>
-          </a:xfrm>
-          <a:prstGeom prst="rect">
-            <a:avLst/>
-          </a:prstGeom>
-          <a:noFill/>
-          <a:ln>
-            <a:noFill/>
-          </a:ln>
-        </p:spPr>
-        <p:txBody>
-          <a:bodyPr anchorCtr="0" anchor="ctr" bIns="91425" lIns="91425" spcFirstLastPara="1" rIns="91425" wrap="square" tIns="91425">
-            <a:noAutofit/>
-          </a:bodyPr>
-          <a:lstStyle/>
-          <a:p>
-            <a:pPr indent="0" lvl="0" marL="0" rtl="0" algn="l">
-              <a:spcBef>
-                <a:spcPts val="0"/>
-              </a:spcBef>
-              <a:spcAft>
-                <a:spcPts val="0"/>
-              </a:spcAft>
-              <a:buNone/>
-            </a:pPr>
-            <a:r>
-              <a:t/>
-            </a:r>
-            <a:endParaRPr/>
-          </a:p>
-        </p:txBody>
-      </p:sp>
-    </p:spTree>
-  </p:cSld>
-  <p:clrMapOvr>
-    <a:masterClrMapping/>
-  </p:clrMapOvr>
-</p:notes>
-</file>
-
-<file path=ppt/notesSlides/notesSlide9.xml><?xml version="1.0" encoding="utf-8"?>
-<p:notes xmlns:a="http://schemas.openxmlformats.org/drawingml/2006/main" xmlns:r="http://schemas.openxmlformats.org/officeDocument/2006/relationships" xmlns:mc="http://schemas.openxmlformats.org/markup-compatibility/2006" xmlns:mv="urn:schemas-microsoft-com:mac:vml" xmlns:p="http://schemas.openxmlformats.org/presentationml/2006/main" xmlns:c="http://schemas.openxmlformats.org/drawingml/2006/chart" xmlns:dgm="http://schemas.openxmlformats.org/drawingml/2006/diagram" xmlns:o="urn:schemas-microsoft-com:office:office" xmlns:v="urn:schemas-microsoft-com:vml" xmlns:pvml="urn:schemas-microsoft-com:office:powerpoint" xmlns:com="http://schemas.openxmlformats.org/drawingml/2006/compatibility" xmlns:p14="http://schemas.microsoft.com/office/powerpoint/2010/main" xmlns:p15="http://schemas.microsoft.com/office/powerpoint/2012/main" xmlns:ahyp="http://schemas.microsoft.com/office/drawing/2018/hyperlinkcolor" showMasterPhAnim="0" showMasterSp="0">
-  <p:cSld>
-    <p:spTree>
-      <p:nvGrpSpPr>
-        <p:cNvPr id="163" name="Shape 163"/>
-        <p:cNvGrpSpPr/>
-        <p:nvPr/>
-      </p:nvGrpSpPr>
-      <p:grpSpPr>
-        <a:xfrm>
-          <a:off x="0" y="0"/>
-          <a:ext cx="0" cy="0"/>
-          <a:chOff x="0" y="0"/>
-          <a:chExt cx="0" cy="0"/>
-        </a:xfrm>
-      </p:grpSpPr>
-      <p:sp>
-        <p:nvSpPr>
-          <p:cNvPr id="164" name="Google Shape;164;p8:notes"/>
-          <p:cNvSpPr/>
-          <p:nvPr>
-            <p:ph idx="2" type="sldImg"/>
-          </p:nvPr>
-        </p:nvSpPr>
-        <p:spPr>
-          <a:xfrm>
-            <a:off x="0" y="0"/>
-            <a:ext cx="3000000" cy="3000000"/>
-          </a:xfrm>
-          <a:custGeom>
-            <a:rect b="b" l="l" r="r" t="t"/>
-            <a:pathLst>
-              <a:path extrusionOk="0" h="120000" w="120000">
-                <a:moveTo>
-                  <a:pt x="0" y="0"/>
-                </a:moveTo>
-                <a:lnTo>
-                  <a:pt x="120000" y="0"/>
-                </a:lnTo>
-                <a:lnTo>
-                  <a:pt x="120000" y="120000"/>
-                </a:lnTo>
-                <a:lnTo>
-                  <a:pt x="0" y="120000"/>
-                </a:lnTo>
-                <a:close/>
-              </a:path>
-            </a:pathLst>
-          </a:custGeom>
-          <a:noFill/>
-          <a:ln>
-            <a:noFill/>
-          </a:ln>
-        </p:spPr>
-      </p:sp>
-      <p:sp>
-        <p:nvSpPr>
-          <p:cNvPr id="165" name="Google Shape;165;p8:notes"/>
-          <p:cNvSpPr txBox="1"/>
-          <p:nvPr>
-            <p:ph idx="1" type="body"/>
-          </p:nvPr>
-        </p:nvSpPr>
-        <p:spPr>
-          <a:xfrm>
-            <a:off x="0" y="0"/>
-            <a:ext cx="3000000" cy="3000000"/>
-          </a:xfrm>
-          <a:prstGeom prst="rect">
-            <a:avLst/>
-          </a:prstGeom>
-          <a:noFill/>
-          <a:ln>
-            <a:noFill/>
-          </a:ln>
-        </p:spPr>
-        <p:txBody>
-          <a:bodyPr anchorCtr="0" anchor="t" bIns="45700" lIns="91425" spcFirstLastPara="1" rIns="91425" wrap="square" tIns="45700">
-            <a:noAutofit/>
-          </a:bodyPr>
-          <a:lstStyle/>
-          <a:p>
-            <a:pPr indent="0" lvl="0" marL="0" rtl="0" algn="l">
-              <a:spcBef>
-                <a:spcPts val="0"/>
-              </a:spcBef>
-              <a:spcAft>
-                <a:spcPts val="0"/>
-              </a:spcAft>
-              <a:buNone/>
-            </a:pPr>
-            <a:r>
-              <a:rPr lang="en-US"/>
-              <a:t>Conclude Unit II and introduce Unit III (Data Cleaning and APIs).</a:t>
-            </a:r>
-            <a:endParaRPr/>
-          </a:p>
-        </p:txBody>
-      </p:sp>
-      <p:sp>
-        <p:nvSpPr>
-          <p:cNvPr id="166" name="Google Shape;166;p8:notes"/>
+          <p:cNvPr id="171" name="Google Shape;171;p6:notes"/>
           <p:cNvSpPr txBox="1"/>
           <p:nvPr>
             <p:ph idx="12" type="sldNum"/>
@@ -12683,6 +12883,1295 @@
 </p:sld>
 </file>
 
+<file path=ppt/slides/slide10.xml><?xml version="1.0" encoding="utf-8"?>
+<p:sld xmlns:a="http://schemas.openxmlformats.org/drawingml/2006/main" xmlns:r="http://schemas.openxmlformats.org/officeDocument/2006/relationships" xmlns:mc="http://schemas.openxmlformats.org/markup-compatibility/2006" xmlns:mv="urn:schemas-microsoft-com:mac:vml" xmlns:p="http://schemas.openxmlformats.org/presentationml/2006/main" xmlns:c="http://schemas.openxmlformats.org/drawingml/2006/chart" xmlns:dgm="http://schemas.openxmlformats.org/drawingml/2006/diagram" xmlns:o="urn:schemas-microsoft-com:office:office" xmlns:v="urn:schemas-microsoft-com:vml" xmlns:pvml="urn:schemas-microsoft-com:office:powerpoint" xmlns:com="http://schemas.openxmlformats.org/drawingml/2006/compatibility" xmlns:p14="http://schemas.microsoft.com/office/powerpoint/2010/main" xmlns:p15="http://schemas.microsoft.com/office/powerpoint/2012/main" xmlns:ahyp="http://schemas.microsoft.com/office/drawing/2018/hyperlinkcolor">
+  <p:cSld>
+    <p:bg>
+      <p:bgPr>
+        <a:solidFill>
+          <a:srgbClr val="F8FAFC"/>
+        </a:solidFill>
+      </p:bgPr>
+    </p:bg>
+    <p:spTree>
+      <p:nvGrpSpPr>
+        <p:cNvPr id="181" name="Shape 181"/>
+        <p:cNvGrpSpPr/>
+        <p:nvPr/>
+      </p:nvGrpSpPr>
+      <p:grpSpPr>
+        <a:xfrm>
+          <a:off x="0" y="0"/>
+          <a:ext cx="0" cy="0"/>
+          <a:chOff x="0" y="0"/>
+          <a:chExt cx="0" cy="0"/>
+        </a:xfrm>
+      </p:grpSpPr>
+      <p:sp>
+        <p:nvSpPr>
+          <p:cNvPr id="182" name="Google Shape;182;p23"/>
+          <p:cNvSpPr/>
+          <p:nvPr/>
+        </p:nvSpPr>
+        <p:spPr>
+          <a:xfrm>
+            <a:off x="731520" y="365760"/>
+            <a:ext cx="3840600" cy="320100"/>
+          </a:xfrm>
+          <a:prstGeom prst="roundRect">
+            <a:avLst>
+              <a:gd fmla="val 16667" name="adj"/>
+            </a:avLst>
+          </a:prstGeom>
+          <a:solidFill>
+            <a:srgbClr val="E2E8F0"/>
+          </a:solidFill>
+          <a:ln cap="flat" cmpd="sng" w="9525">
+            <a:solidFill>
+              <a:srgbClr val="CBD5E1"/>
+            </a:solidFill>
+            <a:prstDash val="solid"/>
+            <a:round/>
+            <a:headEnd len="sm" w="sm" type="none"/>
+            <a:tailEnd len="sm" w="sm" type="none"/>
+          </a:ln>
+          <a:effectLst>
+            <a:outerShdw blurRad="40000" rotWithShape="0" dir="5400000" dist="23000">
+              <a:srgbClr val="000000">
+                <a:alpha val="34902"/>
+              </a:srgbClr>
+            </a:outerShdw>
+          </a:effectLst>
+        </p:spPr>
+        <p:txBody>
+          <a:bodyPr anchorCtr="0" anchor="ctr" bIns="45700" lIns="91425" spcFirstLastPara="1" rIns="91425" wrap="square" tIns="45700">
+            <a:noAutofit/>
+          </a:bodyPr>
+          <a:lstStyle/>
+          <a:p>
+            <a:pPr indent="0" lvl="0" marL="0" marR="0" rtl="0" algn="ctr">
+              <a:lnSpc>
+                <a:spcPct val="100000"/>
+              </a:lnSpc>
+              <a:spcBef>
+                <a:spcPts val="0"/>
+              </a:spcBef>
+              <a:spcAft>
+                <a:spcPts val="0"/>
+              </a:spcAft>
+              <a:buNone/>
+            </a:pPr>
+            <a:r>
+              <a:rPr b="1" i="0" lang="en-US" sz="1100" u="none" strike="noStrike">
+                <a:solidFill>
+                  <a:srgbClr val="334155"/>
+                </a:solidFill>
+                <a:latin typeface="Arial"/>
+                <a:ea typeface="Arial"/>
+                <a:cs typeface="Arial"/>
+                <a:sym typeface="Arial"/>
+              </a:rPr>
+              <a:t>TABULAR DATA STANDARDS</a:t>
+            </a:r>
+            <a:endParaRPr b="1" i="0" sz="1100" u="none" strike="noStrike">
+              <a:solidFill>
+                <a:srgbClr val="334155"/>
+              </a:solidFill>
+              <a:latin typeface="Arial"/>
+              <a:ea typeface="Arial"/>
+              <a:cs typeface="Arial"/>
+              <a:sym typeface="Arial"/>
+            </a:endParaRPr>
+          </a:p>
+        </p:txBody>
+      </p:sp>
+      <p:sp>
+        <p:nvSpPr>
+          <p:cNvPr id="183" name="Google Shape;183;p23"/>
+          <p:cNvSpPr txBox="1"/>
+          <p:nvPr/>
+        </p:nvSpPr>
+        <p:spPr>
+          <a:xfrm>
+            <a:off x="731520" y="777240"/>
+            <a:ext cx="10728600" cy="492600"/>
+          </a:xfrm>
+          <a:prstGeom prst="rect">
+            <a:avLst/>
+          </a:prstGeom>
+          <a:noFill/>
+          <a:ln>
+            <a:noFill/>
+          </a:ln>
+        </p:spPr>
+        <p:txBody>
+          <a:bodyPr anchorCtr="0" anchor="t" bIns="45700" lIns="91425" spcFirstLastPara="1" rIns="91425" wrap="square" tIns="45700">
+            <a:spAutoFit/>
+          </a:bodyPr>
+          <a:lstStyle/>
+          <a:p>
+            <a:pPr indent="0" lvl="0" marL="0" marR="0" rtl="0" algn="l">
+              <a:lnSpc>
+                <a:spcPct val="100000"/>
+              </a:lnSpc>
+              <a:spcBef>
+                <a:spcPts val="0"/>
+              </a:spcBef>
+              <a:spcAft>
+                <a:spcPts val="0"/>
+              </a:spcAft>
+              <a:buNone/>
+            </a:pPr>
+            <a:r>
+              <a:rPr b="1" i="0" lang="en-US" sz="2600" u="none" strike="noStrike">
+                <a:solidFill>
+                  <a:srgbClr val="0F172A"/>
+                </a:solidFill>
+                <a:latin typeface="Georgia"/>
+                <a:ea typeface="Georgia"/>
+                <a:cs typeface="Georgia"/>
+                <a:sym typeface="Georgia"/>
+              </a:rPr>
+              <a:t>Tidy Data Principles for Forest Inventory Tables</a:t>
+            </a:r>
+            <a:endParaRPr b="1" i="0" sz="2600" u="none" strike="noStrike">
+              <a:solidFill>
+                <a:srgbClr val="0F172A"/>
+              </a:solidFill>
+              <a:latin typeface="Georgia"/>
+              <a:ea typeface="Georgia"/>
+              <a:cs typeface="Georgia"/>
+              <a:sym typeface="Georgia"/>
+            </a:endParaRPr>
+          </a:p>
+        </p:txBody>
+      </p:sp>
+      <p:sp>
+        <p:nvSpPr>
+          <p:cNvPr id="184" name="Google Shape;184;p23"/>
+          <p:cNvSpPr/>
+          <p:nvPr/>
+        </p:nvSpPr>
+        <p:spPr>
+          <a:xfrm>
+            <a:off x="731520" y="1645920"/>
+            <a:ext cx="3291900" cy="4572000"/>
+          </a:xfrm>
+          <a:prstGeom prst="roundRect">
+            <a:avLst>
+              <a:gd fmla="val 16667" name="adj"/>
+            </a:avLst>
+          </a:prstGeom>
+          <a:solidFill>
+            <a:srgbClr val="FFFFFF"/>
+          </a:solidFill>
+          <a:ln cap="flat" cmpd="sng" w="9525">
+            <a:solidFill>
+              <a:srgbClr val="059669"/>
+            </a:solidFill>
+            <a:prstDash val="solid"/>
+            <a:round/>
+            <a:headEnd len="sm" w="sm" type="none"/>
+            <a:tailEnd len="sm" w="sm" type="none"/>
+          </a:ln>
+          <a:effectLst>
+            <a:outerShdw blurRad="40000" rotWithShape="0" dir="5400000" dist="23000">
+              <a:srgbClr val="000000">
+                <a:alpha val="34902"/>
+              </a:srgbClr>
+            </a:outerShdw>
+          </a:effectLst>
+        </p:spPr>
+        <p:txBody>
+          <a:bodyPr anchorCtr="0" anchor="ctr" bIns="182850" lIns="228600" spcFirstLastPara="1" rIns="228600" wrap="square" tIns="228600">
+            <a:noAutofit/>
+          </a:bodyPr>
+          <a:lstStyle/>
+          <a:p>
+            <a:pPr indent="0" lvl="0" marL="0" marR="0" rtl="0" algn="ctr">
+              <a:lnSpc>
+                <a:spcPct val="100000"/>
+              </a:lnSpc>
+              <a:spcBef>
+                <a:spcPts val="0"/>
+              </a:spcBef>
+              <a:spcAft>
+                <a:spcPts val="0"/>
+              </a:spcAft>
+              <a:buNone/>
+            </a:pPr>
+            <a:r>
+              <a:rPr b="1" i="0" lang="en-US" sz="1020" u="none" strike="noStrike">
+                <a:solidFill>
+                  <a:srgbClr val="059669"/>
+                </a:solidFill>
+                <a:latin typeface="Arial"/>
+                <a:ea typeface="Arial"/>
+                <a:cs typeface="Arial"/>
+                <a:sym typeface="Arial"/>
+              </a:rPr>
+              <a:t>RULE 1: EACH STEM IS A ROW</a:t>
+            </a:r>
+            <a:endParaRPr b="1" i="0" sz="1020" u="none" strike="noStrike">
+              <a:solidFill>
+                <a:srgbClr val="059669"/>
+              </a:solidFill>
+              <a:latin typeface="Arial"/>
+              <a:ea typeface="Arial"/>
+              <a:cs typeface="Arial"/>
+              <a:sym typeface="Arial"/>
+            </a:endParaRPr>
+          </a:p>
+          <a:p>
+            <a:pPr indent="0" lvl="0" marL="0" marR="0" rtl="0" algn="l">
+              <a:lnSpc>
+                <a:spcPct val="100000"/>
+              </a:lnSpc>
+              <a:spcBef>
+                <a:spcPts val="600"/>
+              </a:spcBef>
+              <a:spcAft>
+                <a:spcPts val="0"/>
+              </a:spcAft>
+              <a:buNone/>
+            </a:pPr>
+            <a:r>
+              <a:rPr b="1" i="0" lang="en-US" sz="3060" u="none" strike="noStrike">
+                <a:solidFill>
+                  <a:srgbClr val="0F172A"/>
+                </a:solidFill>
+                <a:latin typeface="Georgia"/>
+                <a:ea typeface="Georgia"/>
+                <a:cs typeface="Georgia"/>
+                <a:sym typeface="Georgia"/>
+              </a:rPr>
+              <a:t>Unique Observation</a:t>
+            </a:r>
+            <a:endParaRPr b="1" i="0" sz="1020" u="none" strike="noStrike">
+              <a:solidFill>
+                <a:srgbClr val="059669"/>
+              </a:solidFill>
+              <a:latin typeface="Arial"/>
+              <a:ea typeface="Arial"/>
+              <a:cs typeface="Arial"/>
+              <a:sym typeface="Arial"/>
+            </a:endParaRPr>
+          </a:p>
+          <a:p>
+            <a:pPr indent="0" lvl="0" marL="0" marR="0" rtl="0" algn="l">
+              <a:lnSpc>
+                <a:spcPct val="100000"/>
+              </a:lnSpc>
+              <a:spcBef>
+                <a:spcPts val="600"/>
+              </a:spcBef>
+              <a:spcAft>
+                <a:spcPts val="0"/>
+              </a:spcAft>
+              <a:buNone/>
+            </a:pPr>
+            <a:r>
+              <a:rPr b="0" i="0" lang="en-US" sz="1105" u="none" strike="noStrike">
+                <a:solidFill>
+                  <a:srgbClr val="475569"/>
+                </a:solidFill>
+                <a:latin typeface="Arial"/>
+                <a:ea typeface="Arial"/>
+                <a:cs typeface="Arial"/>
+                <a:sym typeface="Arial"/>
+              </a:rPr>
+              <a:t>Every single row in the data frame represents exactly one measured tree or plot entity.</a:t>
+            </a:r>
+            <a:br>
+              <a:rPr b="0" i="0" lang="en-US" sz="1105" u="none" strike="noStrike">
+                <a:solidFill>
+                  <a:srgbClr val="475569"/>
+                </a:solidFill>
+                <a:latin typeface="Arial"/>
+                <a:ea typeface="Arial"/>
+                <a:cs typeface="Arial"/>
+                <a:sym typeface="Arial"/>
+              </a:rPr>
+            </a:br>
+            <a:r>
+              <a:rPr b="0" i="0" lang="en-US" sz="1105" u="none" strike="noStrike">
+                <a:solidFill>
+                  <a:srgbClr val="475569"/>
+                </a:solidFill>
+                <a:latin typeface="Arial"/>
+                <a:ea typeface="Arial"/>
+                <a:cs typeface="Arial"/>
+                <a:sym typeface="Arial"/>
+              </a:rPr>
+              <a:t>Never combine multi-stem clump measurements into one row cell.</a:t>
+            </a:r>
+            <a:endParaRPr b="1" i="0" sz="1020" u="none" strike="noStrike">
+              <a:solidFill>
+                <a:srgbClr val="059669"/>
+              </a:solidFill>
+              <a:latin typeface="Arial"/>
+              <a:ea typeface="Arial"/>
+              <a:cs typeface="Arial"/>
+              <a:sym typeface="Arial"/>
+            </a:endParaRPr>
+          </a:p>
+        </p:txBody>
+      </p:sp>
+      <p:sp>
+        <p:nvSpPr>
+          <p:cNvPr id="185" name="Google Shape;185;p23"/>
+          <p:cNvSpPr/>
+          <p:nvPr/>
+        </p:nvSpPr>
+        <p:spPr>
+          <a:xfrm>
+            <a:off x="4389120" y="1645920"/>
+            <a:ext cx="3291900" cy="4572000"/>
+          </a:xfrm>
+          <a:prstGeom prst="roundRect">
+            <a:avLst>
+              <a:gd fmla="val 16667" name="adj"/>
+            </a:avLst>
+          </a:prstGeom>
+          <a:solidFill>
+            <a:srgbClr val="FFFFFF"/>
+          </a:solidFill>
+          <a:ln cap="flat" cmpd="sng" w="9525">
+            <a:solidFill>
+              <a:srgbClr val="0284C7"/>
+            </a:solidFill>
+            <a:prstDash val="solid"/>
+            <a:round/>
+            <a:headEnd len="sm" w="sm" type="none"/>
+            <a:tailEnd len="sm" w="sm" type="none"/>
+          </a:ln>
+          <a:effectLst>
+            <a:outerShdw blurRad="40000" rotWithShape="0" dir="5400000" dist="23000">
+              <a:srgbClr val="000000">
+                <a:alpha val="34902"/>
+              </a:srgbClr>
+            </a:outerShdw>
+          </a:effectLst>
+        </p:spPr>
+        <p:txBody>
+          <a:bodyPr anchorCtr="0" anchor="ctr" bIns="182850" lIns="228600" spcFirstLastPara="1" rIns="228600" wrap="square" tIns="228600">
+            <a:noAutofit/>
+          </a:bodyPr>
+          <a:lstStyle/>
+          <a:p>
+            <a:pPr indent="0" lvl="0" marL="0" marR="0" rtl="0" algn="ctr">
+              <a:lnSpc>
+                <a:spcPct val="100000"/>
+              </a:lnSpc>
+              <a:spcBef>
+                <a:spcPts val="0"/>
+              </a:spcBef>
+              <a:spcAft>
+                <a:spcPts val="0"/>
+              </a:spcAft>
+              <a:buNone/>
+            </a:pPr>
+            <a:r>
+              <a:rPr b="1" i="0" lang="en-US" sz="1200" u="none" strike="noStrike">
+                <a:solidFill>
+                  <a:srgbClr val="0284C7"/>
+                </a:solidFill>
+                <a:latin typeface="Arial"/>
+                <a:ea typeface="Arial"/>
+                <a:cs typeface="Arial"/>
+                <a:sym typeface="Arial"/>
+              </a:rPr>
+              <a:t>RULE 2: EACH ATTRIBUTE IS A COLUMN</a:t>
+            </a:r>
+            <a:endParaRPr b="1" i="0" sz="1200" u="none" strike="noStrike">
+              <a:solidFill>
+                <a:srgbClr val="0284C7"/>
+              </a:solidFill>
+              <a:latin typeface="Arial"/>
+              <a:ea typeface="Arial"/>
+              <a:cs typeface="Arial"/>
+              <a:sym typeface="Arial"/>
+            </a:endParaRPr>
+          </a:p>
+          <a:p>
+            <a:pPr indent="0" lvl="0" marL="0" marR="0" rtl="0" algn="l">
+              <a:lnSpc>
+                <a:spcPct val="100000"/>
+              </a:lnSpc>
+              <a:spcBef>
+                <a:spcPts val="600"/>
+              </a:spcBef>
+              <a:spcAft>
+                <a:spcPts val="0"/>
+              </a:spcAft>
+              <a:buNone/>
+            </a:pPr>
+            <a:r>
+              <a:rPr b="1" i="0" lang="en-US" sz="3600" u="none" strike="noStrike">
+                <a:solidFill>
+                  <a:srgbClr val="0F172A"/>
+                </a:solidFill>
+                <a:latin typeface="Georgia"/>
+                <a:ea typeface="Georgia"/>
+                <a:cs typeface="Georgia"/>
+                <a:sym typeface="Georgia"/>
+              </a:rPr>
+              <a:t>Distinct Variable</a:t>
+            </a:r>
+            <a:endParaRPr b="1" i="0" sz="1200" u="none" strike="noStrike">
+              <a:solidFill>
+                <a:srgbClr val="0284C7"/>
+              </a:solidFill>
+              <a:latin typeface="Arial"/>
+              <a:ea typeface="Arial"/>
+              <a:cs typeface="Arial"/>
+              <a:sym typeface="Arial"/>
+            </a:endParaRPr>
+          </a:p>
+          <a:p>
+            <a:pPr indent="0" lvl="0" marL="0" marR="0" rtl="0" algn="l">
+              <a:lnSpc>
+                <a:spcPct val="100000"/>
+              </a:lnSpc>
+              <a:spcBef>
+                <a:spcPts val="600"/>
+              </a:spcBef>
+              <a:spcAft>
+                <a:spcPts val="0"/>
+              </a:spcAft>
+              <a:buNone/>
+            </a:pPr>
+            <a:r>
+              <a:rPr b="0" i="0" lang="en-US" sz="1300" u="none" strike="noStrike">
+                <a:solidFill>
+                  <a:srgbClr val="475569"/>
+                </a:solidFill>
+                <a:latin typeface="Arial"/>
+                <a:ea typeface="Arial"/>
+                <a:cs typeface="Arial"/>
+                <a:sym typeface="Arial"/>
+              </a:rPr>
+              <a:t>Plot_ID, Stem_ID, Species, DBH_cm, Height_m, Decay_Class must each occupy distinct columns with explicit data types.</a:t>
+            </a:r>
+            <a:endParaRPr b="1" i="0" sz="1200" u="none" strike="noStrike">
+              <a:solidFill>
+                <a:srgbClr val="0284C7"/>
+              </a:solidFill>
+              <a:latin typeface="Arial"/>
+              <a:ea typeface="Arial"/>
+              <a:cs typeface="Arial"/>
+              <a:sym typeface="Arial"/>
+            </a:endParaRPr>
+          </a:p>
+        </p:txBody>
+      </p:sp>
+      <p:sp>
+        <p:nvSpPr>
+          <p:cNvPr id="186" name="Google Shape;186;p23"/>
+          <p:cNvSpPr/>
+          <p:nvPr/>
+        </p:nvSpPr>
+        <p:spPr>
+          <a:xfrm>
+            <a:off x="8046720" y="1645920"/>
+            <a:ext cx="3413400" cy="4572000"/>
+          </a:xfrm>
+          <a:prstGeom prst="roundRect">
+            <a:avLst>
+              <a:gd fmla="val 16667" name="adj"/>
+            </a:avLst>
+          </a:prstGeom>
+          <a:solidFill>
+            <a:srgbClr val="FFFFFF"/>
+          </a:solidFill>
+          <a:ln cap="flat" cmpd="sng" w="9525">
+            <a:solidFill>
+              <a:srgbClr val="D97706"/>
+            </a:solidFill>
+            <a:prstDash val="solid"/>
+            <a:round/>
+            <a:headEnd len="sm" w="sm" type="none"/>
+            <a:tailEnd len="sm" w="sm" type="none"/>
+          </a:ln>
+          <a:effectLst>
+            <a:outerShdw blurRad="40000" rotWithShape="0" dir="5400000" dist="23000">
+              <a:srgbClr val="000000">
+                <a:alpha val="34902"/>
+              </a:srgbClr>
+            </a:outerShdw>
+          </a:effectLst>
+        </p:spPr>
+        <p:txBody>
+          <a:bodyPr anchorCtr="0" anchor="ctr" bIns="182850" lIns="228600" spcFirstLastPara="1" rIns="228600" wrap="square" tIns="228600">
+            <a:noAutofit/>
+          </a:bodyPr>
+          <a:lstStyle/>
+          <a:p>
+            <a:pPr indent="0" lvl="0" marL="0" marR="0" rtl="0" algn="ctr">
+              <a:lnSpc>
+                <a:spcPct val="100000"/>
+              </a:lnSpc>
+              <a:spcBef>
+                <a:spcPts val="0"/>
+              </a:spcBef>
+              <a:spcAft>
+                <a:spcPts val="0"/>
+              </a:spcAft>
+              <a:buNone/>
+            </a:pPr>
+            <a:r>
+              <a:rPr b="1" i="0" lang="en-US" sz="1200" u="none" strike="noStrike">
+                <a:solidFill>
+                  <a:srgbClr val="D97706"/>
+                </a:solidFill>
+                <a:latin typeface="Arial"/>
+                <a:ea typeface="Arial"/>
+                <a:cs typeface="Arial"/>
+                <a:sym typeface="Arial"/>
+              </a:rPr>
+              <a:t>RULE 3: ONE OBSERVATION LEVEL PER TABLE</a:t>
+            </a:r>
+            <a:endParaRPr b="1" i="0" sz="1200" u="none" strike="noStrike">
+              <a:solidFill>
+                <a:srgbClr val="D97706"/>
+              </a:solidFill>
+              <a:latin typeface="Arial"/>
+              <a:ea typeface="Arial"/>
+              <a:cs typeface="Arial"/>
+              <a:sym typeface="Arial"/>
+            </a:endParaRPr>
+          </a:p>
+          <a:p>
+            <a:pPr indent="0" lvl="0" marL="0" marR="0" rtl="0" algn="l">
+              <a:lnSpc>
+                <a:spcPct val="100000"/>
+              </a:lnSpc>
+              <a:spcBef>
+                <a:spcPts val="600"/>
+              </a:spcBef>
+              <a:spcAft>
+                <a:spcPts val="0"/>
+              </a:spcAft>
+              <a:buNone/>
+            </a:pPr>
+            <a:r>
+              <a:rPr b="1" i="0" lang="en-US" sz="3600" u="none" strike="noStrike">
+                <a:solidFill>
+                  <a:srgbClr val="0F172A"/>
+                </a:solidFill>
+                <a:latin typeface="Georgia"/>
+                <a:ea typeface="Georgia"/>
+                <a:cs typeface="Georgia"/>
+                <a:sym typeface="Georgia"/>
+              </a:rPr>
+              <a:t>Relational Integrity</a:t>
+            </a:r>
+            <a:endParaRPr b="1" i="0" sz="1200" u="none" strike="noStrike">
+              <a:solidFill>
+                <a:srgbClr val="D97706"/>
+              </a:solidFill>
+              <a:latin typeface="Arial"/>
+              <a:ea typeface="Arial"/>
+              <a:cs typeface="Arial"/>
+              <a:sym typeface="Arial"/>
+            </a:endParaRPr>
+          </a:p>
+          <a:p>
+            <a:pPr indent="0" lvl="0" marL="0" marR="0" rtl="0" algn="l">
+              <a:lnSpc>
+                <a:spcPct val="100000"/>
+              </a:lnSpc>
+              <a:spcBef>
+                <a:spcPts val="600"/>
+              </a:spcBef>
+              <a:spcAft>
+                <a:spcPts val="0"/>
+              </a:spcAft>
+              <a:buNone/>
+            </a:pPr>
+            <a:r>
+              <a:rPr b="0" i="0" lang="en-US" sz="1300" u="none" strike="noStrike">
+                <a:solidFill>
+                  <a:srgbClr val="475569"/>
+                </a:solidFill>
+                <a:latin typeface="Arial"/>
+                <a:ea typeface="Arial"/>
+                <a:cs typeface="Arial"/>
+                <a:sym typeface="Arial"/>
+              </a:rPr>
+              <a:t>Tree-level measurements belong in tree_data.csv.</a:t>
+            </a:r>
+            <a:br>
+              <a:rPr b="0" i="0" lang="en-US" sz="1300" u="none" strike="noStrike">
+                <a:solidFill>
+                  <a:srgbClr val="475569"/>
+                </a:solidFill>
+                <a:latin typeface="Arial"/>
+                <a:ea typeface="Arial"/>
+                <a:cs typeface="Arial"/>
+                <a:sym typeface="Arial"/>
+              </a:rPr>
+            </a:br>
+            <a:r>
+              <a:rPr b="0" i="0" lang="en-US" sz="1300" u="none" strike="noStrike">
+                <a:solidFill>
+                  <a:srgbClr val="475569"/>
+                </a:solidFill>
+                <a:latin typeface="Arial"/>
+                <a:ea typeface="Arial"/>
+                <a:cs typeface="Arial"/>
+                <a:sym typeface="Arial"/>
+              </a:rPr>
+              <a:t>Plot-level coordinates and slope belong in plot_metadata.csv.</a:t>
+            </a:r>
+            <a:br>
+              <a:rPr b="0" i="0" lang="en-US" sz="1300" u="none" strike="noStrike">
+                <a:solidFill>
+                  <a:srgbClr val="475569"/>
+                </a:solidFill>
+                <a:latin typeface="Arial"/>
+                <a:ea typeface="Arial"/>
+                <a:cs typeface="Arial"/>
+                <a:sym typeface="Arial"/>
+              </a:rPr>
+            </a:br>
+            <a:r>
+              <a:rPr b="0" i="0" lang="en-US" sz="1300" u="none" strike="noStrike">
+                <a:solidFill>
+                  <a:srgbClr val="475569"/>
+                </a:solidFill>
+                <a:latin typeface="Arial"/>
+                <a:ea typeface="Arial"/>
+                <a:cs typeface="Arial"/>
+                <a:sym typeface="Arial"/>
+              </a:rPr>
+              <a:t>Joined by Plot_ID key.</a:t>
+            </a:r>
+            <a:endParaRPr b="1" i="0" sz="1200" u="none" strike="noStrike">
+              <a:solidFill>
+                <a:srgbClr val="D97706"/>
+              </a:solidFill>
+              <a:latin typeface="Arial"/>
+              <a:ea typeface="Arial"/>
+              <a:cs typeface="Arial"/>
+              <a:sym typeface="Arial"/>
+            </a:endParaRPr>
+          </a:p>
+        </p:txBody>
+      </p:sp>
+    </p:spTree>
+  </p:cSld>
+  <p:clrMapOvr>
+    <a:masterClrMapping/>
+  </p:clrMapOvr>
+</p:sld>
+</file>
+
+<file path=ppt/slides/slide11.xml><?xml version="1.0" encoding="utf-8"?>
+<p:sld xmlns:a="http://schemas.openxmlformats.org/drawingml/2006/main" xmlns:r="http://schemas.openxmlformats.org/officeDocument/2006/relationships" xmlns:mc="http://schemas.openxmlformats.org/markup-compatibility/2006" xmlns:mv="urn:schemas-microsoft-com:mac:vml" xmlns:p="http://schemas.openxmlformats.org/presentationml/2006/main" xmlns:c="http://schemas.openxmlformats.org/drawingml/2006/chart" xmlns:dgm="http://schemas.openxmlformats.org/drawingml/2006/diagram" xmlns:o="urn:schemas-microsoft-com:office:office" xmlns:v="urn:schemas-microsoft-com:vml" xmlns:pvml="urn:schemas-microsoft-com:office:powerpoint" xmlns:com="http://schemas.openxmlformats.org/drawingml/2006/compatibility" xmlns:p14="http://schemas.microsoft.com/office/powerpoint/2010/main" xmlns:p15="http://schemas.microsoft.com/office/powerpoint/2012/main" xmlns:ahyp="http://schemas.microsoft.com/office/drawing/2018/hyperlinkcolor">
+  <p:cSld>
+    <p:bg>
+      <p:bgPr>
+        <a:solidFill>
+          <a:srgbClr val="F8FAFC"/>
+        </a:solidFill>
+      </p:bgPr>
+    </p:bg>
+    <p:spTree>
+      <p:nvGrpSpPr>
+        <p:cNvPr id="191" name="Shape 191"/>
+        <p:cNvGrpSpPr/>
+        <p:nvPr/>
+      </p:nvGrpSpPr>
+      <p:grpSpPr>
+        <a:xfrm>
+          <a:off x="0" y="0"/>
+          <a:ext cx="0" cy="0"/>
+          <a:chOff x="0" y="0"/>
+          <a:chExt cx="0" cy="0"/>
+        </a:xfrm>
+      </p:grpSpPr>
+      <p:sp>
+        <p:nvSpPr>
+          <p:cNvPr id="192" name="Google Shape;192;p24"/>
+          <p:cNvSpPr/>
+          <p:nvPr/>
+        </p:nvSpPr>
+        <p:spPr>
+          <a:xfrm>
+            <a:off x="731520" y="365760"/>
+            <a:ext cx="3840600" cy="320100"/>
+          </a:xfrm>
+          <a:prstGeom prst="roundRect">
+            <a:avLst>
+              <a:gd fmla="val 16667" name="adj"/>
+            </a:avLst>
+          </a:prstGeom>
+          <a:solidFill>
+            <a:srgbClr val="E2E8F0"/>
+          </a:solidFill>
+          <a:ln cap="flat" cmpd="sng" w="9525">
+            <a:solidFill>
+              <a:srgbClr val="CBD5E1"/>
+            </a:solidFill>
+            <a:prstDash val="solid"/>
+            <a:round/>
+            <a:headEnd len="sm" w="sm" type="none"/>
+            <a:tailEnd len="sm" w="sm" type="none"/>
+          </a:ln>
+          <a:effectLst>
+            <a:outerShdw blurRad="40000" rotWithShape="0" dir="5400000" dist="23000">
+              <a:srgbClr val="000000">
+                <a:alpha val="34902"/>
+              </a:srgbClr>
+            </a:outerShdw>
+          </a:effectLst>
+        </p:spPr>
+        <p:txBody>
+          <a:bodyPr anchorCtr="0" anchor="ctr" bIns="45700" lIns="91425" spcFirstLastPara="1" rIns="91425" wrap="square" tIns="45700">
+            <a:noAutofit/>
+          </a:bodyPr>
+          <a:lstStyle/>
+          <a:p>
+            <a:pPr indent="0" lvl="0" marL="0" marR="0" rtl="0" algn="ctr">
+              <a:lnSpc>
+                <a:spcPct val="100000"/>
+              </a:lnSpc>
+              <a:spcBef>
+                <a:spcPts val="0"/>
+              </a:spcBef>
+              <a:spcAft>
+                <a:spcPts val="0"/>
+              </a:spcAft>
+              <a:buNone/>
+            </a:pPr>
+            <a:r>
+              <a:rPr b="1" i="0" lang="en-US" sz="1100" u="none" strike="noStrike">
+                <a:solidFill>
+                  <a:srgbClr val="334155"/>
+                </a:solidFill>
+                <a:latin typeface="Arial"/>
+                <a:ea typeface="Arial"/>
+                <a:cs typeface="Arial"/>
+                <a:sym typeface="Arial"/>
+              </a:rPr>
+              <a:t>UNIT II SYNTHESIS</a:t>
+            </a:r>
+            <a:endParaRPr b="1" i="0" sz="1100" u="none" strike="noStrike">
+              <a:solidFill>
+                <a:srgbClr val="334155"/>
+              </a:solidFill>
+              <a:latin typeface="Arial"/>
+              <a:ea typeface="Arial"/>
+              <a:cs typeface="Arial"/>
+              <a:sym typeface="Arial"/>
+            </a:endParaRPr>
+          </a:p>
+        </p:txBody>
+      </p:sp>
+      <p:sp>
+        <p:nvSpPr>
+          <p:cNvPr id="193" name="Google Shape;193;p24"/>
+          <p:cNvSpPr txBox="1"/>
+          <p:nvPr/>
+        </p:nvSpPr>
+        <p:spPr>
+          <a:xfrm>
+            <a:off x="731520" y="777240"/>
+            <a:ext cx="10728600" cy="731400"/>
+          </a:xfrm>
+          <a:prstGeom prst="rect">
+            <a:avLst/>
+          </a:prstGeom>
+          <a:noFill/>
+          <a:ln>
+            <a:noFill/>
+          </a:ln>
+        </p:spPr>
+        <p:txBody>
+          <a:bodyPr anchorCtr="0" anchor="t" bIns="45700" lIns="91425" spcFirstLastPara="1" rIns="91425" wrap="square" tIns="45700">
+            <a:spAutoFit/>
+          </a:bodyPr>
+          <a:lstStyle/>
+          <a:p>
+            <a:pPr indent="0" lvl="0" marL="0" marR="0" rtl="0" algn="l">
+              <a:lnSpc>
+                <a:spcPct val="100000"/>
+              </a:lnSpc>
+              <a:spcBef>
+                <a:spcPts val="0"/>
+              </a:spcBef>
+              <a:spcAft>
+                <a:spcPts val="0"/>
+              </a:spcAft>
+              <a:buNone/>
+            </a:pPr>
+            <a:r>
+              <a:rPr b="1" i="0" lang="en-US" sz="2600" u="none" strike="noStrike">
+                <a:solidFill>
+                  <a:srgbClr val="0F172A"/>
+                </a:solidFill>
+                <a:latin typeface="Georgia"/>
+                <a:ea typeface="Georgia"/>
+                <a:cs typeface="Georgia"/>
+                <a:sym typeface="Georgia"/>
+              </a:rPr>
+              <a:t>Summary: Core Programming Rules for Foresters</a:t>
+            </a:r>
+            <a:endParaRPr b="1" i="0" sz="2600" u="none" strike="noStrike">
+              <a:solidFill>
+                <a:srgbClr val="0F172A"/>
+              </a:solidFill>
+              <a:latin typeface="Georgia"/>
+              <a:ea typeface="Georgia"/>
+              <a:cs typeface="Georgia"/>
+              <a:sym typeface="Georgia"/>
+            </a:endParaRPr>
+          </a:p>
+        </p:txBody>
+      </p:sp>
+      <p:sp>
+        <p:nvSpPr>
+          <p:cNvPr id="194" name="Google Shape;194;p24"/>
+          <p:cNvSpPr/>
+          <p:nvPr/>
+        </p:nvSpPr>
+        <p:spPr>
+          <a:xfrm>
+            <a:off x="731520" y="1645920"/>
+            <a:ext cx="5120700" cy="4572000"/>
+          </a:xfrm>
+          <a:prstGeom prst="roundRect">
+            <a:avLst>
+              <a:gd fmla="val 16667" name="adj"/>
+            </a:avLst>
+          </a:prstGeom>
+          <a:solidFill>
+            <a:srgbClr val="FFFFFF"/>
+          </a:solidFill>
+          <a:ln cap="flat" cmpd="sng" w="9525">
+            <a:solidFill>
+              <a:srgbClr val="D97706"/>
+            </a:solidFill>
+            <a:prstDash val="solid"/>
+            <a:round/>
+            <a:headEnd len="sm" w="sm" type="none"/>
+            <a:tailEnd len="sm" w="sm" type="none"/>
+          </a:ln>
+          <a:effectLst>
+            <a:outerShdw blurRad="40000" rotWithShape="0" dir="5400000" dist="23000">
+              <a:srgbClr val="000000">
+                <a:alpha val="34902"/>
+              </a:srgbClr>
+            </a:outerShdw>
+          </a:effectLst>
+        </p:spPr>
+        <p:txBody>
+          <a:bodyPr anchorCtr="0" anchor="ctr" bIns="182850" lIns="228600" spcFirstLastPara="1" rIns="228600" wrap="square" tIns="228600">
+            <a:noAutofit/>
+          </a:bodyPr>
+          <a:lstStyle/>
+          <a:p>
+            <a:pPr indent="0" lvl="0" marL="0" marR="0" rtl="0" algn="ctr">
+              <a:lnSpc>
+                <a:spcPct val="100000"/>
+              </a:lnSpc>
+              <a:spcBef>
+                <a:spcPts val="0"/>
+              </a:spcBef>
+              <a:spcAft>
+                <a:spcPts val="0"/>
+              </a:spcAft>
+              <a:buNone/>
+            </a:pPr>
+            <a:r>
+              <a:rPr b="1" i="0" lang="en-US" sz="1200" u="none" strike="noStrike">
+                <a:solidFill>
+                  <a:srgbClr val="D97706"/>
+                </a:solidFill>
+                <a:latin typeface="Arial"/>
+                <a:ea typeface="Arial"/>
+                <a:cs typeface="Arial"/>
+                <a:sym typeface="Arial"/>
+              </a:rPr>
+              <a:t>DEFENSIVE HABITS</a:t>
+            </a:r>
+            <a:endParaRPr b="1" i="0" sz="1200" u="none" strike="noStrike">
+              <a:solidFill>
+                <a:srgbClr val="D97706"/>
+              </a:solidFill>
+              <a:latin typeface="Arial"/>
+              <a:ea typeface="Arial"/>
+              <a:cs typeface="Arial"/>
+              <a:sym typeface="Arial"/>
+            </a:endParaRPr>
+          </a:p>
+          <a:p>
+            <a:pPr indent="0" lvl="0" marL="0" marR="0" rtl="0" algn="l">
+              <a:lnSpc>
+                <a:spcPct val="100000"/>
+              </a:lnSpc>
+              <a:spcBef>
+                <a:spcPts val="600"/>
+              </a:spcBef>
+              <a:spcAft>
+                <a:spcPts val="0"/>
+              </a:spcAft>
+              <a:buNone/>
+            </a:pPr>
+            <a:r>
+              <a:rPr b="1" i="0" lang="en-US" sz="3600" u="none" strike="noStrike">
+                <a:solidFill>
+                  <a:srgbClr val="0F172A"/>
+                </a:solidFill>
+                <a:latin typeface="Georgia"/>
+                <a:ea typeface="Georgia"/>
+                <a:cs typeface="Georgia"/>
+                <a:sym typeface="Georgia"/>
+              </a:rPr>
+              <a:t>Never Trust Input Data</a:t>
+            </a:r>
+            <a:endParaRPr b="1" i="0" sz="1200" u="none" strike="noStrike">
+              <a:solidFill>
+                <a:srgbClr val="D97706"/>
+              </a:solidFill>
+              <a:latin typeface="Arial"/>
+              <a:ea typeface="Arial"/>
+              <a:cs typeface="Arial"/>
+              <a:sym typeface="Arial"/>
+            </a:endParaRPr>
+          </a:p>
+          <a:p>
+            <a:pPr indent="0" lvl="0" marL="0" marR="0" rtl="0" algn="l">
+              <a:lnSpc>
+                <a:spcPct val="100000"/>
+              </a:lnSpc>
+              <a:spcBef>
+                <a:spcPts val="600"/>
+              </a:spcBef>
+              <a:spcAft>
+                <a:spcPts val="0"/>
+              </a:spcAft>
+              <a:buNone/>
+            </a:pPr>
+            <a:r>
+              <a:rPr b="0" i="0" lang="en-US" sz="1300" u="none" strike="noStrike">
+                <a:solidFill>
+                  <a:srgbClr val="475569"/>
+                </a:solidFill>
+                <a:latin typeface="Arial"/>
+                <a:ea typeface="Arial"/>
+                <a:cs typeface="Arial"/>
+                <a:sym typeface="Arial"/>
+              </a:rPr>
+              <a:t>1. Always inspect column structures with str() and summary().</a:t>
+            </a:r>
+            <a:br>
+              <a:rPr b="0" i="0" lang="en-US" sz="1300" u="none" strike="noStrike">
+                <a:solidFill>
+                  <a:srgbClr val="475569"/>
+                </a:solidFill>
+                <a:latin typeface="Arial"/>
+                <a:ea typeface="Arial"/>
+                <a:cs typeface="Arial"/>
+                <a:sym typeface="Arial"/>
+              </a:rPr>
+            </a:br>
+            <a:r>
+              <a:rPr b="0" i="0" lang="en-US" sz="1300" u="none" strike="noStrike">
+                <a:solidFill>
+                  <a:srgbClr val="475569"/>
+                </a:solidFill>
+                <a:latin typeface="Arial"/>
+                <a:ea typeface="Arial"/>
+                <a:cs typeface="Arial"/>
+                <a:sym typeface="Arial"/>
+              </a:rPr>
+              <a:t>2. Use vectorized assertions to verify biological boundaries (5 &lt;= DBH &lt;= 350).</a:t>
+            </a:r>
+            <a:br>
+              <a:rPr b="0" i="0" lang="en-US" sz="1300" u="none" strike="noStrike">
+                <a:solidFill>
+                  <a:srgbClr val="475569"/>
+                </a:solidFill>
+                <a:latin typeface="Arial"/>
+                <a:ea typeface="Arial"/>
+                <a:cs typeface="Arial"/>
+                <a:sym typeface="Arial"/>
+              </a:rPr>
+            </a:br>
+            <a:r>
+              <a:rPr b="0" i="0" lang="en-US" sz="1300" u="none" strike="noStrike">
+                <a:solidFill>
+                  <a:srgbClr val="475569"/>
+                </a:solidFill>
+                <a:latin typeface="Arial"/>
+                <a:ea typeface="Arial"/>
+                <a:cs typeface="Arial"/>
+                <a:sym typeface="Arial"/>
+              </a:rPr>
+              <a:t>3. Avoid scalar 'if' for multi-tree operations.</a:t>
+            </a:r>
+            <a:br>
+              <a:rPr b="0" i="0" lang="en-US" sz="1300" u="none" strike="noStrike">
+                <a:solidFill>
+                  <a:srgbClr val="475569"/>
+                </a:solidFill>
+                <a:latin typeface="Arial"/>
+                <a:ea typeface="Arial"/>
+                <a:cs typeface="Arial"/>
+                <a:sym typeface="Arial"/>
+              </a:rPr>
+            </a:br>
+            <a:r>
+              <a:rPr b="0" i="0" lang="en-US" sz="1300" u="none" strike="noStrike">
+                <a:solidFill>
+                  <a:srgbClr val="475569"/>
+                </a:solidFill>
+                <a:latin typeface="Arial"/>
+                <a:ea typeface="Arial"/>
+                <a:cs typeface="Arial"/>
+                <a:sym typeface="Arial"/>
+              </a:rPr>
+              <a:t>4. Save custom functions in R/ directory scripts.</a:t>
+            </a:r>
+            <a:endParaRPr b="1" i="0" sz="1200" u="none" strike="noStrike">
+              <a:solidFill>
+                <a:srgbClr val="D97706"/>
+              </a:solidFill>
+              <a:latin typeface="Arial"/>
+              <a:ea typeface="Arial"/>
+              <a:cs typeface="Arial"/>
+              <a:sym typeface="Arial"/>
+            </a:endParaRPr>
+          </a:p>
+        </p:txBody>
+      </p:sp>
+      <p:sp>
+        <p:nvSpPr>
+          <p:cNvPr id="195" name="Google Shape;195;p24"/>
+          <p:cNvSpPr/>
+          <p:nvPr/>
+        </p:nvSpPr>
+        <p:spPr>
+          <a:xfrm>
+            <a:off x="6217920" y="1645920"/>
+            <a:ext cx="5242200" cy="4572000"/>
+          </a:xfrm>
+          <a:prstGeom prst="roundRect">
+            <a:avLst>
+              <a:gd fmla="val 16667" name="adj"/>
+            </a:avLst>
+          </a:prstGeom>
+          <a:solidFill>
+            <a:srgbClr val="FFFFFF"/>
+          </a:solidFill>
+          <a:ln cap="flat" cmpd="sng" w="9525">
+            <a:solidFill>
+              <a:srgbClr val="059669"/>
+            </a:solidFill>
+            <a:prstDash val="solid"/>
+            <a:round/>
+            <a:headEnd len="sm" w="sm" type="none"/>
+            <a:tailEnd len="sm" w="sm" type="none"/>
+          </a:ln>
+          <a:effectLst>
+            <a:outerShdw blurRad="40000" rotWithShape="0" dir="5400000" dist="23000">
+              <a:srgbClr val="000000">
+                <a:alpha val="34902"/>
+              </a:srgbClr>
+            </a:outerShdw>
+          </a:effectLst>
+        </p:spPr>
+        <p:txBody>
+          <a:bodyPr anchorCtr="0" anchor="ctr" bIns="182850" lIns="228600" spcFirstLastPara="1" rIns="228600" wrap="square" tIns="228600">
+            <a:noAutofit/>
+          </a:bodyPr>
+          <a:lstStyle/>
+          <a:p>
+            <a:pPr indent="0" lvl="0" marL="0" marR="0" rtl="0" algn="ctr">
+              <a:lnSpc>
+                <a:spcPct val="100000"/>
+              </a:lnSpc>
+              <a:spcBef>
+                <a:spcPts val="0"/>
+              </a:spcBef>
+              <a:spcAft>
+                <a:spcPts val="0"/>
+              </a:spcAft>
+              <a:buNone/>
+            </a:pPr>
+            <a:r>
+              <a:rPr b="1" i="0" lang="en-US" sz="1200" u="none" strike="noStrike">
+                <a:solidFill>
+                  <a:srgbClr val="059669"/>
+                </a:solidFill>
+                <a:latin typeface="Arial"/>
+                <a:ea typeface="Arial"/>
+                <a:cs typeface="Arial"/>
+                <a:sym typeface="Arial"/>
+              </a:rPr>
+              <a:t>THE AUTOMATION PAYOFF</a:t>
+            </a:r>
+            <a:endParaRPr b="1" i="0" sz="1200" u="none" strike="noStrike">
+              <a:solidFill>
+                <a:srgbClr val="059669"/>
+              </a:solidFill>
+              <a:latin typeface="Arial"/>
+              <a:ea typeface="Arial"/>
+              <a:cs typeface="Arial"/>
+              <a:sym typeface="Arial"/>
+            </a:endParaRPr>
+          </a:p>
+          <a:p>
+            <a:pPr indent="0" lvl="0" marL="0" marR="0" rtl="0" algn="l">
+              <a:lnSpc>
+                <a:spcPct val="100000"/>
+              </a:lnSpc>
+              <a:spcBef>
+                <a:spcPts val="600"/>
+              </a:spcBef>
+              <a:spcAft>
+                <a:spcPts val="0"/>
+              </a:spcAft>
+              <a:buNone/>
+            </a:pPr>
+            <a:r>
+              <a:rPr b="1" i="0" lang="en-US" sz="3600" u="none" strike="noStrike">
+                <a:solidFill>
+                  <a:srgbClr val="0F172A"/>
+                </a:solidFill>
+                <a:latin typeface="Georgia"/>
+                <a:ea typeface="Georgia"/>
+                <a:cs typeface="Georgia"/>
+                <a:sym typeface="Georgia"/>
+              </a:rPr>
+              <a:t>5,000 Stems in 0.02s</a:t>
+            </a:r>
+            <a:endParaRPr b="1" i="0" sz="1200" u="none" strike="noStrike">
+              <a:solidFill>
+                <a:srgbClr val="059669"/>
+              </a:solidFill>
+              <a:latin typeface="Arial"/>
+              <a:ea typeface="Arial"/>
+              <a:cs typeface="Arial"/>
+              <a:sym typeface="Arial"/>
+            </a:endParaRPr>
+          </a:p>
+          <a:p>
+            <a:pPr indent="0" lvl="0" marL="0" marR="0" rtl="0" algn="l">
+              <a:lnSpc>
+                <a:spcPct val="100000"/>
+              </a:lnSpc>
+              <a:spcBef>
+                <a:spcPts val="600"/>
+              </a:spcBef>
+              <a:spcAft>
+                <a:spcPts val="0"/>
+              </a:spcAft>
+              <a:buNone/>
+            </a:pPr>
+            <a:r>
+              <a:rPr b="0" i="0" lang="en-US" sz="1300" u="none" strike="noStrike">
+                <a:solidFill>
+                  <a:srgbClr val="475569"/>
+                </a:solidFill>
+                <a:latin typeface="Arial"/>
+                <a:ea typeface="Arial"/>
+                <a:cs typeface="Arial"/>
+                <a:sym typeface="Arial"/>
+              </a:rPr>
+              <a:t>By vectorizing calculations:</a:t>
+            </a:r>
+            <a:br>
+              <a:rPr b="0" i="0" lang="en-US" sz="1300" u="none" strike="noStrike">
+                <a:solidFill>
+                  <a:srgbClr val="475569"/>
+                </a:solidFill>
+                <a:latin typeface="Arial"/>
+                <a:ea typeface="Arial"/>
+                <a:cs typeface="Arial"/>
+                <a:sym typeface="Arial"/>
+              </a:rPr>
+            </a:br>
+            <a:r>
+              <a:rPr b="0" i="0" lang="en-US" sz="1300" u="none" strike="noStrike">
+                <a:solidFill>
+                  <a:srgbClr val="475569"/>
+                </a:solidFill>
+                <a:latin typeface="Arial"/>
+                <a:ea typeface="Arial"/>
+                <a:cs typeface="Arial"/>
+                <a:sym typeface="Arial"/>
+              </a:rPr>
+              <a:t>• 100 forest inventory plots process in milliseconds.</a:t>
+            </a:r>
+            <a:br>
+              <a:rPr b="0" i="0" lang="en-US" sz="1300" u="none" strike="noStrike">
+                <a:solidFill>
+                  <a:srgbClr val="475569"/>
+                </a:solidFill>
+                <a:latin typeface="Arial"/>
+                <a:ea typeface="Arial"/>
+                <a:cs typeface="Arial"/>
+                <a:sym typeface="Arial"/>
+              </a:rPr>
+            </a:br>
+            <a:r>
+              <a:rPr b="0" i="0" lang="en-US" sz="1300" u="none" strike="noStrike">
+                <a:solidFill>
+                  <a:srgbClr val="475569"/>
+                </a:solidFill>
+                <a:latin typeface="Arial"/>
+                <a:ea typeface="Arial"/>
+                <a:cs typeface="Arial"/>
+                <a:sym typeface="Arial"/>
+              </a:rPr>
+              <a:t>• Human transcription errors are eliminated.</a:t>
+            </a:r>
+            <a:br>
+              <a:rPr b="0" i="0" lang="en-US" sz="1300" u="none" strike="noStrike">
+                <a:solidFill>
+                  <a:srgbClr val="475569"/>
+                </a:solidFill>
+                <a:latin typeface="Arial"/>
+                <a:ea typeface="Arial"/>
+                <a:cs typeface="Arial"/>
+                <a:sym typeface="Arial"/>
+              </a:rPr>
+            </a:br>
+            <a:r>
+              <a:rPr b="0" i="0" lang="en-US" sz="1300" u="none" strike="noStrike">
+                <a:solidFill>
+                  <a:srgbClr val="475569"/>
+                </a:solidFill>
+                <a:latin typeface="Arial"/>
+                <a:ea typeface="Arial"/>
+                <a:cs typeface="Arial"/>
+                <a:sym typeface="Arial"/>
+              </a:rPr>
+              <a:t>• The entire dataset can be audited by external reviewers instantly.</a:t>
+            </a:r>
+            <a:endParaRPr b="1" i="0" sz="1200" u="none" strike="noStrike">
+              <a:solidFill>
+                <a:srgbClr val="059669"/>
+              </a:solidFill>
+              <a:latin typeface="Arial"/>
+              <a:ea typeface="Arial"/>
+              <a:cs typeface="Arial"/>
+              <a:sym typeface="Arial"/>
+            </a:endParaRPr>
+          </a:p>
+        </p:txBody>
+      </p:sp>
+    </p:spTree>
+  </p:cSld>
+  <p:clrMapOvr>
+    <a:masterClrMapping/>
+  </p:clrMapOvr>
+</p:sld>
+</file>
+
 <file path=ppt/slides/slide2.xml><?xml version="1.0" encoding="utf-8"?>
 <p:sld xmlns:a="http://schemas.openxmlformats.org/drawingml/2006/main" xmlns:r="http://schemas.openxmlformats.org/officeDocument/2006/relationships" xmlns:mc="http://schemas.openxmlformats.org/markup-compatibility/2006" xmlns:mv="urn:schemas-microsoft-com:mac:vml" xmlns:p="http://schemas.openxmlformats.org/presentationml/2006/main" xmlns:c="http://schemas.openxmlformats.org/drawingml/2006/chart" xmlns:dgm="http://schemas.openxmlformats.org/drawingml/2006/diagram" xmlns:o="urn:schemas-microsoft-com:office:office" xmlns:v="urn:schemas-microsoft-com:vml" xmlns:pvml="urn:schemas-microsoft-com:office:powerpoint" xmlns:com="http://schemas.openxmlformats.org/drawingml/2006/compatibility" xmlns:p14="http://schemas.microsoft.com/office/powerpoint/2010/main" xmlns:p15="http://schemas.microsoft.com/office/powerpoint/2012/main" xmlns:ahyp="http://schemas.microsoft.com/office/drawing/2018/hyperlinkcolor">
   <p:cSld>
@@ -15696,8 +17185,8 @@
         </p:nvSpPr>
         <p:spPr>
           <a:xfrm>
-            <a:off x="731520" y="1645920"/>
-            <a:ext cx="2476500" cy="4572000"/>
+            <a:off x="731520" y="1790700"/>
+            <a:ext cx="2476500" cy="4267200"/>
           </a:xfrm>
           <a:prstGeom prst="roundRect">
             <a:avLst>
@@ -15725,7 +17214,7 @@
           </a:effectLst>
         </p:spPr>
         <p:txBody>
-          <a:bodyPr anchorCtr="0" anchor="ctr" bIns="182850" lIns="228600" spcFirstLastPara="1" rIns="228600" wrap="square" tIns="228600">
+          <a:bodyPr anchorCtr="0" anchor="t" bIns="266700" lIns="209550" spcFirstLastPara="1" rIns="209550" wrap="square" tIns="323850">
             <a:noAutofit/>
           </a:bodyPr>
           <a:lstStyle/>
@@ -15743,7 +17232,7 @@
               <a:buNone/>
             </a:pPr>
             <a:r>
-              <a:rPr b="1" i="0" lang="en-US" sz="1200" u="none" strike="noStrike">
+              <a:rPr b="1" i="0" lang="en-US" sz="1300" u="none">
                 <a:solidFill>
                   <a:srgbClr val="0284C7"/>
                 </a:solidFill>
@@ -15754,7 +17243,7 @@
               </a:rPr>
               <a:t>NUMERIC (DOUBLE)</a:t>
             </a:r>
-            <a:endParaRPr b="1" i="0" sz="1200" u="none" strike="noStrike">
+            <a:endParaRPr b="1" i="0" sz="1300" u="none">
               <a:solidFill>
                 <a:srgbClr val="0284C7"/>
               </a:solidFill>
@@ -15770,27 +17259,50 @@
                 <a:spcPct val="100000"/>
               </a:lnSpc>
               <a:spcBef>
-                <a:spcPts val="600"/>
-              </a:spcBef>
-              <a:spcAft>
-                <a:spcPts val="0"/>
-              </a:spcAft>
-              <a:buNone/>
-            </a:pPr>
-            <a:r>
-              <a:rPr b="0" i="0" lang="en-US" sz="1300" u="none" strike="noStrike">
-                <a:solidFill>
-                  <a:srgbClr val="475569"/>
+                <a:spcPts val="2200"/>
+              </a:spcBef>
+              <a:spcAft>
+                <a:spcPts val="0"/>
+              </a:spcAft>
+              <a:buNone/>
+            </a:pPr>
+            <a:r>
+              <a:rPr b="1" i="0" lang="en-US" sz="1200" u="none">
+                <a:solidFill>
+                  <a:srgbClr val="0F172A"/>
                 </a:solidFill>
                 <a:latin typeface="Arial"/>
                 <a:ea typeface="Arial"/>
                 <a:cs typeface="Arial"/>
                 <a:sym typeface="Arial"/>
               </a:rPr>
-              <a:t>Examples: DBH, Height, BA</a:t>
-            </a:r>
-            <a:br>
-              <a:rPr b="0" i="0" lang="en-US" sz="1300" u="none" strike="noStrike">
+              <a:t>Examples:</a:t>
+            </a:r>
+            <a:endParaRPr b="1" i="0" sz="1300" u="none">
+              <a:solidFill>
+                <a:srgbClr val="0284C7"/>
+              </a:solidFill>
+              <a:latin typeface="Arial"/>
+              <a:ea typeface="Arial"/>
+              <a:cs typeface="Arial"/>
+              <a:sym typeface="Arial"/>
+            </a:endParaRPr>
+          </a:p>
+          <a:p>
+            <a:pPr indent="0" lvl="0" marL="0" marR="0" rtl="0" algn="l">
+              <a:lnSpc>
+                <a:spcPct val="120000"/>
+              </a:lnSpc>
+              <a:spcBef>
+                <a:spcPts val="500"/>
+              </a:spcBef>
+              <a:spcAft>
+                <a:spcPts val="0"/>
+              </a:spcAft>
+              <a:buNone/>
+            </a:pPr>
+            <a:r>
+              <a:rPr b="0" i="0" lang="en-US" sz="1200" u="none">
                 <a:solidFill>
                   <a:srgbClr val="475569"/>
                 </a:solidFill>
@@ -15799,20 +17311,68 @@
                 <a:cs typeface="Arial"/>
                 <a:sym typeface="Arial"/>
               </a:rPr>
-            </a:br>
-            <a:br>
-              <a:rPr b="0" i="0" lang="en-US" sz="1300" u="none" strike="noStrike">
-                <a:solidFill>
-                  <a:srgbClr val="475569"/>
+              <a:t>DBH (cm), Total Height (m), Basal Area per Tree (m²)</a:t>
+            </a:r>
+            <a:endParaRPr b="1" i="0" sz="1300" u="none">
+              <a:solidFill>
+                <a:srgbClr val="0284C7"/>
+              </a:solidFill>
+              <a:latin typeface="Arial"/>
+              <a:ea typeface="Arial"/>
+              <a:cs typeface="Arial"/>
+              <a:sym typeface="Arial"/>
+            </a:endParaRPr>
+          </a:p>
+          <a:p>
+            <a:pPr indent="0" lvl="0" marL="0" marR="0" rtl="0" algn="l">
+              <a:lnSpc>
+                <a:spcPct val="100000"/>
+              </a:lnSpc>
+              <a:spcBef>
+                <a:spcPts val="2400"/>
+              </a:spcBef>
+              <a:spcAft>
+                <a:spcPts val="0"/>
+              </a:spcAft>
+              <a:buNone/>
+            </a:pPr>
+            <a:r>
+              <a:rPr b="1" i="0" lang="en-US" sz="1200" u="none">
+                <a:solidFill>
+                  <a:srgbClr val="0F172A"/>
                 </a:solidFill>
                 <a:latin typeface="Arial"/>
                 <a:ea typeface="Arial"/>
                 <a:cs typeface="Arial"/>
                 <a:sym typeface="Arial"/>
               </a:rPr>
-            </a:br>
-            <a:r>
-              <a:rPr b="0" i="0" lang="en-US" sz="1300" u="none" strike="noStrike">
+              <a:t>Rule:</a:t>
+            </a:r>
+            <a:endParaRPr b="1" i="0" sz="1300" u="none">
+              <a:solidFill>
+                <a:srgbClr val="0284C7"/>
+              </a:solidFill>
+              <a:latin typeface="Arial"/>
+              <a:ea typeface="Arial"/>
+              <a:cs typeface="Arial"/>
+              <a:sym typeface="Arial"/>
+            </a:endParaRPr>
+          </a:p>
+          <a:p>
+            <a:pPr indent="0" lvl="0" marL="0" marR="0" rtl="0" algn="l">
+              <a:lnSpc>
+                <a:spcPct val="120000"/>
+              </a:lnSpc>
+              <a:spcBef>
+                <a:spcPts val="500"/>
+              </a:spcBef>
+              <a:spcAft>
+                <a:spcPts val="1400"/>
+              </a:spcAft>
+              <a:buNone/>
+            </a:pPr>
+            <a:r>
+              <a:rPr b="0" i="0" lang="en-US" sz="1200" u="none">
                 <a:solidFill>
                   <a:srgbClr val="475569"/>
                 </a:solidFill>
@@ -15821,32 +17381,9 @@
                 <a:cs typeface="Arial"/>
                 <a:sym typeface="Arial"/>
               </a:rPr>
-              <a:t>Rule:</a:t>
-            </a:r>
-            <a:br>
-              <a:rPr b="0" i="0" lang="en-US" sz="1300" u="none" strike="noStrike">
-                <a:solidFill>
-                  <a:srgbClr val="475569"/>
-                </a:solidFill>
-                <a:latin typeface="Arial"/>
-                <a:ea typeface="Arial"/>
-                <a:cs typeface="Arial"/>
-                <a:sym typeface="Arial"/>
-              </a:rPr>
-            </a:br>
-            <a:r>
-              <a:rPr b="0" i="0" lang="en-US" sz="1300" u="none" strike="noStrike">
-                <a:solidFill>
-                  <a:srgbClr val="475569"/>
-                </a:solidFill>
-                <a:latin typeface="Arial"/>
-                <a:ea typeface="Arial"/>
-                <a:cs typeface="Arial"/>
-                <a:sym typeface="Arial"/>
-              </a:rPr>
-              <a:t>Stores continuous measurements. Never format with commas ('1,200') which coerces columns to text.</a:t>
-            </a:r>
-            <a:endParaRPr b="1" i="0" sz="1200" u="none" strike="noStrike">
+              <a:t>Continuous real measurements. Never enter commas ('1,200'), which silently coerces numeric columns into character strings.</a:t>
+            </a:r>
+            <a:endParaRPr b="1" i="0" sz="1300" u="none">
               <a:solidFill>
                 <a:srgbClr val="0284C7"/>
               </a:solidFill>
@@ -15866,8 +17403,8 @@
         </p:nvSpPr>
         <p:spPr>
           <a:xfrm>
-            <a:off x="3482263" y="1645920"/>
-            <a:ext cx="2476500" cy="4572000"/>
+            <a:off x="3482263" y="1790700"/>
+            <a:ext cx="2476500" cy="4267200"/>
           </a:xfrm>
           <a:prstGeom prst="roundRect">
             <a:avLst>
@@ -15895,7 +17432,7 @@
           </a:effectLst>
         </p:spPr>
         <p:txBody>
-          <a:bodyPr anchorCtr="0" anchor="ctr" bIns="182850" lIns="228600" spcFirstLastPara="1" rIns="228600" wrap="square" tIns="228600">
+          <a:bodyPr anchorCtr="0" anchor="t" bIns="266700" lIns="209550" spcFirstLastPara="1" rIns="209550" wrap="square" tIns="323850">
             <a:noAutofit/>
           </a:bodyPr>
           <a:lstStyle/>
@@ -15913,7 +17450,7 @@
               <a:buNone/>
             </a:pPr>
             <a:r>
-              <a:rPr b="1" i="0" lang="en-US" sz="1200" u="none" strike="noStrike">
+              <a:rPr b="1" i="0" lang="en-US" sz="1300" u="none">
                 <a:solidFill>
                   <a:srgbClr val="0284C7"/>
                 </a:solidFill>
@@ -15924,7 +17461,7 @@
               </a:rPr>
               <a:t>INTEGER</a:t>
             </a:r>
-            <a:endParaRPr b="1" i="0" sz="1200" u="none" strike="noStrike">
+            <a:endParaRPr b="1" i="0" sz="1300" u="none">
               <a:solidFill>
                 <a:srgbClr val="0284C7"/>
               </a:solidFill>
@@ -15940,27 +17477,50 @@
                 <a:spcPct val="100000"/>
               </a:lnSpc>
               <a:spcBef>
-                <a:spcPts val="600"/>
-              </a:spcBef>
-              <a:spcAft>
-                <a:spcPts val="0"/>
-              </a:spcAft>
-              <a:buNone/>
-            </a:pPr>
-            <a:r>
-              <a:rPr b="0" i="0" lang="en-US" sz="1300" u="none" strike="noStrike">
-                <a:solidFill>
-                  <a:srgbClr val="475569"/>
+                <a:spcPts val="2200"/>
+              </a:spcBef>
+              <a:spcAft>
+                <a:spcPts val="0"/>
+              </a:spcAft>
+              <a:buNone/>
+            </a:pPr>
+            <a:r>
+              <a:rPr b="1" i="0" lang="en-US" sz="1200" u="none">
+                <a:solidFill>
+                  <a:srgbClr val="0F172A"/>
                 </a:solidFill>
                 <a:latin typeface="Arial"/>
                 <a:ea typeface="Arial"/>
                 <a:cs typeface="Arial"/>
                 <a:sym typeface="Arial"/>
               </a:rPr>
-              <a:t>Examples: Stem Count, Plot No</a:t>
-            </a:r>
-            <a:br>
-              <a:rPr b="0" i="0" lang="en-US" sz="1300" u="none" strike="noStrike">
+              <a:t>Examples:</a:t>
+            </a:r>
+            <a:endParaRPr b="1" i="0" sz="1300" u="none">
+              <a:solidFill>
+                <a:srgbClr val="0284C7"/>
+              </a:solidFill>
+              <a:latin typeface="Arial"/>
+              <a:ea typeface="Arial"/>
+              <a:cs typeface="Arial"/>
+              <a:sym typeface="Arial"/>
+            </a:endParaRPr>
+          </a:p>
+          <a:p>
+            <a:pPr indent="0" lvl="0" marL="0" marR="0" rtl="0" algn="l">
+              <a:lnSpc>
+                <a:spcPct val="120000"/>
+              </a:lnSpc>
+              <a:spcBef>
+                <a:spcPts val="500"/>
+              </a:spcBef>
+              <a:spcAft>
+                <a:spcPts val="0"/>
+              </a:spcAft>
+              <a:buNone/>
+            </a:pPr>
+            <a:r>
+              <a:rPr b="0" i="0" lang="en-US" sz="1200" u="none">
                 <a:solidFill>
                   <a:srgbClr val="475569"/>
                 </a:solidFill>
@@ -15969,20 +17529,68 @@
                 <a:cs typeface="Arial"/>
                 <a:sym typeface="Arial"/>
               </a:rPr>
-            </a:br>
-            <a:br>
-              <a:rPr b="0" i="0" lang="en-US" sz="1300" u="none" strike="noStrike">
-                <a:solidFill>
-                  <a:srgbClr val="475569"/>
+              <a:t>Stem Count, Plot Record ID, Live Tree Tally Number</a:t>
+            </a:r>
+            <a:endParaRPr b="1" i="0" sz="1300" u="none">
+              <a:solidFill>
+                <a:srgbClr val="0284C7"/>
+              </a:solidFill>
+              <a:latin typeface="Arial"/>
+              <a:ea typeface="Arial"/>
+              <a:cs typeface="Arial"/>
+              <a:sym typeface="Arial"/>
+            </a:endParaRPr>
+          </a:p>
+          <a:p>
+            <a:pPr indent="0" lvl="0" marL="0" marR="0" rtl="0" algn="l">
+              <a:lnSpc>
+                <a:spcPct val="100000"/>
+              </a:lnSpc>
+              <a:spcBef>
+                <a:spcPts val="2400"/>
+              </a:spcBef>
+              <a:spcAft>
+                <a:spcPts val="0"/>
+              </a:spcAft>
+              <a:buNone/>
+            </a:pPr>
+            <a:r>
+              <a:rPr b="1" i="0" lang="en-US" sz="1200" u="none">
+                <a:solidFill>
+                  <a:srgbClr val="0F172A"/>
                 </a:solidFill>
                 <a:latin typeface="Arial"/>
                 <a:ea typeface="Arial"/>
                 <a:cs typeface="Arial"/>
                 <a:sym typeface="Arial"/>
               </a:rPr>
-            </a:br>
-            <a:r>
-              <a:rPr b="0" i="0" lang="en-US" sz="1300" u="none" strike="noStrike">
+              <a:t>Rule:</a:t>
+            </a:r>
+            <a:endParaRPr b="1" i="0" sz="1300" u="none">
+              <a:solidFill>
+                <a:srgbClr val="0284C7"/>
+              </a:solidFill>
+              <a:latin typeface="Arial"/>
+              <a:ea typeface="Arial"/>
+              <a:cs typeface="Arial"/>
+              <a:sym typeface="Arial"/>
+            </a:endParaRPr>
+          </a:p>
+          <a:p>
+            <a:pPr indent="0" lvl="0" marL="0" marR="0" rtl="0" algn="l">
+              <a:lnSpc>
+                <a:spcPct val="120000"/>
+              </a:lnSpc>
+              <a:spcBef>
+                <a:spcPts val="500"/>
+              </a:spcBef>
+              <a:spcAft>
+                <a:spcPts val="1400"/>
+              </a:spcAft>
+              <a:buNone/>
+            </a:pPr>
+            <a:r>
+              <a:rPr b="0" i="0" lang="en-US" sz="1200" u="none">
                 <a:solidFill>
                   <a:srgbClr val="475569"/>
                 </a:solidFill>
@@ -15991,32 +17599,9 @@
                 <a:cs typeface="Arial"/>
                 <a:sym typeface="Arial"/>
               </a:rPr>
-              <a:t>Rule:</a:t>
-            </a:r>
-            <a:br>
-              <a:rPr b="0" i="0" lang="en-US" sz="1300" u="none" strike="noStrike">
-                <a:solidFill>
-                  <a:srgbClr val="475569"/>
-                </a:solidFill>
-                <a:latin typeface="Arial"/>
-                <a:ea typeface="Arial"/>
-                <a:cs typeface="Arial"/>
-                <a:sym typeface="Arial"/>
-              </a:rPr>
-            </a:br>
-            <a:r>
-              <a:rPr b="0" i="0" lang="en-US" sz="1300" u="none" strike="noStrike">
-                <a:solidFill>
-                  <a:srgbClr val="475569"/>
-                </a:solidFill>
-                <a:latin typeface="Arial"/>
-                <a:ea typeface="Arial"/>
-                <a:cs typeface="Arial"/>
-                <a:sym typeface="Arial"/>
-              </a:rPr>
-              <a:t>Discrete counts. Preserves memory across millions of inventory stems.</a:t>
-            </a:r>
-            <a:endParaRPr b="1" i="0" sz="1200" u="none" strike="noStrike">
+              <a:t>Discrete whole counts (42L). Conserves memory across plots and prevents fractional stems in stand inventory tables.</a:t>
+            </a:r>
+            <a:endParaRPr b="1" i="0" sz="1300" u="none">
               <a:solidFill>
                 <a:srgbClr val="0284C7"/>
               </a:solidFill>
@@ -16036,8 +17621,8 @@
         </p:nvSpPr>
         <p:spPr>
           <a:xfrm>
-            <a:off x="6233007" y="1645920"/>
-            <a:ext cx="2476500" cy="4572000"/>
+            <a:off x="6233007" y="1790700"/>
+            <a:ext cx="2476500" cy="4267200"/>
           </a:xfrm>
           <a:prstGeom prst="roundRect">
             <a:avLst>
@@ -16065,7 +17650,7 @@
           </a:effectLst>
         </p:spPr>
         <p:txBody>
-          <a:bodyPr anchorCtr="0" anchor="ctr" bIns="182850" lIns="228600" spcFirstLastPara="1" rIns="228600" wrap="square" tIns="228600">
+          <a:bodyPr anchorCtr="0" anchor="t" bIns="266700" lIns="209550" spcFirstLastPara="1" rIns="209550" wrap="square" tIns="323850">
             <a:noAutofit/>
           </a:bodyPr>
           <a:lstStyle/>
@@ -16083,7 +17668,7 @@
               <a:buNone/>
             </a:pPr>
             <a:r>
-              <a:rPr b="1" i="0" lang="en-US" sz="1200" u="none" strike="noStrike">
+              <a:rPr b="1" i="0" lang="en-US" sz="1300" u="none">
                 <a:solidFill>
                   <a:srgbClr val="0284C7"/>
                 </a:solidFill>
@@ -16094,7 +17679,7 @@
               </a:rPr>
               <a:t>FACTOR</a:t>
             </a:r>
-            <a:endParaRPr b="1" i="0" sz="1200" u="none" strike="noStrike">
+            <a:endParaRPr b="1" i="0" sz="1300" u="none">
               <a:solidFill>
                 <a:srgbClr val="0284C7"/>
               </a:solidFill>
@@ -16110,27 +17695,50 @@
                 <a:spcPct val="100000"/>
               </a:lnSpc>
               <a:spcBef>
-                <a:spcPts val="600"/>
-              </a:spcBef>
-              <a:spcAft>
-                <a:spcPts val="0"/>
-              </a:spcAft>
-              <a:buNone/>
-            </a:pPr>
-            <a:r>
-              <a:rPr b="0" i="0" lang="en-US" sz="1300" u="none" strike="noStrike">
-                <a:solidFill>
-                  <a:srgbClr val="475569"/>
+                <a:spcPts val="2200"/>
+              </a:spcBef>
+              <a:spcAft>
+                <a:spcPts val="0"/>
+              </a:spcAft>
+              <a:buNone/>
+            </a:pPr>
+            <a:r>
+              <a:rPr b="1" i="0" lang="en-US" sz="1200" u="none">
+                <a:solidFill>
+                  <a:srgbClr val="0F172A"/>
                 </a:solidFill>
                 <a:latin typeface="Arial"/>
                 <a:ea typeface="Arial"/>
                 <a:cs typeface="Arial"/>
                 <a:sym typeface="Arial"/>
               </a:rPr>
-              <a:t>Examples: Species, Canopy Stratum</a:t>
-            </a:r>
-            <a:br>
-              <a:rPr b="0" i="0" lang="en-US" sz="1300" u="none" strike="noStrike">
+              <a:t>Examples:</a:t>
+            </a:r>
+            <a:endParaRPr b="1" i="0" sz="1300" u="none">
+              <a:solidFill>
+                <a:srgbClr val="0284C7"/>
+              </a:solidFill>
+              <a:latin typeface="Arial"/>
+              <a:ea typeface="Arial"/>
+              <a:cs typeface="Arial"/>
+              <a:sym typeface="Arial"/>
+            </a:endParaRPr>
+          </a:p>
+          <a:p>
+            <a:pPr indent="0" lvl="0" marL="0" marR="0" rtl="0" algn="l">
+              <a:lnSpc>
+                <a:spcPct val="120000"/>
+              </a:lnSpc>
+              <a:spcBef>
+                <a:spcPts val="500"/>
+              </a:spcBef>
+              <a:spcAft>
+                <a:spcPts val="0"/>
+              </a:spcAft>
+              <a:buNone/>
+            </a:pPr>
+            <a:r>
+              <a:rPr b="0" i="0" lang="en-US" sz="1200" u="none">
                 <a:solidFill>
                   <a:srgbClr val="475569"/>
                 </a:solidFill>
@@ -16139,20 +17747,68 @@
                 <a:cs typeface="Arial"/>
                 <a:sym typeface="Arial"/>
               </a:rPr>
-            </a:br>
-            <a:br>
-              <a:rPr b="0" i="0" lang="en-US" sz="1300" u="none" strike="noStrike">
-                <a:solidFill>
-                  <a:srgbClr val="475569"/>
+              <a:t>Species Code, Forest Type, Canopy Stratum Class</a:t>
+            </a:r>
+            <a:endParaRPr b="1" i="0" sz="1300" u="none">
+              <a:solidFill>
+                <a:srgbClr val="0284C7"/>
+              </a:solidFill>
+              <a:latin typeface="Arial"/>
+              <a:ea typeface="Arial"/>
+              <a:cs typeface="Arial"/>
+              <a:sym typeface="Arial"/>
+            </a:endParaRPr>
+          </a:p>
+          <a:p>
+            <a:pPr indent="0" lvl="0" marL="0" marR="0" rtl="0" algn="l">
+              <a:lnSpc>
+                <a:spcPct val="100000"/>
+              </a:lnSpc>
+              <a:spcBef>
+                <a:spcPts val="2400"/>
+              </a:spcBef>
+              <a:spcAft>
+                <a:spcPts val="0"/>
+              </a:spcAft>
+              <a:buNone/>
+            </a:pPr>
+            <a:r>
+              <a:rPr b="1" i="0" lang="en-US" sz="1200" u="none">
+                <a:solidFill>
+                  <a:srgbClr val="0F172A"/>
                 </a:solidFill>
                 <a:latin typeface="Arial"/>
                 <a:ea typeface="Arial"/>
                 <a:cs typeface="Arial"/>
                 <a:sym typeface="Arial"/>
               </a:rPr>
-            </a:br>
-            <a:r>
-              <a:rPr b="0" i="0" lang="en-US" sz="1300" u="none" strike="noStrike">
+              <a:t>Rule:</a:t>
+            </a:r>
+            <a:endParaRPr b="1" i="0" sz="1300" u="none">
+              <a:solidFill>
+                <a:srgbClr val="0284C7"/>
+              </a:solidFill>
+              <a:latin typeface="Arial"/>
+              <a:ea typeface="Arial"/>
+              <a:cs typeface="Arial"/>
+              <a:sym typeface="Arial"/>
+            </a:endParaRPr>
+          </a:p>
+          <a:p>
+            <a:pPr indent="0" lvl="0" marL="0" marR="0" rtl="0" algn="l">
+              <a:lnSpc>
+                <a:spcPct val="120000"/>
+              </a:lnSpc>
+              <a:spcBef>
+                <a:spcPts val="500"/>
+              </a:spcBef>
+              <a:spcAft>
+                <a:spcPts val="1400"/>
+              </a:spcAft>
+              <a:buNone/>
+            </a:pPr>
+            <a:r>
+              <a:rPr b="0" i="0" lang="en-US" sz="1200" u="none">
                 <a:solidFill>
                   <a:srgbClr val="475569"/>
                 </a:solidFill>
@@ -16161,32 +17817,9 @@
                 <a:cs typeface="Arial"/>
                 <a:sym typeface="Arial"/>
               </a:rPr>
-              <a:t>Rule:</a:t>
-            </a:r>
-            <a:br>
-              <a:rPr b="0" i="0" lang="en-US" sz="1300" u="none" strike="noStrike">
-                <a:solidFill>
-                  <a:srgbClr val="475569"/>
-                </a:solidFill>
-                <a:latin typeface="Arial"/>
-                <a:ea typeface="Arial"/>
-                <a:cs typeface="Arial"/>
-                <a:sym typeface="Arial"/>
-              </a:rPr>
-            </a:br>
-            <a:r>
-              <a:rPr b="0" i="0" lang="en-US" sz="1300" u="none" strike="noStrike">
-                <a:solidFill>
-                  <a:srgbClr val="475569"/>
-                </a:solidFill>
-                <a:latin typeface="Arial"/>
-                <a:ea typeface="Arial"/>
-                <a:cs typeface="Arial"/>
-                <a:sym typeface="Arial"/>
-              </a:rPr>
-              <a:t>Categorical variables with fixed levels. Prevents misspelled taxa (e.g. 'Shorea robusta' vs 'shorea robusta').</a:t>
-            </a:r>
-            <a:endParaRPr b="1" i="0" sz="1200" u="none" strike="noStrike">
+              <a:t>Categorical fixed levels. Enforces taxonomic naming and prevents silent typos (e.g., 'Shorea' vs 'shorea').</a:t>
+            </a:r>
+            <a:endParaRPr b="1" i="0" sz="1300" u="none">
               <a:solidFill>
                 <a:srgbClr val="0284C7"/>
               </a:solidFill>
@@ -16206,12 +17839,12 @@
         </p:nvSpPr>
         <p:spPr>
           <a:xfrm>
-            <a:off x="8983751" y="1645920"/>
-            <a:ext cx="2476500" cy="4572000"/>
+            <a:off x="8983751" y="1790700"/>
+            <a:ext cx="2476500" cy="4267200"/>
           </a:xfrm>
           <a:prstGeom prst="roundRect">
             <a:avLst>
-              <a:gd fmla="val 16667" name="adj"/>
+              <a:gd fmla="val 16666" name="adj"/>
             </a:avLst>
           </a:prstGeom>
           <a:solidFill>
@@ -16235,7 +17868,7 @@
           </a:effectLst>
         </p:spPr>
         <p:txBody>
-          <a:bodyPr anchorCtr="0" anchor="ctr" bIns="182850" lIns="228600" spcFirstLastPara="1" rIns="228600" wrap="square" tIns="228600">
+          <a:bodyPr anchorCtr="0" anchor="t" bIns="266700" lIns="209550" spcFirstLastPara="1" rIns="209550" wrap="square" tIns="323850">
             <a:noAutofit/>
           </a:bodyPr>
           <a:lstStyle/>
@@ -16253,7 +17886,7 @@
               <a:buNone/>
             </a:pPr>
             <a:r>
-              <a:rPr b="1" i="0" lang="en-US" sz="930" u="none" strike="noStrike">
+              <a:rPr b="1" i="0" lang="en-US" sz="1300" u="none">
                 <a:solidFill>
                   <a:srgbClr val="0284C7"/>
                 </a:solidFill>
@@ -16264,7 +17897,7 @@
               </a:rPr>
               <a:t>LOGICAL</a:t>
             </a:r>
-            <a:endParaRPr b="1" i="0" sz="930" u="none" strike="noStrike">
+            <a:endParaRPr b="1" i="0" sz="1300" u="none">
               <a:solidFill>
                 <a:srgbClr val="0284C7"/>
               </a:solidFill>
@@ -16280,27 +17913,50 @@
                 <a:spcPct val="100000"/>
               </a:lnSpc>
               <a:spcBef>
-                <a:spcPts val="600"/>
-              </a:spcBef>
-              <a:spcAft>
-                <a:spcPts val="0"/>
-              </a:spcAft>
-              <a:buNone/>
-            </a:pPr>
-            <a:r>
-              <a:rPr b="0" i="0" lang="en-US" sz="1008" u="none" strike="noStrike">
-                <a:solidFill>
-                  <a:srgbClr val="475569"/>
+                <a:spcPts val="2200"/>
+              </a:spcBef>
+              <a:spcAft>
+                <a:spcPts val="0"/>
+              </a:spcAft>
+              <a:buNone/>
+            </a:pPr>
+            <a:r>
+              <a:rPr b="1" i="0" lang="en-US" sz="1200" u="none">
+                <a:solidFill>
+                  <a:srgbClr val="0F172A"/>
                 </a:solidFill>
                 <a:latin typeface="Arial"/>
                 <a:ea typeface="Arial"/>
                 <a:cs typeface="Arial"/>
                 <a:sym typeface="Arial"/>
               </a:rPr>
-              <a:t>Examples: Is_Alive, Rotten_Core</a:t>
-            </a:r>
-            <a:br>
-              <a:rPr b="0" i="0" lang="en-US" sz="1008" u="none" strike="noStrike">
+              <a:t>Examples:</a:t>
+            </a:r>
+            <a:endParaRPr b="1" i="0" sz="1300" u="none">
+              <a:solidFill>
+                <a:srgbClr val="0284C7"/>
+              </a:solidFill>
+              <a:latin typeface="Arial"/>
+              <a:ea typeface="Arial"/>
+              <a:cs typeface="Arial"/>
+              <a:sym typeface="Arial"/>
+            </a:endParaRPr>
+          </a:p>
+          <a:p>
+            <a:pPr indent="0" lvl="0" marL="0" marR="0" rtl="0" algn="l">
+              <a:lnSpc>
+                <a:spcPct val="120000"/>
+              </a:lnSpc>
+              <a:spcBef>
+                <a:spcPts val="500"/>
+              </a:spcBef>
+              <a:spcAft>
+                <a:spcPts val="0"/>
+              </a:spcAft>
+              <a:buNone/>
+            </a:pPr>
+            <a:r>
+              <a:rPr b="0" i="0" lang="en-US" sz="1200" u="none">
                 <a:solidFill>
                   <a:srgbClr val="475569"/>
                 </a:solidFill>
@@ -16309,20 +17965,68 @@
                 <a:cs typeface="Arial"/>
                 <a:sym typeface="Arial"/>
               </a:rPr>
-            </a:br>
-            <a:br>
-              <a:rPr b="0" i="0" lang="en-US" sz="1008" u="none" strike="noStrike">
-                <a:solidFill>
-                  <a:srgbClr val="475569"/>
+              <a:t>Is_Alive, Has_Rotten_Core, Crown_Sampled Flag</a:t>
+            </a:r>
+            <a:endParaRPr b="1" i="0" sz="1300" u="none">
+              <a:solidFill>
+                <a:srgbClr val="0284C7"/>
+              </a:solidFill>
+              <a:latin typeface="Arial"/>
+              <a:ea typeface="Arial"/>
+              <a:cs typeface="Arial"/>
+              <a:sym typeface="Arial"/>
+            </a:endParaRPr>
+          </a:p>
+          <a:p>
+            <a:pPr indent="0" lvl="0" marL="0" marR="0" rtl="0" algn="l">
+              <a:lnSpc>
+                <a:spcPct val="100000"/>
+              </a:lnSpc>
+              <a:spcBef>
+                <a:spcPts val="2400"/>
+              </a:spcBef>
+              <a:spcAft>
+                <a:spcPts val="0"/>
+              </a:spcAft>
+              <a:buNone/>
+            </a:pPr>
+            <a:r>
+              <a:rPr b="1" i="0" lang="en-US" sz="1200" u="none">
+                <a:solidFill>
+                  <a:srgbClr val="0F172A"/>
                 </a:solidFill>
                 <a:latin typeface="Arial"/>
                 <a:ea typeface="Arial"/>
                 <a:cs typeface="Arial"/>
                 <a:sym typeface="Arial"/>
               </a:rPr>
-            </a:br>
-            <a:r>
-              <a:rPr b="0" i="0" lang="en-US" sz="1008" u="none" strike="noStrike">
+              <a:t>Rule:</a:t>
+            </a:r>
+            <a:endParaRPr b="1" i="0" sz="1300" u="none">
+              <a:solidFill>
+                <a:srgbClr val="0284C7"/>
+              </a:solidFill>
+              <a:latin typeface="Arial"/>
+              <a:ea typeface="Arial"/>
+              <a:cs typeface="Arial"/>
+              <a:sym typeface="Arial"/>
+            </a:endParaRPr>
+          </a:p>
+          <a:p>
+            <a:pPr indent="0" lvl="0" marL="0" marR="0" rtl="0" algn="l">
+              <a:lnSpc>
+                <a:spcPct val="120000"/>
+              </a:lnSpc>
+              <a:spcBef>
+                <a:spcPts val="500"/>
+              </a:spcBef>
+              <a:spcAft>
+                <a:spcPts val="1400"/>
+              </a:spcAft>
+              <a:buNone/>
+            </a:pPr>
+            <a:r>
+              <a:rPr b="0" i="0" lang="en-US" sz="1200" u="none">
                 <a:solidFill>
                   <a:srgbClr val="475569"/>
                 </a:solidFill>
@@ -16331,32 +18035,9 @@
                 <a:cs typeface="Arial"/>
                 <a:sym typeface="Arial"/>
               </a:rPr>
-              <a:t>Rule:</a:t>
-            </a:r>
-            <a:br>
-              <a:rPr b="0" i="0" lang="en-US" sz="1008" u="none" strike="noStrike">
-                <a:solidFill>
-                  <a:srgbClr val="475569"/>
-                </a:solidFill>
-                <a:latin typeface="Arial"/>
-                <a:ea typeface="Arial"/>
-                <a:cs typeface="Arial"/>
-                <a:sym typeface="Arial"/>
-              </a:rPr>
-            </a:br>
-            <a:r>
-              <a:rPr b="0" i="0" lang="en-US" sz="1008" u="none" strike="noStrike">
-                <a:solidFill>
-                  <a:srgbClr val="475569"/>
-                </a:solidFill>
-                <a:latin typeface="Arial"/>
-                <a:ea typeface="Arial"/>
-                <a:cs typeface="Arial"/>
-                <a:sym typeface="Arial"/>
-              </a:rPr>
-              <a:t>Boolean TRUE/FALSE flags. Enables instant vector filtering: inventory[inventory$Is_Alive, ].</a:t>
-            </a:r>
-            <a:endParaRPr b="1" i="0" sz="930" u="none" strike="noStrike">
+              <a:t>Boolean TRUE / FALSE flags. Enforces binary conditions; enables rapid vector filtering: inventory[Is_Alive, ].</a:t>
+            </a:r>
+            <a:endParaRPr b="1" i="0" sz="1300" u="none">
               <a:solidFill>
                 <a:srgbClr val="0284C7"/>
               </a:solidFill>
@@ -16388,7 +18069,7 @@
     </p:bg>
     <p:spTree>
       <p:nvGrpSpPr>
-        <p:cNvPr id="135" name="Shape 135"/>
+        <p:cNvPr id="134" name="Shape 134"/>
         <p:cNvGrpSpPr/>
         <p:nvPr/>
       </p:nvGrpSpPr>
@@ -16402,7 +18083,3035 @@
       </p:grpSpPr>
       <p:sp>
         <p:nvSpPr>
+          <p:cNvPr id="135" name="Google Shape;135;p19"/>
+          <p:cNvSpPr/>
+          <p:nvPr/>
+        </p:nvSpPr>
+        <p:spPr>
+          <a:xfrm>
+            <a:off x="731520" y="365760"/>
+            <a:ext cx="3238500" cy="320100"/>
+          </a:xfrm>
+          <a:prstGeom prst="roundRect">
+            <a:avLst>
+              <a:gd fmla="val 47618" name="adj"/>
+            </a:avLst>
+          </a:prstGeom>
+          <a:solidFill>
+            <a:srgbClr val="E2E8F0"/>
+          </a:solidFill>
+          <a:ln cap="flat" cmpd="sng" w="9525">
+            <a:solidFill>
+              <a:srgbClr val="CBD5E1"/>
+            </a:solidFill>
+            <a:prstDash val="solid"/>
+            <a:round/>
+            <a:headEnd len="sm" w="sm" type="none"/>
+            <a:tailEnd len="sm" w="sm" type="none"/>
+          </a:ln>
+        </p:spPr>
+        <p:txBody>
+          <a:bodyPr anchorCtr="0" anchor="ctr" bIns="38100" lIns="95250" spcFirstLastPara="1" rIns="95250" wrap="square" tIns="38100">
+            <a:noAutofit/>
+          </a:bodyPr>
+          <a:lstStyle/>
+          <a:p>
+            <a:pPr indent="0" lvl="0" marL="0" marR="0" rtl="0" algn="ctr">
+              <a:spcBef>
+                <a:spcPts val="0"/>
+              </a:spcBef>
+              <a:spcAft>
+                <a:spcPts val="0"/>
+              </a:spcAft>
+              <a:buNone/>
+            </a:pPr>
+            <a:r>
+              <a:rPr b="1" i="0" lang="en-US" sz="1000" u="none" strike="noStrike">
+                <a:solidFill>
+                  <a:srgbClr val="334155"/>
+                </a:solidFill>
+                <a:latin typeface="Arial"/>
+                <a:ea typeface="Arial"/>
+                <a:cs typeface="Arial"/>
+                <a:sym typeface="Arial"/>
+              </a:rPr>
+              <a:t>DATA VISUALIZATION IN R • PART I</a:t>
+            </a:r>
+            <a:endParaRPr b="1" i="0" sz="1000" u="none" strike="noStrike">
+              <a:solidFill>
+                <a:srgbClr val="334155"/>
+              </a:solidFill>
+              <a:latin typeface="Arial"/>
+              <a:ea typeface="Arial"/>
+              <a:cs typeface="Arial"/>
+              <a:sym typeface="Arial"/>
+            </a:endParaRPr>
+          </a:p>
+        </p:txBody>
+      </p:sp>
+      <p:sp>
+        <p:nvSpPr>
           <p:cNvPr id="136" name="Google Shape;136;p19"/>
+          <p:cNvSpPr txBox="1"/>
+          <p:nvPr/>
+        </p:nvSpPr>
+        <p:spPr>
+          <a:xfrm>
+            <a:off x="731520" y="777240"/>
+            <a:ext cx="10728900" cy="731400"/>
+          </a:xfrm>
+          <a:prstGeom prst="rect">
+            <a:avLst/>
+          </a:prstGeom>
+          <a:solidFill>
+            <a:srgbClr val="000000">
+              <a:alpha val="0"/>
+            </a:srgbClr>
+          </a:solidFill>
+          <a:ln>
+            <a:noFill/>
+          </a:ln>
+        </p:spPr>
+        <p:txBody>
+          <a:bodyPr anchorCtr="0" anchor="ctr" bIns="0" lIns="0" spcFirstLastPara="1" rIns="0" wrap="square" tIns="0">
+            <a:noAutofit/>
+          </a:bodyPr>
+          <a:lstStyle/>
+          <a:p>
+            <a:pPr indent="0" lvl="0" marL="0" marR="0" rtl="0" algn="l">
+              <a:lnSpc>
+                <a:spcPct val="100000"/>
+              </a:lnSpc>
+              <a:spcBef>
+                <a:spcPts val="0"/>
+              </a:spcBef>
+              <a:spcAft>
+                <a:spcPts val="0"/>
+              </a:spcAft>
+              <a:buNone/>
+            </a:pPr>
+            <a:r>
+              <a:rPr b="0" i="0" lang="en-US" sz="2300" u="none" strike="noStrike">
+                <a:solidFill>
+                  <a:srgbClr val="0F172A"/>
+                </a:solidFill>
+                <a:latin typeface="Georgia"/>
+                <a:ea typeface="Georgia"/>
+                <a:cs typeface="Georgia"/>
+                <a:sym typeface="Georgia"/>
+              </a:rPr>
+              <a:t>Core Distribution Plots: hist(), boxplot(), &amp; stripchart()</a:t>
+            </a:r>
+            <a:endParaRPr b="0" i="0" sz="2300" u="none" strike="noStrike">
+              <a:solidFill>
+                <a:srgbClr val="0F172A"/>
+              </a:solidFill>
+              <a:latin typeface="Georgia"/>
+              <a:ea typeface="Georgia"/>
+              <a:cs typeface="Georgia"/>
+              <a:sym typeface="Georgia"/>
+            </a:endParaRPr>
+          </a:p>
+          <a:p>
+            <a:pPr indent="0" lvl="0" marL="0" marR="0" rtl="0" algn="l">
+              <a:lnSpc>
+                <a:spcPct val="100000"/>
+              </a:lnSpc>
+              <a:spcBef>
+                <a:spcPts val="400"/>
+              </a:spcBef>
+              <a:spcAft>
+                <a:spcPts val="0"/>
+              </a:spcAft>
+              <a:buNone/>
+            </a:pPr>
+            <a:r>
+              <a:rPr b="0" i="0" lang="en-US" sz="1200" u="none" strike="noStrike">
+                <a:solidFill>
+                  <a:srgbClr val="059669"/>
+                </a:solidFill>
+                <a:latin typeface="Arial"/>
+                <a:ea typeface="Arial"/>
+                <a:cs typeface="Arial"/>
+                <a:sym typeface="Arial"/>
+              </a:rPr>
+              <a:t>Selecting the right graph, diagnosing stand structure, and tuning parameters for univariate distributions.</a:t>
+            </a:r>
+            <a:endParaRPr b="0" i="0" sz="2300" u="none" strike="noStrike">
+              <a:solidFill>
+                <a:srgbClr val="0F172A"/>
+              </a:solidFill>
+              <a:latin typeface="Georgia"/>
+              <a:ea typeface="Georgia"/>
+              <a:cs typeface="Georgia"/>
+              <a:sym typeface="Georgia"/>
+            </a:endParaRPr>
+          </a:p>
+        </p:txBody>
+      </p:sp>
+      <p:sp>
+        <p:nvSpPr>
+          <p:cNvPr id="137" name="Google Shape;137;p19"/>
+          <p:cNvSpPr/>
+          <p:nvPr/>
+        </p:nvSpPr>
+        <p:spPr>
+          <a:xfrm>
+            <a:off x="8060055" y="1638300"/>
+            <a:ext cx="3400500" cy="3219600"/>
+          </a:xfrm>
+          <a:prstGeom prst="roundRect">
+            <a:avLst>
+              <a:gd fmla="val 4142" name="adj"/>
+            </a:avLst>
+          </a:prstGeom>
+          <a:solidFill>
+            <a:srgbClr val="FFFFFF"/>
+          </a:solidFill>
+          <a:ln cap="flat" cmpd="sng" w="9525">
+            <a:solidFill>
+              <a:srgbClr val="D97706"/>
+            </a:solidFill>
+            <a:prstDash val="solid"/>
+            <a:round/>
+            <a:headEnd len="sm" w="sm" type="none"/>
+            <a:tailEnd len="sm" w="sm" type="none"/>
+          </a:ln>
+        </p:spPr>
+        <p:txBody>
+          <a:bodyPr anchorCtr="0" anchor="t" bIns="133350" lIns="152400" spcFirstLastPara="1" rIns="152400" wrap="square" tIns="133350">
+            <a:noAutofit/>
+          </a:bodyPr>
+          <a:lstStyle/>
+          <a:p>
+            <a:pPr indent="0" lvl="0" marL="0" marR="0" rtl="0" algn="l">
+              <a:lnSpc>
+                <a:spcPct val="100000"/>
+              </a:lnSpc>
+              <a:spcBef>
+                <a:spcPts val="0"/>
+              </a:spcBef>
+              <a:spcAft>
+                <a:spcPts val="0"/>
+              </a:spcAft>
+              <a:buNone/>
+            </a:pPr>
+            <a:r>
+              <a:rPr b="1" i="0" lang="en-US" sz="1600" u="none" strike="noStrike">
+                <a:solidFill>
+                  <a:srgbClr val="D97706"/>
+                </a:solidFill>
+                <a:latin typeface="Courier New"/>
+                <a:ea typeface="Courier New"/>
+                <a:cs typeface="Courier New"/>
+                <a:sym typeface="Courier New"/>
+              </a:rPr>
+              <a:t>stripchart(formula, ...)</a:t>
+            </a:r>
+            <a:endParaRPr b="1" i="0" sz="1600" u="none" strike="noStrike">
+              <a:solidFill>
+                <a:srgbClr val="D97706"/>
+              </a:solidFill>
+              <a:latin typeface="Courier New"/>
+              <a:ea typeface="Courier New"/>
+              <a:cs typeface="Courier New"/>
+              <a:sym typeface="Courier New"/>
+            </a:endParaRPr>
+          </a:p>
+          <a:p>
+            <a:pPr indent="0" lvl="0" marL="0" marR="0" rtl="0" algn="l">
+              <a:lnSpc>
+                <a:spcPct val="100000"/>
+              </a:lnSpc>
+              <a:spcBef>
+                <a:spcPts val="200"/>
+              </a:spcBef>
+              <a:spcAft>
+                <a:spcPts val="0"/>
+              </a:spcAft>
+              <a:buNone/>
+            </a:pPr>
+            <a:r>
+              <a:rPr b="1" i="0" lang="en-US" sz="800" u="none" strike="noStrike">
+                <a:solidFill>
+                  <a:srgbClr val="64748B"/>
+                </a:solidFill>
+                <a:latin typeface="Arial"/>
+                <a:ea typeface="Arial"/>
+                <a:cs typeface="Arial"/>
+                <a:sym typeface="Arial"/>
+              </a:rPr>
+              <a:t>INPUT: </a:t>
+            </a:r>
+            <a:r>
+              <a:rPr b="0" i="0" lang="en-US" sz="850" u="none" strike="noStrike">
+                <a:solidFill>
+                  <a:srgbClr val="0F172A"/>
+                </a:solidFill>
+                <a:latin typeface="Arial"/>
+                <a:ea typeface="Arial"/>
+                <a:cs typeface="Arial"/>
+                <a:sym typeface="Arial"/>
+              </a:rPr>
+              <a:t>1 Continuous ~ 1 Categorical (dbh ~ species)</a:t>
+            </a:r>
+            <a:endParaRPr b="1" i="0" sz="1600" u="none" strike="noStrike">
+              <a:solidFill>
+                <a:srgbClr val="D97706"/>
+              </a:solidFill>
+              <a:latin typeface="Courier New"/>
+              <a:ea typeface="Courier New"/>
+              <a:cs typeface="Courier New"/>
+              <a:sym typeface="Courier New"/>
+            </a:endParaRPr>
+          </a:p>
+          <a:p>
+            <a:pPr indent="0" lvl="0" marL="0" marR="0" rtl="0" algn="l">
+              <a:lnSpc>
+                <a:spcPct val="100000"/>
+              </a:lnSpc>
+              <a:spcBef>
+                <a:spcPts val="700"/>
+              </a:spcBef>
+              <a:spcAft>
+                <a:spcPts val="0"/>
+              </a:spcAft>
+              <a:buNone/>
+            </a:pPr>
+            <a:r>
+              <a:rPr b="1" i="0" lang="en-US" sz="780" u="none" strike="noStrike">
+                <a:solidFill>
+                  <a:srgbClr val="D97706"/>
+                </a:solidFill>
+                <a:latin typeface="Arial"/>
+                <a:ea typeface="Arial"/>
+                <a:cs typeface="Arial"/>
+                <a:sym typeface="Arial"/>
+              </a:rPr>
+              <a:t>FORESTRY APPLICATION (WHEN &amp; WHY)</a:t>
+            </a:r>
+            <a:endParaRPr b="1" i="0" sz="1600" u="none" strike="noStrike">
+              <a:solidFill>
+                <a:srgbClr val="D97706"/>
+              </a:solidFill>
+              <a:latin typeface="Courier New"/>
+              <a:ea typeface="Courier New"/>
+              <a:cs typeface="Courier New"/>
+              <a:sym typeface="Courier New"/>
+            </a:endParaRPr>
+          </a:p>
+          <a:p>
+            <a:pPr indent="0" lvl="0" marL="0" marR="0" rtl="0" algn="l">
+              <a:lnSpc>
+                <a:spcPct val="114000"/>
+              </a:lnSpc>
+              <a:spcBef>
+                <a:spcPts val="200"/>
+              </a:spcBef>
+              <a:spcAft>
+                <a:spcPts val="0"/>
+              </a:spcAft>
+              <a:buNone/>
+            </a:pPr>
+            <a:r>
+              <a:rPr b="0" i="0" lang="en-US" sz="880" u="none" strike="noStrike">
+                <a:solidFill>
+                  <a:srgbClr val="334155"/>
+                </a:solidFill>
+                <a:latin typeface="Arial"/>
+                <a:ea typeface="Arial"/>
+                <a:cs typeface="Arial"/>
+                <a:sym typeface="Arial"/>
+              </a:rPr>
+              <a:t>Overlay on boxplot() (add = TRUE) when sample size is small (n &lt; 50) so students see the exact trees behind the box summary.</a:t>
+            </a:r>
+            <a:endParaRPr b="1" i="0" sz="1600" u="none" strike="noStrike">
+              <a:solidFill>
+                <a:srgbClr val="D97706"/>
+              </a:solidFill>
+              <a:latin typeface="Courier New"/>
+              <a:ea typeface="Courier New"/>
+              <a:cs typeface="Courier New"/>
+              <a:sym typeface="Courier New"/>
+            </a:endParaRPr>
+          </a:p>
+          <a:p>
+            <a:pPr indent="0" lvl="0" marL="0" marR="0" rtl="0" algn="l">
+              <a:lnSpc>
+                <a:spcPct val="100000"/>
+              </a:lnSpc>
+              <a:spcBef>
+                <a:spcPts val="700"/>
+              </a:spcBef>
+              <a:spcAft>
+                <a:spcPts val="0"/>
+              </a:spcAft>
+              <a:buNone/>
+            </a:pPr>
+            <a:r>
+              <a:rPr b="1" i="0" lang="en-US" sz="780" u="none" strike="noStrike">
+                <a:solidFill>
+                  <a:srgbClr val="D97706"/>
+                </a:solidFill>
+                <a:latin typeface="Arial"/>
+                <a:ea typeface="Arial"/>
+                <a:cs typeface="Arial"/>
+                <a:sym typeface="Arial"/>
+              </a:rPr>
+              <a:t>TOP PARAMETERS TO TWEAK IN CLASS</a:t>
+            </a:r>
+            <a:endParaRPr b="1" i="0" sz="1600" u="none" strike="noStrike">
+              <a:solidFill>
+                <a:srgbClr val="D97706"/>
+              </a:solidFill>
+              <a:latin typeface="Courier New"/>
+              <a:ea typeface="Courier New"/>
+              <a:cs typeface="Courier New"/>
+              <a:sym typeface="Courier New"/>
+            </a:endParaRPr>
+          </a:p>
+          <a:p>
+            <a:pPr indent="0" lvl="0" marL="0" marR="0" rtl="0" algn="l">
+              <a:lnSpc>
+                <a:spcPct val="100000"/>
+              </a:lnSpc>
+              <a:spcBef>
+                <a:spcPts val="200"/>
+              </a:spcBef>
+              <a:spcAft>
+                <a:spcPts val="0"/>
+              </a:spcAft>
+              <a:buNone/>
+            </a:pPr>
+            <a:r>
+              <a:rPr b="1" i="0" lang="en-US" sz="830" u="none" strike="noStrike">
+                <a:solidFill>
+                  <a:srgbClr val="1E293B"/>
+                </a:solidFill>
+                <a:latin typeface="Courier New"/>
+                <a:ea typeface="Courier New"/>
+                <a:cs typeface="Courier New"/>
+                <a:sym typeface="Courier New"/>
+              </a:rPr>
+              <a:t>method = "jitter"</a:t>
+            </a:r>
+            <a:r>
+              <a:rPr b="0" i="0" lang="en-US" sz="830" u="none" strike="noStrike">
+                <a:solidFill>
+                  <a:srgbClr val="475569"/>
+                </a:solidFill>
+                <a:latin typeface="Arial"/>
+                <a:ea typeface="Arial"/>
+                <a:cs typeface="Arial"/>
+                <a:sym typeface="Arial"/>
+              </a:rPr>
+              <a:t> (prevent point overlap)</a:t>
+            </a:r>
+            <a:endParaRPr b="1" i="0" sz="1600" u="none" strike="noStrike">
+              <a:solidFill>
+                <a:srgbClr val="D97706"/>
+              </a:solidFill>
+              <a:latin typeface="Courier New"/>
+              <a:ea typeface="Courier New"/>
+              <a:cs typeface="Courier New"/>
+              <a:sym typeface="Courier New"/>
+            </a:endParaRPr>
+          </a:p>
+          <a:p>
+            <a:pPr indent="0" lvl="0" marL="0" marR="0" rtl="0" algn="l">
+              <a:lnSpc>
+                <a:spcPct val="100000"/>
+              </a:lnSpc>
+              <a:spcBef>
+                <a:spcPts val="200"/>
+              </a:spcBef>
+              <a:spcAft>
+                <a:spcPts val="0"/>
+              </a:spcAft>
+              <a:buNone/>
+            </a:pPr>
+            <a:r>
+              <a:rPr b="1" i="0" lang="en-US" sz="830" u="none" strike="noStrike">
+                <a:solidFill>
+                  <a:srgbClr val="1E293B"/>
+                </a:solidFill>
+                <a:latin typeface="Courier New"/>
+                <a:ea typeface="Courier New"/>
+                <a:cs typeface="Courier New"/>
+                <a:sym typeface="Courier New"/>
+              </a:rPr>
+              <a:t>jitter = 0.15</a:t>
+            </a:r>
+            <a:r>
+              <a:rPr b="0" i="0" lang="en-US" sz="830" u="none" strike="noStrike">
+                <a:solidFill>
+                  <a:srgbClr val="475569"/>
+                </a:solidFill>
+                <a:latin typeface="Arial"/>
+                <a:ea typeface="Arial"/>
+                <a:cs typeface="Arial"/>
+                <a:sym typeface="Arial"/>
+              </a:rPr>
+              <a:t> (horizontal spread width factor)</a:t>
+            </a:r>
+            <a:endParaRPr b="1" i="0" sz="1600" u="none" strike="noStrike">
+              <a:solidFill>
+                <a:srgbClr val="D97706"/>
+              </a:solidFill>
+              <a:latin typeface="Courier New"/>
+              <a:ea typeface="Courier New"/>
+              <a:cs typeface="Courier New"/>
+              <a:sym typeface="Courier New"/>
+            </a:endParaRPr>
+          </a:p>
+          <a:p>
+            <a:pPr indent="0" lvl="0" marL="0" marR="0" rtl="0" algn="l">
+              <a:lnSpc>
+                <a:spcPct val="100000"/>
+              </a:lnSpc>
+              <a:spcBef>
+                <a:spcPts val="200"/>
+              </a:spcBef>
+              <a:spcAft>
+                <a:spcPts val="0"/>
+              </a:spcAft>
+              <a:buNone/>
+            </a:pPr>
+            <a:r>
+              <a:rPr b="1" i="0" lang="en-US" sz="830" u="none" strike="noStrike">
+                <a:solidFill>
+                  <a:srgbClr val="1E293B"/>
+                </a:solidFill>
+                <a:latin typeface="Courier New"/>
+                <a:ea typeface="Courier New"/>
+                <a:cs typeface="Courier New"/>
+                <a:sym typeface="Courier New"/>
+              </a:rPr>
+              <a:t>pch = 19</a:t>
+            </a:r>
+            <a:r>
+              <a:rPr b="0" i="0" lang="en-US" sz="830" u="none" strike="noStrike">
+                <a:solidFill>
+                  <a:srgbClr val="475569"/>
+                </a:solidFill>
+                <a:latin typeface="Arial"/>
+                <a:ea typeface="Arial"/>
+                <a:cs typeface="Arial"/>
+                <a:sym typeface="Arial"/>
+              </a:rPr>
+              <a:t> (clean solid dot symbol)</a:t>
+            </a:r>
+            <a:endParaRPr b="1" i="0" sz="1600" u="none" strike="noStrike">
+              <a:solidFill>
+                <a:srgbClr val="D97706"/>
+              </a:solidFill>
+              <a:latin typeface="Courier New"/>
+              <a:ea typeface="Courier New"/>
+              <a:cs typeface="Courier New"/>
+              <a:sym typeface="Courier New"/>
+            </a:endParaRPr>
+          </a:p>
+          <a:p>
+            <a:pPr indent="0" lvl="0" marL="0" marR="0" rtl="0" algn="l">
+              <a:lnSpc>
+                <a:spcPct val="100000"/>
+              </a:lnSpc>
+              <a:spcBef>
+                <a:spcPts val="200"/>
+              </a:spcBef>
+              <a:spcAft>
+                <a:spcPts val="200"/>
+              </a:spcAft>
+              <a:buNone/>
+            </a:pPr>
+            <a:r>
+              <a:rPr b="1" i="0" lang="en-US" sz="830" u="none" strike="noStrike">
+                <a:solidFill>
+                  <a:srgbClr val="1E293B"/>
+                </a:solidFill>
+                <a:latin typeface="Courier New"/>
+                <a:ea typeface="Courier New"/>
+                <a:cs typeface="Courier New"/>
+                <a:sym typeface="Courier New"/>
+              </a:rPr>
+              <a:t>add = TRUE, vertical</a:t>
+            </a:r>
+            <a:r>
+              <a:rPr b="0" i="0" lang="en-US" sz="830" u="none" strike="noStrike">
+                <a:solidFill>
+                  <a:srgbClr val="475569"/>
+                </a:solidFill>
+                <a:latin typeface="Arial"/>
+                <a:ea typeface="Arial"/>
+                <a:cs typeface="Arial"/>
+                <a:sym typeface="Arial"/>
+              </a:rPr>
+              <a:t> (overlay on active boxplot)</a:t>
+            </a:r>
+            <a:endParaRPr b="1" i="0" sz="1600" u="none" strike="noStrike">
+              <a:solidFill>
+                <a:srgbClr val="D97706"/>
+              </a:solidFill>
+              <a:latin typeface="Courier New"/>
+              <a:ea typeface="Courier New"/>
+              <a:cs typeface="Courier New"/>
+              <a:sym typeface="Courier New"/>
+            </a:endParaRPr>
+          </a:p>
+        </p:txBody>
+      </p:sp>
+      <p:sp>
+        <p:nvSpPr>
+          <p:cNvPr id="138" name="Google Shape;138;p19"/>
+          <p:cNvSpPr/>
+          <p:nvPr/>
+        </p:nvSpPr>
+        <p:spPr>
+          <a:xfrm>
+            <a:off x="4395788" y="1638300"/>
+            <a:ext cx="3400500" cy="3219600"/>
+          </a:xfrm>
+          <a:prstGeom prst="roundRect">
+            <a:avLst>
+              <a:gd fmla="val 4142" name="adj"/>
+            </a:avLst>
+          </a:prstGeom>
+          <a:solidFill>
+            <a:srgbClr val="FFFFFF"/>
+          </a:solidFill>
+          <a:ln cap="flat" cmpd="sng" w="9525">
+            <a:solidFill>
+              <a:srgbClr val="059669"/>
+            </a:solidFill>
+            <a:prstDash val="solid"/>
+            <a:round/>
+            <a:headEnd len="sm" w="sm" type="none"/>
+            <a:tailEnd len="sm" w="sm" type="none"/>
+          </a:ln>
+        </p:spPr>
+        <p:txBody>
+          <a:bodyPr anchorCtr="0" anchor="t" bIns="133350" lIns="152400" spcFirstLastPara="1" rIns="152400" wrap="square" tIns="133350">
+            <a:noAutofit/>
+          </a:bodyPr>
+          <a:lstStyle/>
+          <a:p>
+            <a:pPr indent="0" lvl="0" marL="0" marR="0" rtl="0" algn="l">
+              <a:lnSpc>
+                <a:spcPct val="100000"/>
+              </a:lnSpc>
+              <a:spcBef>
+                <a:spcPts val="0"/>
+              </a:spcBef>
+              <a:spcAft>
+                <a:spcPts val="0"/>
+              </a:spcAft>
+              <a:buNone/>
+            </a:pPr>
+            <a:r>
+              <a:rPr b="1" i="0" lang="en-US" sz="1600" u="none" strike="noStrike">
+                <a:solidFill>
+                  <a:srgbClr val="059669"/>
+                </a:solidFill>
+                <a:latin typeface="Courier New"/>
+                <a:ea typeface="Courier New"/>
+                <a:cs typeface="Courier New"/>
+                <a:sym typeface="Courier New"/>
+              </a:rPr>
+              <a:t>boxplot(formula, ...)</a:t>
+            </a:r>
+            <a:endParaRPr b="1" i="0" sz="1600" u="none" strike="noStrike">
+              <a:solidFill>
+                <a:srgbClr val="059669"/>
+              </a:solidFill>
+              <a:latin typeface="Courier New"/>
+              <a:ea typeface="Courier New"/>
+              <a:cs typeface="Courier New"/>
+              <a:sym typeface="Courier New"/>
+            </a:endParaRPr>
+          </a:p>
+          <a:p>
+            <a:pPr indent="0" lvl="0" marL="0" marR="0" rtl="0" algn="l">
+              <a:lnSpc>
+                <a:spcPct val="100000"/>
+              </a:lnSpc>
+              <a:spcBef>
+                <a:spcPts val="200"/>
+              </a:spcBef>
+              <a:spcAft>
+                <a:spcPts val="0"/>
+              </a:spcAft>
+              <a:buNone/>
+            </a:pPr>
+            <a:r>
+              <a:rPr b="1" i="0" lang="en-US" sz="800" u="none" strike="noStrike">
+                <a:solidFill>
+                  <a:srgbClr val="64748B"/>
+                </a:solidFill>
+                <a:latin typeface="Arial"/>
+                <a:ea typeface="Arial"/>
+                <a:cs typeface="Arial"/>
+                <a:sym typeface="Arial"/>
+              </a:rPr>
+              <a:t>INPUT: </a:t>
+            </a:r>
+            <a:r>
+              <a:rPr b="0" i="0" lang="en-US" sz="850" u="none" strike="noStrike">
+                <a:solidFill>
+                  <a:srgbClr val="0F172A"/>
+                </a:solidFill>
+                <a:latin typeface="Arial"/>
+                <a:ea typeface="Arial"/>
+                <a:cs typeface="Arial"/>
+                <a:sym typeface="Arial"/>
+              </a:rPr>
+              <a:t>1 Continuous ~ 1 Categorical (dbh ~ species)</a:t>
+            </a:r>
+            <a:endParaRPr b="1" i="0" sz="1600" u="none" strike="noStrike">
+              <a:solidFill>
+                <a:srgbClr val="059669"/>
+              </a:solidFill>
+              <a:latin typeface="Courier New"/>
+              <a:ea typeface="Courier New"/>
+              <a:cs typeface="Courier New"/>
+              <a:sym typeface="Courier New"/>
+            </a:endParaRPr>
+          </a:p>
+          <a:p>
+            <a:pPr indent="0" lvl="0" marL="0" marR="0" rtl="0" algn="l">
+              <a:lnSpc>
+                <a:spcPct val="100000"/>
+              </a:lnSpc>
+              <a:spcBef>
+                <a:spcPts val="700"/>
+              </a:spcBef>
+              <a:spcAft>
+                <a:spcPts val="0"/>
+              </a:spcAft>
+              <a:buNone/>
+            </a:pPr>
+            <a:r>
+              <a:rPr b="1" i="0" lang="en-US" sz="780" u="none" strike="noStrike">
+                <a:solidFill>
+                  <a:srgbClr val="059669"/>
+                </a:solidFill>
+                <a:latin typeface="Arial"/>
+                <a:ea typeface="Arial"/>
+                <a:cs typeface="Arial"/>
+                <a:sym typeface="Arial"/>
+              </a:rPr>
+              <a:t>FORESTRY APPLICATION (WHEN &amp; WHY)</a:t>
+            </a:r>
+            <a:endParaRPr b="1" i="0" sz="1600" u="none" strike="noStrike">
+              <a:solidFill>
+                <a:srgbClr val="059669"/>
+              </a:solidFill>
+              <a:latin typeface="Courier New"/>
+              <a:ea typeface="Courier New"/>
+              <a:cs typeface="Courier New"/>
+              <a:sym typeface="Courier New"/>
+            </a:endParaRPr>
+          </a:p>
+          <a:p>
+            <a:pPr indent="0" lvl="0" marL="0" marR="0" rtl="0" algn="l">
+              <a:lnSpc>
+                <a:spcPct val="114000"/>
+              </a:lnSpc>
+              <a:spcBef>
+                <a:spcPts val="200"/>
+              </a:spcBef>
+              <a:spcAft>
+                <a:spcPts val="0"/>
+              </a:spcAft>
+              <a:buNone/>
+            </a:pPr>
+            <a:r>
+              <a:rPr b="0" i="0" lang="en-US" sz="880" u="none" strike="noStrike">
+                <a:solidFill>
+                  <a:srgbClr val="334155"/>
+                </a:solidFill>
+                <a:latin typeface="Arial"/>
+                <a:ea typeface="Arial"/>
+                <a:cs typeface="Arial"/>
+                <a:sym typeface="Arial"/>
+              </a:rPr>
+              <a:t>Compare medians, 25th–75th percentile spread (IQR), symmetry, and outliers across species, plots, or forest stands.</a:t>
+            </a:r>
+            <a:endParaRPr b="1" i="0" sz="1600" u="none" strike="noStrike">
+              <a:solidFill>
+                <a:srgbClr val="059669"/>
+              </a:solidFill>
+              <a:latin typeface="Courier New"/>
+              <a:ea typeface="Courier New"/>
+              <a:cs typeface="Courier New"/>
+              <a:sym typeface="Courier New"/>
+            </a:endParaRPr>
+          </a:p>
+          <a:p>
+            <a:pPr indent="0" lvl="0" marL="0" marR="0" rtl="0" algn="l">
+              <a:lnSpc>
+                <a:spcPct val="100000"/>
+              </a:lnSpc>
+              <a:spcBef>
+                <a:spcPts val="700"/>
+              </a:spcBef>
+              <a:spcAft>
+                <a:spcPts val="0"/>
+              </a:spcAft>
+              <a:buNone/>
+            </a:pPr>
+            <a:r>
+              <a:rPr b="1" i="0" lang="en-US" sz="780" u="none" strike="noStrike">
+                <a:solidFill>
+                  <a:srgbClr val="059669"/>
+                </a:solidFill>
+                <a:latin typeface="Arial"/>
+                <a:ea typeface="Arial"/>
+                <a:cs typeface="Arial"/>
+                <a:sym typeface="Arial"/>
+              </a:rPr>
+              <a:t>TOP PARAMETERS TO TWEAK IN CLASS</a:t>
+            </a:r>
+            <a:endParaRPr b="1" i="0" sz="1600" u="none" strike="noStrike">
+              <a:solidFill>
+                <a:srgbClr val="059669"/>
+              </a:solidFill>
+              <a:latin typeface="Courier New"/>
+              <a:ea typeface="Courier New"/>
+              <a:cs typeface="Courier New"/>
+              <a:sym typeface="Courier New"/>
+            </a:endParaRPr>
+          </a:p>
+          <a:p>
+            <a:pPr indent="0" lvl="0" marL="0" marR="0" rtl="0" algn="l">
+              <a:lnSpc>
+                <a:spcPct val="100000"/>
+              </a:lnSpc>
+              <a:spcBef>
+                <a:spcPts val="200"/>
+              </a:spcBef>
+              <a:spcAft>
+                <a:spcPts val="0"/>
+              </a:spcAft>
+              <a:buNone/>
+            </a:pPr>
+            <a:r>
+              <a:rPr b="1" i="0" lang="en-US" sz="830" u="none" strike="noStrike">
+                <a:solidFill>
+                  <a:srgbClr val="1E293B"/>
+                </a:solidFill>
+                <a:latin typeface="Courier New"/>
+                <a:ea typeface="Courier New"/>
+                <a:cs typeface="Courier New"/>
+                <a:sym typeface="Courier New"/>
+              </a:rPr>
+              <a:t>horizontal = TRUE</a:t>
+            </a:r>
+            <a:r>
+              <a:rPr b="0" i="0" lang="en-US" sz="830" u="none" strike="noStrike">
+                <a:solidFill>
+                  <a:srgbClr val="475569"/>
+                </a:solidFill>
+                <a:latin typeface="Arial"/>
+                <a:ea typeface="Arial"/>
+                <a:cs typeface="Arial"/>
+                <a:sym typeface="Arial"/>
+              </a:rPr>
+              <a:t> (readable species labels)</a:t>
+            </a:r>
+            <a:endParaRPr b="1" i="0" sz="1600" u="none" strike="noStrike">
+              <a:solidFill>
+                <a:srgbClr val="059669"/>
+              </a:solidFill>
+              <a:latin typeface="Courier New"/>
+              <a:ea typeface="Courier New"/>
+              <a:cs typeface="Courier New"/>
+              <a:sym typeface="Courier New"/>
+            </a:endParaRPr>
+          </a:p>
+          <a:p>
+            <a:pPr indent="0" lvl="0" marL="0" marR="0" rtl="0" algn="l">
+              <a:lnSpc>
+                <a:spcPct val="100000"/>
+              </a:lnSpc>
+              <a:spcBef>
+                <a:spcPts val="200"/>
+              </a:spcBef>
+              <a:spcAft>
+                <a:spcPts val="0"/>
+              </a:spcAft>
+              <a:buNone/>
+            </a:pPr>
+            <a:r>
+              <a:rPr b="1" i="0" lang="en-US" sz="830" u="none" strike="noStrike">
+                <a:solidFill>
+                  <a:srgbClr val="1E293B"/>
+                </a:solidFill>
+                <a:latin typeface="Courier New"/>
+                <a:ea typeface="Courier New"/>
+                <a:cs typeface="Courier New"/>
+                <a:sym typeface="Courier New"/>
+              </a:rPr>
+              <a:t>varwidth = TRUE</a:t>
+            </a:r>
+            <a:r>
+              <a:rPr b="0" i="0" lang="en-US" sz="830" u="none" strike="noStrike">
+                <a:solidFill>
+                  <a:srgbClr val="475569"/>
+                </a:solidFill>
+                <a:latin typeface="Arial"/>
+                <a:ea typeface="Arial"/>
+                <a:cs typeface="Arial"/>
+                <a:sym typeface="Arial"/>
+              </a:rPr>
+              <a:t> (box width ∝ √n sample size)</a:t>
+            </a:r>
+            <a:endParaRPr b="1" i="0" sz="1600" u="none" strike="noStrike">
+              <a:solidFill>
+                <a:srgbClr val="059669"/>
+              </a:solidFill>
+              <a:latin typeface="Courier New"/>
+              <a:ea typeface="Courier New"/>
+              <a:cs typeface="Courier New"/>
+              <a:sym typeface="Courier New"/>
+            </a:endParaRPr>
+          </a:p>
+          <a:p>
+            <a:pPr indent="0" lvl="0" marL="0" marR="0" rtl="0" algn="l">
+              <a:lnSpc>
+                <a:spcPct val="100000"/>
+              </a:lnSpc>
+              <a:spcBef>
+                <a:spcPts val="200"/>
+              </a:spcBef>
+              <a:spcAft>
+                <a:spcPts val="0"/>
+              </a:spcAft>
+              <a:buNone/>
+            </a:pPr>
+            <a:r>
+              <a:rPr b="1" i="0" lang="en-US" sz="830" u="none" strike="noStrike">
+                <a:solidFill>
+                  <a:srgbClr val="1E293B"/>
+                </a:solidFill>
+                <a:latin typeface="Courier New"/>
+                <a:ea typeface="Courier New"/>
+                <a:cs typeface="Courier New"/>
+                <a:sym typeface="Courier New"/>
+              </a:rPr>
+              <a:t>notch = TRUE</a:t>
+            </a:r>
+            <a:r>
+              <a:rPr b="0" i="0" lang="en-US" sz="830" u="none" strike="noStrike">
+                <a:solidFill>
+                  <a:srgbClr val="475569"/>
+                </a:solidFill>
+                <a:latin typeface="Arial"/>
+                <a:ea typeface="Arial"/>
+                <a:cs typeface="Arial"/>
+                <a:sym typeface="Arial"/>
+              </a:rPr>
+              <a:t> (median 95% CI comparison)</a:t>
+            </a:r>
+            <a:endParaRPr b="1" i="0" sz="1600" u="none" strike="noStrike">
+              <a:solidFill>
+                <a:srgbClr val="059669"/>
+              </a:solidFill>
+              <a:latin typeface="Courier New"/>
+              <a:ea typeface="Courier New"/>
+              <a:cs typeface="Courier New"/>
+              <a:sym typeface="Courier New"/>
+            </a:endParaRPr>
+          </a:p>
+          <a:p>
+            <a:pPr indent="0" lvl="0" marL="0" marR="0" rtl="0" algn="l">
+              <a:lnSpc>
+                <a:spcPct val="100000"/>
+              </a:lnSpc>
+              <a:spcBef>
+                <a:spcPts val="200"/>
+              </a:spcBef>
+              <a:spcAft>
+                <a:spcPts val="200"/>
+              </a:spcAft>
+              <a:buNone/>
+            </a:pPr>
+            <a:r>
+              <a:rPr b="1" i="0" lang="en-US" sz="830" u="none" strike="noStrike">
+                <a:solidFill>
+                  <a:srgbClr val="1E293B"/>
+                </a:solidFill>
+                <a:latin typeface="Courier New"/>
+                <a:ea typeface="Courier New"/>
+                <a:cs typeface="Courier New"/>
+                <a:sym typeface="Courier New"/>
+              </a:rPr>
+              <a:t>las = 2, boxwex</a:t>
+            </a:r>
+            <a:r>
+              <a:rPr b="0" i="0" lang="en-US" sz="830" u="none" strike="noStrike">
+                <a:solidFill>
+                  <a:srgbClr val="475569"/>
+                </a:solidFill>
+                <a:latin typeface="Arial"/>
+                <a:ea typeface="Arial"/>
+                <a:cs typeface="Arial"/>
+                <a:sym typeface="Arial"/>
+              </a:rPr>
+              <a:t> (vertical labels &amp; width scale)</a:t>
+            </a:r>
+            <a:endParaRPr b="1" i="0" sz="1600" u="none" strike="noStrike">
+              <a:solidFill>
+                <a:srgbClr val="059669"/>
+              </a:solidFill>
+              <a:latin typeface="Courier New"/>
+              <a:ea typeface="Courier New"/>
+              <a:cs typeface="Courier New"/>
+              <a:sym typeface="Courier New"/>
+            </a:endParaRPr>
+          </a:p>
+        </p:txBody>
+      </p:sp>
+      <p:sp>
+        <p:nvSpPr>
+          <p:cNvPr id="139" name="Google Shape;139;p19"/>
+          <p:cNvSpPr/>
+          <p:nvPr/>
+        </p:nvSpPr>
+        <p:spPr>
+          <a:xfrm>
+            <a:off x="731520" y="1638300"/>
+            <a:ext cx="3400500" cy="3219600"/>
+          </a:xfrm>
+          <a:prstGeom prst="roundRect">
+            <a:avLst>
+              <a:gd fmla="val 4142" name="adj"/>
+            </a:avLst>
+          </a:prstGeom>
+          <a:solidFill>
+            <a:srgbClr val="FFFFFF"/>
+          </a:solidFill>
+          <a:ln cap="flat" cmpd="sng" w="9525">
+            <a:solidFill>
+              <a:srgbClr val="0284C7"/>
+            </a:solidFill>
+            <a:prstDash val="solid"/>
+            <a:round/>
+            <a:headEnd len="sm" w="sm" type="none"/>
+            <a:tailEnd len="sm" w="sm" type="none"/>
+          </a:ln>
+        </p:spPr>
+        <p:txBody>
+          <a:bodyPr anchorCtr="0" anchor="t" bIns="133350" lIns="152400" spcFirstLastPara="1" rIns="152400" wrap="square" tIns="133350">
+            <a:noAutofit/>
+          </a:bodyPr>
+          <a:lstStyle/>
+          <a:p>
+            <a:pPr indent="0" lvl="0" marL="0" marR="0" rtl="0" algn="l">
+              <a:lnSpc>
+                <a:spcPct val="100000"/>
+              </a:lnSpc>
+              <a:spcBef>
+                <a:spcPts val="0"/>
+              </a:spcBef>
+              <a:spcAft>
+                <a:spcPts val="0"/>
+              </a:spcAft>
+              <a:buNone/>
+            </a:pPr>
+            <a:r>
+              <a:rPr b="1" i="0" lang="en-US" sz="1600" u="none" strike="noStrike">
+                <a:solidFill>
+                  <a:srgbClr val="0284C7"/>
+                </a:solidFill>
+                <a:latin typeface="Courier New"/>
+                <a:ea typeface="Courier New"/>
+                <a:cs typeface="Courier New"/>
+                <a:sym typeface="Courier New"/>
+              </a:rPr>
+              <a:t>hist(x, ...)</a:t>
+            </a:r>
+            <a:endParaRPr b="1" i="0" sz="1600" u="none" strike="noStrike">
+              <a:solidFill>
+                <a:srgbClr val="0284C7"/>
+              </a:solidFill>
+              <a:latin typeface="Courier New"/>
+              <a:ea typeface="Courier New"/>
+              <a:cs typeface="Courier New"/>
+              <a:sym typeface="Courier New"/>
+            </a:endParaRPr>
+          </a:p>
+          <a:p>
+            <a:pPr indent="0" lvl="0" marL="0" marR="0" rtl="0" algn="l">
+              <a:lnSpc>
+                <a:spcPct val="100000"/>
+              </a:lnSpc>
+              <a:spcBef>
+                <a:spcPts val="200"/>
+              </a:spcBef>
+              <a:spcAft>
+                <a:spcPts val="0"/>
+              </a:spcAft>
+              <a:buNone/>
+            </a:pPr>
+            <a:r>
+              <a:rPr b="1" i="0" lang="en-US" sz="800" u="none" strike="noStrike">
+                <a:solidFill>
+                  <a:srgbClr val="64748B"/>
+                </a:solidFill>
+                <a:latin typeface="Arial"/>
+                <a:ea typeface="Arial"/>
+                <a:cs typeface="Arial"/>
+                <a:sym typeface="Arial"/>
+              </a:rPr>
+              <a:t>INPUT: </a:t>
+            </a:r>
+            <a:r>
+              <a:rPr b="0" i="0" lang="en-US" sz="850" u="none" strike="noStrike">
+                <a:solidFill>
+                  <a:srgbClr val="0F172A"/>
+                </a:solidFill>
+                <a:latin typeface="Arial"/>
+                <a:ea typeface="Arial"/>
+                <a:cs typeface="Arial"/>
+                <a:sym typeface="Arial"/>
+              </a:rPr>
+              <a:t>1 Continuous (dbh_cm, height_m)</a:t>
+            </a:r>
+            <a:endParaRPr b="1" i="0" sz="1600" u="none" strike="noStrike">
+              <a:solidFill>
+                <a:srgbClr val="0284C7"/>
+              </a:solidFill>
+              <a:latin typeface="Courier New"/>
+              <a:ea typeface="Courier New"/>
+              <a:cs typeface="Courier New"/>
+              <a:sym typeface="Courier New"/>
+            </a:endParaRPr>
+          </a:p>
+          <a:p>
+            <a:pPr indent="0" lvl="0" marL="0" marR="0" rtl="0" algn="l">
+              <a:lnSpc>
+                <a:spcPct val="100000"/>
+              </a:lnSpc>
+              <a:spcBef>
+                <a:spcPts val="700"/>
+              </a:spcBef>
+              <a:spcAft>
+                <a:spcPts val="0"/>
+              </a:spcAft>
+              <a:buNone/>
+            </a:pPr>
+            <a:r>
+              <a:rPr b="1" i="0" lang="en-US" sz="780" u="none" strike="noStrike">
+                <a:solidFill>
+                  <a:srgbClr val="0284C7"/>
+                </a:solidFill>
+                <a:latin typeface="Arial"/>
+                <a:ea typeface="Arial"/>
+                <a:cs typeface="Arial"/>
+                <a:sym typeface="Arial"/>
+              </a:rPr>
+              <a:t>FORESTRY APPLICATION (WHEN &amp; WHY)</a:t>
+            </a:r>
+            <a:endParaRPr b="1" i="0" sz="1600" u="none" strike="noStrike">
+              <a:solidFill>
+                <a:srgbClr val="0284C7"/>
+              </a:solidFill>
+              <a:latin typeface="Courier New"/>
+              <a:ea typeface="Courier New"/>
+              <a:cs typeface="Courier New"/>
+              <a:sym typeface="Courier New"/>
+            </a:endParaRPr>
+          </a:p>
+          <a:p>
+            <a:pPr indent="0" lvl="0" marL="0" marR="0" rtl="0" algn="l">
+              <a:lnSpc>
+                <a:spcPct val="114000"/>
+              </a:lnSpc>
+              <a:spcBef>
+                <a:spcPts val="200"/>
+              </a:spcBef>
+              <a:spcAft>
+                <a:spcPts val="0"/>
+              </a:spcAft>
+              <a:buNone/>
+            </a:pPr>
+            <a:r>
+              <a:rPr b="0" i="0" lang="en-US" sz="880" u="none" strike="noStrike">
+                <a:solidFill>
+                  <a:srgbClr val="334155"/>
+                </a:solidFill>
+                <a:latin typeface="Arial"/>
+                <a:ea typeface="Arial"/>
+                <a:cs typeface="Arial"/>
+                <a:sym typeface="Arial"/>
+              </a:rPr>
+              <a:t>Check stand structure (inverse-J regeneration vs. even-aged bell curve), skewness, and unit anomalies or outliers.</a:t>
+            </a:r>
+            <a:endParaRPr b="1" i="0" sz="1600" u="none" strike="noStrike">
+              <a:solidFill>
+                <a:srgbClr val="0284C7"/>
+              </a:solidFill>
+              <a:latin typeface="Courier New"/>
+              <a:ea typeface="Courier New"/>
+              <a:cs typeface="Courier New"/>
+              <a:sym typeface="Courier New"/>
+            </a:endParaRPr>
+          </a:p>
+          <a:p>
+            <a:pPr indent="0" lvl="0" marL="0" marR="0" rtl="0" algn="l">
+              <a:lnSpc>
+                <a:spcPct val="100000"/>
+              </a:lnSpc>
+              <a:spcBef>
+                <a:spcPts val="700"/>
+              </a:spcBef>
+              <a:spcAft>
+                <a:spcPts val="0"/>
+              </a:spcAft>
+              <a:buNone/>
+            </a:pPr>
+            <a:r>
+              <a:rPr b="1" i="0" lang="en-US" sz="780" u="none" strike="noStrike">
+                <a:solidFill>
+                  <a:srgbClr val="0284C7"/>
+                </a:solidFill>
+                <a:latin typeface="Arial"/>
+                <a:ea typeface="Arial"/>
+                <a:cs typeface="Arial"/>
+                <a:sym typeface="Arial"/>
+              </a:rPr>
+              <a:t>TOP PARAMETERS TO TWEAK IN CLASS</a:t>
+            </a:r>
+            <a:endParaRPr b="1" i="0" sz="1600" u="none" strike="noStrike">
+              <a:solidFill>
+                <a:srgbClr val="0284C7"/>
+              </a:solidFill>
+              <a:latin typeface="Courier New"/>
+              <a:ea typeface="Courier New"/>
+              <a:cs typeface="Courier New"/>
+              <a:sym typeface="Courier New"/>
+            </a:endParaRPr>
+          </a:p>
+          <a:p>
+            <a:pPr indent="0" lvl="0" marL="0" marR="0" rtl="0" algn="l">
+              <a:lnSpc>
+                <a:spcPct val="100000"/>
+              </a:lnSpc>
+              <a:spcBef>
+                <a:spcPts val="200"/>
+              </a:spcBef>
+              <a:spcAft>
+                <a:spcPts val="0"/>
+              </a:spcAft>
+              <a:buNone/>
+            </a:pPr>
+            <a:r>
+              <a:rPr b="1" i="0" lang="en-US" sz="830" u="none" strike="noStrike">
+                <a:solidFill>
+                  <a:srgbClr val="1E293B"/>
+                </a:solidFill>
+                <a:latin typeface="Courier New"/>
+                <a:ea typeface="Courier New"/>
+                <a:cs typeface="Courier New"/>
+                <a:sym typeface="Courier New"/>
+              </a:rPr>
+              <a:t>breaks</a:t>
+            </a:r>
+            <a:r>
+              <a:rPr b="0" i="0" lang="en-US" sz="830" u="none" strike="noStrike">
+                <a:solidFill>
+                  <a:srgbClr val="475569"/>
+                </a:solidFill>
+                <a:latin typeface="Arial"/>
+                <a:ea typeface="Arial"/>
+                <a:cs typeface="Arial"/>
+                <a:sym typeface="Arial"/>
+              </a:rPr>
+              <a:t> (bin count or break vector)</a:t>
+            </a:r>
+            <a:endParaRPr b="1" i="0" sz="1600" u="none" strike="noStrike">
+              <a:solidFill>
+                <a:srgbClr val="0284C7"/>
+              </a:solidFill>
+              <a:latin typeface="Courier New"/>
+              <a:ea typeface="Courier New"/>
+              <a:cs typeface="Courier New"/>
+              <a:sym typeface="Courier New"/>
+            </a:endParaRPr>
+          </a:p>
+          <a:p>
+            <a:pPr indent="0" lvl="0" marL="0" marR="0" rtl="0" algn="l">
+              <a:lnSpc>
+                <a:spcPct val="100000"/>
+              </a:lnSpc>
+              <a:spcBef>
+                <a:spcPts val="200"/>
+              </a:spcBef>
+              <a:spcAft>
+                <a:spcPts val="0"/>
+              </a:spcAft>
+              <a:buNone/>
+            </a:pPr>
+            <a:r>
+              <a:rPr b="1" i="0" lang="en-US" sz="830" u="none" strike="noStrike">
+                <a:solidFill>
+                  <a:srgbClr val="1E293B"/>
+                </a:solidFill>
+                <a:latin typeface="Courier New"/>
+                <a:ea typeface="Courier New"/>
+                <a:cs typeface="Courier New"/>
+                <a:sym typeface="Courier New"/>
+              </a:rPr>
+              <a:t>freq = FALSE</a:t>
+            </a:r>
+            <a:r>
+              <a:rPr b="0" i="0" lang="en-US" sz="830" u="none" strike="noStrike">
+                <a:solidFill>
+                  <a:srgbClr val="475569"/>
+                </a:solidFill>
+                <a:latin typeface="Arial"/>
+                <a:ea typeface="Arial"/>
+                <a:cs typeface="Arial"/>
+                <a:sym typeface="Arial"/>
+              </a:rPr>
+              <a:t> (density scale for overlays)</a:t>
+            </a:r>
+            <a:endParaRPr b="1" i="0" sz="1600" u="none" strike="noStrike">
+              <a:solidFill>
+                <a:srgbClr val="0284C7"/>
+              </a:solidFill>
+              <a:latin typeface="Courier New"/>
+              <a:ea typeface="Courier New"/>
+              <a:cs typeface="Courier New"/>
+              <a:sym typeface="Courier New"/>
+            </a:endParaRPr>
+          </a:p>
+          <a:p>
+            <a:pPr indent="0" lvl="0" marL="0" marR="0" rtl="0" algn="l">
+              <a:lnSpc>
+                <a:spcPct val="100000"/>
+              </a:lnSpc>
+              <a:spcBef>
+                <a:spcPts val="200"/>
+              </a:spcBef>
+              <a:spcAft>
+                <a:spcPts val="0"/>
+              </a:spcAft>
+              <a:buNone/>
+            </a:pPr>
+            <a:r>
+              <a:rPr b="1" i="0" lang="en-US" sz="830" u="none" strike="noStrike">
+                <a:solidFill>
+                  <a:srgbClr val="1E293B"/>
+                </a:solidFill>
+                <a:latin typeface="Courier New"/>
+                <a:ea typeface="Courier New"/>
+                <a:cs typeface="Courier New"/>
+                <a:sym typeface="Courier New"/>
+              </a:rPr>
+              <a:t>labels = TRUE</a:t>
+            </a:r>
+            <a:r>
+              <a:rPr b="0" i="0" lang="en-US" sz="830" u="none" strike="noStrike">
+                <a:solidFill>
+                  <a:srgbClr val="475569"/>
+                </a:solidFill>
+                <a:latin typeface="Arial"/>
+                <a:ea typeface="Arial"/>
+                <a:cs typeface="Arial"/>
+                <a:sym typeface="Arial"/>
+              </a:rPr>
+              <a:t> (print tree counts on bars)</a:t>
+            </a:r>
+            <a:endParaRPr b="1" i="0" sz="1600" u="none" strike="noStrike">
+              <a:solidFill>
+                <a:srgbClr val="0284C7"/>
+              </a:solidFill>
+              <a:latin typeface="Courier New"/>
+              <a:ea typeface="Courier New"/>
+              <a:cs typeface="Courier New"/>
+              <a:sym typeface="Courier New"/>
+            </a:endParaRPr>
+          </a:p>
+          <a:p>
+            <a:pPr indent="0" lvl="0" marL="0" marR="0" rtl="0" algn="l">
+              <a:lnSpc>
+                <a:spcPct val="100000"/>
+              </a:lnSpc>
+              <a:spcBef>
+                <a:spcPts val="200"/>
+              </a:spcBef>
+              <a:spcAft>
+                <a:spcPts val="200"/>
+              </a:spcAft>
+              <a:buNone/>
+            </a:pPr>
+            <a:r>
+              <a:rPr b="1" i="0" lang="en-US" sz="830" u="none" strike="noStrike">
+                <a:solidFill>
+                  <a:srgbClr val="1E293B"/>
+                </a:solidFill>
+                <a:latin typeface="Courier New"/>
+                <a:ea typeface="Courier New"/>
+                <a:cs typeface="Courier New"/>
+                <a:sym typeface="Courier New"/>
+              </a:rPr>
+              <a:t>xlim, ylim, col</a:t>
+            </a:r>
+            <a:r>
+              <a:rPr b="0" i="0" lang="en-US" sz="830" u="none" strike="noStrike">
+                <a:solidFill>
+                  <a:srgbClr val="475569"/>
+                </a:solidFill>
+                <a:latin typeface="Arial"/>
+                <a:ea typeface="Arial"/>
+                <a:cs typeface="Arial"/>
+                <a:sym typeface="Arial"/>
+              </a:rPr>
+              <a:t> (axis bounds &amp; bar styling)</a:t>
+            </a:r>
+            <a:endParaRPr b="1" i="0" sz="1600" u="none" strike="noStrike">
+              <a:solidFill>
+                <a:srgbClr val="0284C7"/>
+              </a:solidFill>
+              <a:latin typeface="Courier New"/>
+              <a:ea typeface="Courier New"/>
+              <a:cs typeface="Courier New"/>
+              <a:sym typeface="Courier New"/>
+            </a:endParaRPr>
+          </a:p>
+        </p:txBody>
+      </p:sp>
+      <p:pic>
+        <p:nvPicPr>
+          <p:cNvPr id="140" name="Google Shape;140;p19"/>
+          <p:cNvPicPr preferRelativeResize="0"/>
+          <p:nvPr/>
+        </p:nvPicPr>
+        <p:blipFill rotWithShape="1">
+          <a:blip r:embed="rId3">
+            <a:alphaModFix/>
+          </a:blip>
+          <a:srcRect b="0" l="0" r="0" t="0"/>
+          <a:stretch/>
+        </p:blipFill>
+        <p:spPr>
+          <a:xfrm>
+            <a:off x="8082832" y="4953000"/>
+            <a:ext cx="3354900" cy="1447800"/>
+          </a:xfrm>
+          <a:prstGeom prst="rect">
+            <a:avLst/>
+          </a:prstGeom>
+          <a:noFill/>
+          <a:ln>
+            <a:noFill/>
+          </a:ln>
+        </p:spPr>
+      </p:pic>
+      <p:pic>
+        <p:nvPicPr>
+          <p:cNvPr id="141" name="Google Shape;141;p19"/>
+          <p:cNvPicPr preferRelativeResize="0"/>
+          <p:nvPr/>
+        </p:nvPicPr>
+        <p:blipFill rotWithShape="1">
+          <a:blip r:embed="rId4">
+            <a:alphaModFix/>
+          </a:blip>
+          <a:srcRect b="0" l="0" r="0" t="0"/>
+          <a:stretch/>
+        </p:blipFill>
+        <p:spPr>
+          <a:xfrm>
+            <a:off x="4418564" y="4953000"/>
+            <a:ext cx="3354900" cy="1447800"/>
+          </a:xfrm>
+          <a:prstGeom prst="rect">
+            <a:avLst/>
+          </a:prstGeom>
+          <a:noFill/>
+          <a:ln>
+            <a:noFill/>
+          </a:ln>
+        </p:spPr>
+      </p:pic>
+      <p:pic>
+        <p:nvPicPr>
+          <p:cNvPr id="142" name="Google Shape;142;p19"/>
+          <p:cNvPicPr preferRelativeResize="0"/>
+          <p:nvPr/>
+        </p:nvPicPr>
+        <p:blipFill rotWithShape="1">
+          <a:blip r:embed="rId5">
+            <a:alphaModFix/>
+          </a:blip>
+          <a:srcRect b="0" l="0" r="0" t="0"/>
+          <a:stretch/>
+        </p:blipFill>
+        <p:spPr>
+          <a:xfrm>
+            <a:off x="754297" y="4953000"/>
+            <a:ext cx="3354900" cy="1447800"/>
+          </a:xfrm>
+          <a:prstGeom prst="rect">
+            <a:avLst/>
+          </a:prstGeom>
+          <a:noFill/>
+          <a:ln>
+            <a:noFill/>
+          </a:ln>
+        </p:spPr>
+      </p:pic>
+    </p:spTree>
+  </p:cSld>
+  <p:clrMapOvr>
+    <a:masterClrMapping/>
+  </p:clrMapOvr>
+</p:sld>
+</file>
+
+<file path=ppt/slides/slide7.xml><?xml version="1.0" encoding="utf-8"?>
+<p:sld xmlns:a="http://schemas.openxmlformats.org/drawingml/2006/main" xmlns:r="http://schemas.openxmlformats.org/officeDocument/2006/relationships" xmlns:mc="http://schemas.openxmlformats.org/markup-compatibility/2006" xmlns:mv="urn:schemas-microsoft-com:mac:vml" xmlns:p="http://schemas.openxmlformats.org/presentationml/2006/main" xmlns:c="http://schemas.openxmlformats.org/drawingml/2006/chart" xmlns:dgm="http://schemas.openxmlformats.org/drawingml/2006/diagram" xmlns:o="urn:schemas-microsoft-com:office:office" xmlns:v="urn:schemas-microsoft-com:vml" xmlns:pvml="urn:schemas-microsoft-com:office:powerpoint" xmlns:com="http://schemas.openxmlformats.org/drawingml/2006/compatibility" xmlns:p14="http://schemas.microsoft.com/office/powerpoint/2010/main" xmlns:p15="http://schemas.microsoft.com/office/powerpoint/2012/main" xmlns:ahyp="http://schemas.microsoft.com/office/drawing/2018/hyperlinkcolor">
+  <p:cSld>
+    <p:bg>
+      <p:bgPr>
+        <a:solidFill>
+          <a:srgbClr val="F8FAFC"/>
+        </a:solidFill>
+      </p:bgPr>
+    </p:bg>
+    <p:spTree>
+      <p:nvGrpSpPr>
+        <p:cNvPr id="146" name="Shape 146"/>
+        <p:cNvGrpSpPr/>
+        <p:nvPr/>
+      </p:nvGrpSpPr>
+      <p:grpSpPr>
+        <a:xfrm>
+          <a:off x="0" y="0"/>
+          <a:ext cx="0" cy="0"/>
+          <a:chOff x="0" y="0"/>
+          <a:chExt cx="0" cy="0"/>
+        </a:xfrm>
+      </p:grpSpPr>
+      <p:sp>
+        <p:nvSpPr>
+          <p:cNvPr id="147" name="Google Shape;147;p20"/>
+          <p:cNvSpPr/>
+          <p:nvPr/>
+        </p:nvSpPr>
+        <p:spPr>
+          <a:xfrm>
+            <a:off x="731520" y="365760"/>
+            <a:ext cx="3238500" cy="320100"/>
+          </a:xfrm>
+          <a:prstGeom prst="roundRect">
+            <a:avLst>
+              <a:gd fmla="val 47618" name="adj"/>
+            </a:avLst>
+          </a:prstGeom>
+          <a:solidFill>
+            <a:srgbClr val="E2E8F0"/>
+          </a:solidFill>
+          <a:ln cap="flat" cmpd="sng" w="9525">
+            <a:solidFill>
+              <a:srgbClr val="CBD5E1"/>
+            </a:solidFill>
+            <a:prstDash val="solid"/>
+            <a:round/>
+            <a:headEnd len="sm" w="sm" type="none"/>
+            <a:tailEnd len="sm" w="sm" type="none"/>
+          </a:ln>
+        </p:spPr>
+        <p:txBody>
+          <a:bodyPr anchorCtr="0" anchor="ctr" bIns="38100" lIns="95250" spcFirstLastPara="1" rIns="95250" wrap="square" tIns="38100">
+            <a:noAutofit/>
+          </a:bodyPr>
+          <a:lstStyle/>
+          <a:p>
+            <a:pPr indent="0" lvl="0" marL="0" marR="0" rtl="0" algn="ctr">
+              <a:spcBef>
+                <a:spcPts val="0"/>
+              </a:spcBef>
+              <a:spcAft>
+                <a:spcPts val="0"/>
+              </a:spcAft>
+              <a:buNone/>
+            </a:pPr>
+            <a:r>
+              <a:rPr b="1" i="0" lang="en-US" sz="1000" u="none" strike="noStrike">
+                <a:solidFill>
+                  <a:srgbClr val="334155"/>
+                </a:solidFill>
+                <a:latin typeface="Arial"/>
+                <a:ea typeface="Arial"/>
+                <a:cs typeface="Arial"/>
+                <a:sym typeface="Arial"/>
+              </a:rPr>
+              <a:t>DATA VISUALIZATION IN R • PART II</a:t>
+            </a:r>
+            <a:endParaRPr b="1" i="0" sz="1000" u="none" strike="noStrike">
+              <a:solidFill>
+                <a:srgbClr val="334155"/>
+              </a:solidFill>
+              <a:latin typeface="Arial"/>
+              <a:ea typeface="Arial"/>
+              <a:cs typeface="Arial"/>
+              <a:sym typeface="Arial"/>
+            </a:endParaRPr>
+          </a:p>
+        </p:txBody>
+      </p:sp>
+      <p:sp>
+        <p:nvSpPr>
+          <p:cNvPr id="148" name="Google Shape;148;p20"/>
+          <p:cNvSpPr txBox="1"/>
+          <p:nvPr/>
+        </p:nvSpPr>
+        <p:spPr>
+          <a:xfrm>
+            <a:off x="731520" y="777240"/>
+            <a:ext cx="10728900" cy="731400"/>
+          </a:xfrm>
+          <a:prstGeom prst="rect">
+            <a:avLst/>
+          </a:prstGeom>
+          <a:solidFill>
+            <a:srgbClr val="000000">
+              <a:alpha val="0"/>
+            </a:srgbClr>
+          </a:solidFill>
+          <a:ln>
+            <a:noFill/>
+          </a:ln>
+        </p:spPr>
+        <p:txBody>
+          <a:bodyPr anchorCtr="0" anchor="ctr" bIns="0" lIns="0" spcFirstLastPara="1" rIns="0" wrap="square" tIns="0">
+            <a:noAutofit/>
+          </a:bodyPr>
+          <a:lstStyle/>
+          <a:p>
+            <a:pPr indent="0" lvl="0" marL="0" marR="0" rtl="0" algn="l">
+              <a:lnSpc>
+                <a:spcPct val="100000"/>
+              </a:lnSpc>
+              <a:spcBef>
+                <a:spcPts val="0"/>
+              </a:spcBef>
+              <a:spcAft>
+                <a:spcPts val="0"/>
+              </a:spcAft>
+              <a:buNone/>
+            </a:pPr>
+            <a:r>
+              <a:rPr b="0" i="0" lang="en-US" sz="2300" u="none" strike="noStrike">
+                <a:solidFill>
+                  <a:srgbClr val="0F172A"/>
+                </a:solidFill>
+                <a:latin typeface="Georgia"/>
+                <a:ea typeface="Georgia"/>
+                <a:cs typeface="Georgia"/>
+                <a:sym typeface="Georgia"/>
+              </a:rPr>
+              <a:t>Relationships &amp; Compositions: plot(), barplot(), &amp; pairs()</a:t>
+            </a:r>
+            <a:endParaRPr b="0" i="0" sz="2300" u="none" strike="noStrike">
+              <a:solidFill>
+                <a:srgbClr val="0F172A"/>
+              </a:solidFill>
+              <a:latin typeface="Georgia"/>
+              <a:ea typeface="Georgia"/>
+              <a:cs typeface="Georgia"/>
+              <a:sym typeface="Georgia"/>
+            </a:endParaRPr>
+          </a:p>
+          <a:p>
+            <a:pPr indent="0" lvl="0" marL="0" marR="0" rtl="0" algn="l">
+              <a:lnSpc>
+                <a:spcPct val="100000"/>
+              </a:lnSpc>
+              <a:spcBef>
+                <a:spcPts val="400"/>
+              </a:spcBef>
+              <a:spcAft>
+                <a:spcPts val="0"/>
+              </a:spcAft>
+              <a:buNone/>
+            </a:pPr>
+            <a:r>
+              <a:rPr b="0" i="0" lang="en-US" sz="1200" u="none" strike="noStrike">
+                <a:solidFill>
+                  <a:srgbClr val="059669"/>
+                </a:solidFill>
+                <a:latin typeface="Arial"/>
+                <a:ea typeface="Arial"/>
+                <a:cs typeface="Arial"/>
+                <a:sym typeface="Arial"/>
+              </a:rPr>
+              <a:t>Visualizing tree allometry curves, categorical inventory shares, and multi-variable correlation matrices.</a:t>
+            </a:r>
+            <a:endParaRPr b="0" i="0" sz="2300" u="none" strike="noStrike">
+              <a:solidFill>
+                <a:srgbClr val="0F172A"/>
+              </a:solidFill>
+              <a:latin typeface="Georgia"/>
+              <a:ea typeface="Georgia"/>
+              <a:cs typeface="Georgia"/>
+              <a:sym typeface="Georgia"/>
+            </a:endParaRPr>
+          </a:p>
+        </p:txBody>
+      </p:sp>
+      <p:sp>
+        <p:nvSpPr>
+          <p:cNvPr id="149" name="Google Shape;149;p20"/>
+          <p:cNvSpPr/>
+          <p:nvPr/>
+        </p:nvSpPr>
+        <p:spPr>
+          <a:xfrm>
+            <a:off x="8060055" y="1638300"/>
+            <a:ext cx="3400500" cy="3219600"/>
+          </a:xfrm>
+          <a:prstGeom prst="roundRect">
+            <a:avLst>
+              <a:gd fmla="val 4142" name="adj"/>
+            </a:avLst>
+          </a:prstGeom>
+          <a:solidFill>
+            <a:srgbClr val="FFFFFF"/>
+          </a:solidFill>
+          <a:ln cap="flat" cmpd="sng" w="9525">
+            <a:solidFill>
+              <a:srgbClr val="4F46E5"/>
+            </a:solidFill>
+            <a:prstDash val="solid"/>
+            <a:round/>
+            <a:headEnd len="sm" w="sm" type="none"/>
+            <a:tailEnd len="sm" w="sm" type="none"/>
+          </a:ln>
+        </p:spPr>
+        <p:txBody>
+          <a:bodyPr anchorCtr="0" anchor="t" bIns="133350" lIns="152400" spcFirstLastPara="1" rIns="152400" wrap="square" tIns="133350">
+            <a:noAutofit/>
+          </a:bodyPr>
+          <a:lstStyle/>
+          <a:p>
+            <a:pPr indent="0" lvl="0" marL="0" marR="0" rtl="0" algn="l">
+              <a:lnSpc>
+                <a:spcPct val="100000"/>
+              </a:lnSpc>
+              <a:spcBef>
+                <a:spcPts val="0"/>
+              </a:spcBef>
+              <a:spcAft>
+                <a:spcPts val="0"/>
+              </a:spcAft>
+              <a:buNone/>
+            </a:pPr>
+            <a:r>
+              <a:rPr b="1" i="0" lang="en-US" sz="1600" u="none" strike="noStrike">
+                <a:solidFill>
+                  <a:srgbClr val="4F46E5"/>
+                </a:solidFill>
+                <a:latin typeface="Courier New"/>
+                <a:ea typeface="Courier New"/>
+                <a:cs typeface="Courier New"/>
+                <a:sym typeface="Courier New"/>
+              </a:rPr>
+              <a:t>pairs(formula, ...)</a:t>
+            </a:r>
+            <a:endParaRPr b="1" i="0" sz="1600" u="none" strike="noStrike">
+              <a:solidFill>
+                <a:srgbClr val="4F46E5"/>
+              </a:solidFill>
+              <a:latin typeface="Courier New"/>
+              <a:ea typeface="Courier New"/>
+              <a:cs typeface="Courier New"/>
+              <a:sym typeface="Courier New"/>
+            </a:endParaRPr>
+          </a:p>
+          <a:p>
+            <a:pPr indent="0" lvl="0" marL="0" marR="0" rtl="0" algn="l">
+              <a:lnSpc>
+                <a:spcPct val="100000"/>
+              </a:lnSpc>
+              <a:spcBef>
+                <a:spcPts val="200"/>
+              </a:spcBef>
+              <a:spcAft>
+                <a:spcPts val="0"/>
+              </a:spcAft>
+              <a:buNone/>
+            </a:pPr>
+            <a:r>
+              <a:rPr b="1" i="0" lang="en-US" sz="800" u="none" strike="noStrike">
+                <a:solidFill>
+                  <a:srgbClr val="64748B"/>
+                </a:solidFill>
+                <a:latin typeface="Arial"/>
+                <a:ea typeface="Arial"/>
+                <a:cs typeface="Arial"/>
+                <a:sym typeface="Arial"/>
+              </a:rPr>
+              <a:t>INPUT: </a:t>
+            </a:r>
+            <a:r>
+              <a:rPr b="0" i="0" lang="en-US" sz="850" u="none" strike="noStrike">
+                <a:solidFill>
+                  <a:srgbClr val="0F172A"/>
+                </a:solidFill>
+                <a:latin typeface="Arial"/>
+                <a:ea typeface="Arial"/>
+                <a:cs typeface="Arial"/>
+                <a:sym typeface="Arial"/>
+              </a:rPr>
+              <a:t>3+ Continuous (dbh_cm, height_m, ba_m2)</a:t>
+            </a:r>
+            <a:endParaRPr b="1" i="0" sz="1600" u="none" strike="noStrike">
+              <a:solidFill>
+                <a:srgbClr val="4F46E5"/>
+              </a:solidFill>
+              <a:latin typeface="Courier New"/>
+              <a:ea typeface="Courier New"/>
+              <a:cs typeface="Courier New"/>
+              <a:sym typeface="Courier New"/>
+            </a:endParaRPr>
+          </a:p>
+          <a:p>
+            <a:pPr indent="0" lvl="0" marL="0" marR="0" rtl="0" algn="l">
+              <a:lnSpc>
+                <a:spcPct val="100000"/>
+              </a:lnSpc>
+              <a:spcBef>
+                <a:spcPts val="700"/>
+              </a:spcBef>
+              <a:spcAft>
+                <a:spcPts val="0"/>
+              </a:spcAft>
+              <a:buNone/>
+            </a:pPr>
+            <a:r>
+              <a:rPr b="1" i="0" lang="en-US" sz="780" u="none" strike="noStrike">
+                <a:solidFill>
+                  <a:srgbClr val="4F46E5"/>
+                </a:solidFill>
+                <a:latin typeface="Arial"/>
+                <a:ea typeface="Arial"/>
+                <a:cs typeface="Arial"/>
+                <a:sym typeface="Arial"/>
+              </a:rPr>
+              <a:t>FORESTRY APPLICATION (WHEN &amp; WHY)</a:t>
+            </a:r>
+            <a:endParaRPr b="1" i="0" sz="1600" u="none" strike="noStrike">
+              <a:solidFill>
+                <a:srgbClr val="4F46E5"/>
+              </a:solidFill>
+              <a:latin typeface="Courier New"/>
+              <a:ea typeface="Courier New"/>
+              <a:cs typeface="Courier New"/>
+              <a:sym typeface="Courier New"/>
+            </a:endParaRPr>
+          </a:p>
+          <a:p>
+            <a:pPr indent="0" lvl="0" marL="0" marR="0" rtl="0" algn="l">
+              <a:lnSpc>
+                <a:spcPct val="114000"/>
+              </a:lnSpc>
+              <a:spcBef>
+                <a:spcPts val="200"/>
+              </a:spcBef>
+              <a:spcAft>
+                <a:spcPts val="0"/>
+              </a:spcAft>
+              <a:buNone/>
+            </a:pPr>
+            <a:r>
+              <a:rPr b="0" i="0" lang="en-US" sz="880" u="none" strike="noStrike">
+                <a:solidFill>
+                  <a:srgbClr val="334155"/>
+                </a:solidFill>
+                <a:latin typeface="Arial"/>
+                <a:ea typeface="Arial"/>
+                <a:cs typeface="Arial"/>
+                <a:sym typeface="Arial"/>
+              </a:rPr>
+              <a:t>Instant correlation scan across all numeric columns to detect linear vs. power-law scaling (e.g., Basal Area ∝ DBH²).</a:t>
+            </a:r>
+            <a:endParaRPr b="1" i="0" sz="1600" u="none" strike="noStrike">
+              <a:solidFill>
+                <a:srgbClr val="4F46E5"/>
+              </a:solidFill>
+              <a:latin typeface="Courier New"/>
+              <a:ea typeface="Courier New"/>
+              <a:cs typeface="Courier New"/>
+              <a:sym typeface="Courier New"/>
+            </a:endParaRPr>
+          </a:p>
+          <a:p>
+            <a:pPr indent="0" lvl="0" marL="0" marR="0" rtl="0" algn="l">
+              <a:lnSpc>
+                <a:spcPct val="100000"/>
+              </a:lnSpc>
+              <a:spcBef>
+                <a:spcPts val="700"/>
+              </a:spcBef>
+              <a:spcAft>
+                <a:spcPts val="0"/>
+              </a:spcAft>
+              <a:buNone/>
+            </a:pPr>
+            <a:r>
+              <a:rPr b="1" i="0" lang="en-US" sz="780" u="none" strike="noStrike">
+                <a:solidFill>
+                  <a:srgbClr val="4F46E5"/>
+                </a:solidFill>
+                <a:latin typeface="Arial"/>
+                <a:ea typeface="Arial"/>
+                <a:cs typeface="Arial"/>
+                <a:sym typeface="Arial"/>
+              </a:rPr>
+              <a:t>TOP PARAMETERS TO TWEAK IN CLASS</a:t>
+            </a:r>
+            <a:endParaRPr b="1" i="0" sz="1600" u="none" strike="noStrike">
+              <a:solidFill>
+                <a:srgbClr val="4F46E5"/>
+              </a:solidFill>
+              <a:latin typeface="Courier New"/>
+              <a:ea typeface="Courier New"/>
+              <a:cs typeface="Courier New"/>
+              <a:sym typeface="Courier New"/>
+            </a:endParaRPr>
+          </a:p>
+          <a:p>
+            <a:pPr indent="0" lvl="0" marL="0" marR="0" rtl="0" algn="l">
+              <a:lnSpc>
+                <a:spcPct val="100000"/>
+              </a:lnSpc>
+              <a:spcBef>
+                <a:spcPts val="200"/>
+              </a:spcBef>
+              <a:spcAft>
+                <a:spcPts val="0"/>
+              </a:spcAft>
+              <a:buNone/>
+            </a:pPr>
+            <a:r>
+              <a:rPr b="1" i="0" lang="en-US" sz="830" u="none" strike="noStrike">
+                <a:solidFill>
+                  <a:srgbClr val="1E293B"/>
+                </a:solidFill>
+                <a:latin typeface="Courier New"/>
+                <a:ea typeface="Courier New"/>
+                <a:cs typeface="Courier New"/>
+                <a:sym typeface="Courier New"/>
+              </a:rPr>
+              <a:t>panel = panel.smooth</a:t>
+            </a:r>
+            <a:r>
+              <a:rPr b="0" i="0" lang="en-US" sz="830" u="none" strike="noStrike">
+                <a:solidFill>
+                  <a:srgbClr val="475569"/>
+                </a:solidFill>
+                <a:latin typeface="Arial"/>
+                <a:ea typeface="Arial"/>
+                <a:cs typeface="Arial"/>
+                <a:sym typeface="Arial"/>
+              </a:rPr>
+              <a:t> (spline loess trend fit)</a:t>
+            </a:r>
+            <a:endParaRPr b="1" i="0" sz="1600" u="none" strike="noStrike">
+              <a:solidFill>
+                <a:srgbClr val="4F46E5"/>
+              </a:solidFill>
+              <a:latin typeface="Courier New"/>
+              <a:ea typeface="Courier New"/>
+              <a:cs typeface="Courier New"/>
+              <a:sym typeface="Courier New"/>
+            </a:endParaRPr>
+          </a:p>
+          <a:p>
+            <a:pPr indent="0" lvl="0" marL="0" marR="0" rtl="0" algn="l">
+              <a:lnSpc>
+                <a:spcPct val="100000"/>
+              </a:lnSpc>
+              <a:spcBef>
+                <a:spcPts val="200"/>
+              </a:spcBef>
+              <a:spcAft>
+                <a:spcPts val="0"/>
+              </a:spcAft>
+              <a:buNone/>
+            </a:pPr>
+            <a:r>
+              <a:rPr b="1" i="0" lang="en-US" sz="830" u="none" strike="noStrike">
+                <a:solidFill>
+                  <a:srgbClr val="1E293B"/>
+                </a:solidFill>
+                <a:latin typeface="Courier New"/>
+                <a:ea typeface="Courier New"/>
+                <a:cs typeface="Courier New"/>
+                <a:sym typeface="Courier New"/>
+              </a:rPr>
+              <a:t>col, pch = 20</a:t>
+            </a:r>
+            <a:r>
+              <a:rPr b="0" i="0" lang="en-US" sz="830" u="none" strike="noStrike">
+                <a:solidFill>
+                  <a:srgbClr val="475569"/>
+                </a:solidFill>
+                <a:latin typeface="Arial"/>
+                <a:ea typeface="Arial"/>
+                <a:cs typeface="Arial"/>
+                <a:sym typeface="Arial"/>
+              </a:rPr>
+              <a:t> (marker transparency &amp; point size)</a:t>
+            </a:r>
+            <a:endParaRPr b="1" i="0" sz="1600" u="none" strike="noStrike">
+              <a:solidFill>
+                <a:srgbClr val="4F46E5"/>
+              </a:solidFill>
+              <a:latin typeface="Courier New"/>
+              <a:ea typeface="Courier New"/>
+              <a:cs typeface="Courier New"/>
+              <a:sym typeface="Courier New"/>
+            </a:endParaRPr>
+          </a:p>
+          <a:p>
+            <a:pPr indent="0" lvl="0" marL="0" marR="0" rtl="0" algn="l">
+              <a:lnSpc>
+                <a:spcPct val="100000"/>
+              </a:lnSpc>
+              <a:spcBef>
+                <a:spcPts val="200"/>
+              </a:spcBef>
+              <a:spcAft>
+                <a:spcPts val="0"/>
+              </a:spcAft>
+              <a:buNone/>
+            </a:pPr>
+            <a:r>
+              <a:rPr b="1" i="0" lang="en-US" sz="830" u="none" strike="noStrike">
+                <a:solidFill>
+                  <a:srgbClr val="1E293B"/>
+                </a:solidFill>
+                <a:latin typeface="Courier New"/>
+                <a:ea typeface="Courier New"/>
+                <a:cs typeface="Courier New"/>
+                <a:sym typeface="Courier New"/>
+              </a:rPr>
+              <a:t>lower.panel = NULL</a:t>
+            </a:r>
+            <a:r>
+              <a:rPr b="0" i="0" lang="en-US" sz="830" u="none" strike="noStrike">
+                <a:solidFill>
+                  <a:srgbClr val="475569"/>
+                </a:solidFill>
+                <a:latin typeface="Arial"/>
+                <a:ea typeface="Arial"/>
+                <a:cs typeface="Arial"/>
+                <a:sym typeface="Arial"/>
+              </a:rPr>
+              <a:t> (drop redundant mirror half)</a:t>
+            </a:r>
+            <a:endParaRPr b="1" i="0" sz="1600" u="none" strike="noStrike">
+              <a:solidFill>
+                <a:srgbClr val="4F46E5"/>
+              </a:solidFill>
+              <a:latin typeface="Courier New"/>
+              <a:ea typeface="Courier New"/>
+              <a:cs typeface="Courier New"/>
+              <a:sym typeface="Courier New"/>
+            </a:endParaRPr>
+          </a:p>
+          <a:p>
+            <a:pPr indent="0" lvl="0" marL="0" marR="0" rtl="0" algn="l">
+              <a:lnSpc>
+                <a:spcPct val="100000"/>
+              </a:lnSpc>
+              <a:spcBef>
+                <a:spcPts val="200"/>
+              </a:spcBef>
+              <a:spcAft>
+                <a:spcPts val="200"/>
+              </a:spcAft>
+              <a:buNone/>
+            </a:pPr>
+            <a:r>
+              <a:rPr b="1" i="0" lang="en-US" sz="830" u="none" strike="noStrike">
+                <a:solidFill>
+                  <a:srgbClr val="1E293B"/>
+                </a:solidFill>
+                <a:latin typeface="Courier New"/>
+                <a:ea typeface="Courier New"/>
+                <a:cs typeface="Courier New"/>
+                <a:sym typeface="Courier New"/>
+              </a:rPr>
+              <a:t>cex.labels</a:t>
+            </a:r>
+            <a:r>
+              <a:rPr b="0" i="0" lang="en-US" sz="830" u="none" strike="noStrike">
+                <a:solidFill>
+                  <a:srgbClr val="475569"/>
+                </a:solidFill>
+                <a:latin typeface="Arial"/>
+                <a:ea typeface="Arial"/>
+                <a:cs typeface="Arial"/>
+                <a:sym typeface="Arial"/>
+              </a:rPr>
+              <a:t> (diagonal variable font size)</a:t>
+            </a:r>
+            <a:endParaRPr b="1" i="0" sz="1600" u="none" strike="noStrike">
+              <a:solidFill>
+                <a:srgbClr val="4F46E5"/>
+              </a:solidFill>
+              <a:latin typeface="Courier New"/>
+              <a:ea typeface="Courier New"/>
+              <a:cs typeface="Courier New"/>
+              <a:sym typeface="Courier New"/>
+            </a:endParaRPr>
+          </a:p>
+        </p:txBody>
+      </p:sp>
+      <p:sp>
+        <p:nvSpPr>
+          <p:cNvPr id="150" name="Google Shape;150;p20"/>
+          <p:cNvSpPr/>
+          <p:nvPr/>
+        </p:nvSpPr>
+        <p:spPr>
+          <a:xfrm>
+            <a:off x="4395788" y="1638300"/>
+            <a:ext cx="3400500" cy="3219600"/>
+          </a:xfrm>
+          <a:prstGeom prst="roundRect">
+            <a:avLst>
+              <a:gd fmla="val 4142" name="adj"/>
+            </a:avLst>
+          </a:prstGeom>
+          <a:solidFill>
+            <a:srgbClr val="FFFFFF"/>
+          </a:solidFill>
+          <a:ln cap="flat" cmpd="sng" w="9525">
+            <a:solidFill>
+              <a:srgbClr val="059669"/>
+            </a:solidFill>
+            <a:prstDash val="solid"/>
+            <a:round/>
+            <a:headEnd len="sm" w="sm" type="none"/>
+            <a:tailEnd len="sm" w="sm" type="none"/>
+          </a:ln>
+        </p:spPr>
+        <p:txBody>
+          <a:bodyPr anchorCtr="0" anchor="t" bIns="133350" lIns="152400" spcFirstLastPara="1" rIns="152400" wrap="square" tIns="133350">
+            <a:noAutofit/>
+          </a:bodyPr>
+          <a:lstStyle/>
+          <a:p>
+            <a:pPr indent="0" lvl="0" marL="0" marR="0" rtl="0" algn="l">
+              <a:lnSpc>
+                <a:spcPct val="100000"/>
+              </a:lnSpc>
+              <a:spcBef>
+                <a:spcPts val="0"/>
+              </a:spcBef>
+              <a:spcAft>
+                <a:spcPts val="0"/>
+              </a:spcAft>
+              <a:buNone/>
+            </a:pPr>
+            <a:r>
+              <a:rPr b="1" i="0" lang="en-US" sz="1600" u="none" strike="noStrike">
+                <a:solidFill>
+                  <a:srgbClr val="059669"/>
+                </a:solidFill>
+                <a:latin typeface="Courier New"/>
+                <a:ea typeface="Courier New"/>
+                <a:cs typeface="Courier New"/>
+                <a:sym typeface="Courier New"/>
+              </a:rPr>
+              <a:t>barplot(height, ...)</a:t>
+            </a:r>
+            <a:endParaRPr b="1" i="0" sz="1600" u="none" strike="noStrike">
+              <a:solidFill>
+                <a:srgbClr val="059669"/>
+              </a:solidFill>
+              <a:latin typeface="Courier New"/>
+              <a:ea typeface="Courier New"/>
+              <a:cs typeface="Courier New"/>
+              <a:sym typeface="Courier New"/>
+            </a:endParaRPr>
+          </a:p>
+          <a:p>
+            <a:pPr indent="0" lvl="0" marL="0" marR="0" rtl="0" algn="l">
+              <a:lnSpc>
+                <a:spcPct val="100000"/>
+              </a:lnSpc>
+              <a:spcBef>
+                <a:spcPts val="200"/>
+              </a:spcBef>
+              <a:spcAft>
+                <a:spcPts val="0"/>
+              </a:spcAft>
+              <a:buNone/>
+            </a:pPr>
+            <a:r>
+              <a:rPr b="1" i="0" lang="en-US" sz="800" u="none" strike="noStrike">
+                <a:solidFill>
+                  <a:srgbClr val="64748B"/>
+                </a:solidFill>
+                <a:latin typeface="Arial"/>
+                <a:ea typeface="Arial"/>
+                <a:cs typeface="Arial"/>
+                <a:sym typeface="Arial"/>
+              </a:rPr>
+              <a:t>INPUT: </a:t>
+            </a:r>
+            <a:r>
+              <a:rPr b="0" i="0" lang="en-US" sz="850" u="none" strike="noStrike">
+                <a:solidFill>
+                  <a:srgbClr val="0F172A"/>
+                </a:solidFill>
+                <a:latin typeface="Arial"/>
+                <a:ea typeface="Arial"/>
+                <a:cs typeface="Arial"/>
+                <a:sym typeface="Arial"/>
+              </a:rPr>
+              <a:t>1 or 2 Categorical (table(species))</a:t>
+            </a:r>
+            <a:endParaRPr b="1" i="0" sz="1600" u="none" strike="noStrike">
+              <a:solidFill>
+                <a:srgbClr val="059669"/>
+              </a:solidFill>
+              <a:latin typeface="Courier New"/>
+              <a:ea typeface="Courier New"/>
+              <a:cs typeface="Courier New"/>
+              <a:sym typeface="Courier New"/>
+            </a:endParaRPr>
+          </a:p>
+          <a:p>
+            <a:pPr indent="0" lvl="0" marL="0" marR="0" rtl="0" algn="l">
+              <a:lnSpc>
+                <a:spcPct val="100000"/>
+              </a:lnSpc>
+              <a:spcBef>
+                <a:spcPts val="700"/>
+              </a:spcBef>
+              <a:spcAft>
+                <a:spcPts val="0"/>
+              </a:spcAft>
+              <a:buNone/>
+            </a:pPr>
+            <a:r>
+              <a:rPr b="1" i="0" lang="en-US" sz="780" u="none" strike="noStrike">
+                <a:solidFill>
+                  <a:srgbClr val="059669"/>
+                </a:solidFill>
+                <a:latin typeface="Arial"/>
+                <a:ea typeface="Arial"/>
+                <a:cs typeface="Arial"/>
+                <a:sym typeface="Arial"/>
+              </a:rPr>
+              <a:t>FORESTRY APPLICATION (WHEN &amp; WHY)</a:t>
+            </a:r>
+            <a:endParaRPr b="1" i="0" sz="1600" u="none" strike="noStrike">
+              <a:solidFill>
+                <a:srgbClr val="059669"/>
+              </a:solidFill>
+              <a:latin typeface="Courier New"/>
+              <a:ea typeface="Courier New"/>
+              <a:cs typeface="Courier New"/>
+              <a:sym typeface="Courier New"/>
+            </a:endParaRPr>
+          </a:p>
+          <a:p>
+            <a:pPr indent="0" lvl="0" marL="0" marR="0" rtl="0" algn="l">
+              <a:lnSpc>
+                <a:spcPct val="114000"/>
+              </a:lnSpc>
+              <a:spcBef>
+                <a:spcPts val="200"/>
+              </a:spcBef>
+              <a:spcAft>
+                <a:spcPts val="0"/>
+              </a:spcAft>
+              <a:buNone/>
+            </a:pPr>
+            <a:r>
+              <a:rPr b="0" i="0" lang="en-US" sz="880" u="none" strike="noStrike">
+                <a:solidFill>
+                  <a:srgbClr val="334155"/>
+                </a:solidFill>
+                <a:latin typeface="Arial"/>
+                <a:ea typeface="Arial"/>
+                <a:cs typeface="Arial"/>
+                <a:sym typeface="Arial"/>
+              </a:rPr>
+              <a:t>Compare stem counts, size-class frequencies (Sapling/Pole/Sawtimber), or species shares across inventory plots.</a:t>
+            </a:r>
+            <a:endParaRPr b="1" i="0" sz="1600" u="none" strike="noStrike">
+              <a:solidFill>
+                <a:srgbClr val="059669"/>
+              </a:solidFill>
+              <a:latin typeface="Courier New"/>
+              <a:ea typeface="Courier New"/>
+              <a:cs typeface="Courier New"/>
+              <a:sym typeface="Courier New"/>
+            </a:endParaRPr>
+          </a:p>
+          <a:p>
+            <a:pPr indent="0" lvl="0" marL="0" marR="0" rtl="0" algn="l">
+              <a:lnSpc>
+                <a:spcPct val="100000"/>
+              </a:lnSpc>
+              <a:spcBef>
+                <a:spcPts val="700"/>
+              </a:spcBef>
+              <a:spcAft>
+                <a:spcPts val="0"/>
+              </a:spcAft>
+              <a:buNone/>
+            </a:pPr>
+            <a:r>
+              <a:rPr b="1" i="0" lang="en-US" sz="780" u="none" strike="noStrike">
+                <a:solidFill>
+                  <a:srgbClr val="059669"/>
+                </a:solidFill>
+                <a:latin typeface="Arial"/>
+                <a:ea typeface="Arial"/>
+                <a:cs typeface="Arial"/>
+                <a:sym typeface="Arial"/>
+              </a:rPr>
+              <a:t>TOP PARAMETERS TO TWEAK IN CLASS</a:t>
+            </a:r>
+            <a:endParaRPr b="1" i="0" sz="1600" u="none" strike="noStrike">
+              <a:solidFill>
+                <a:srgbClr val="059669"/>
+              </a:solidFill>
+              <a:latin typeface="Courier New"/>
+              <a:ea typeface="Courier New"/>
+              <a:cs typeface="Courier New"/>
+              <a:sym typeface="Courier New"/>
+            </a:endParaRPr>
+          </a:p>
+          <a:p>
+            <a:pPr indent="0" lvl="0" marL="0" marR="0" rtl="0" algn="l">
+              <a:lnSpc>
+                <a:spcPct val="100000"/>
+              </a:lnSpc>
+              <a:spcBef>
+                <a:spcPts val="200"/>
+              </a:spcBef>
+              <a:spcAft>
+                <a:spcPts val="0"/>
+              </a:spcAft>
+              <a:buNone/>
+            </a:pPr>
+            <a:r>
+              <a:rPr b="1" i="0" lang="en-US" sz="830" u="none" strike="noStrike">
+                <a:solidFill>
+                  <a:srgbClr val="1E293B"/>
+                </a:solidFill>
+                <a:latin typeface="Courier New"/>
+                <a:ea typeface="Courier New"/>
+                <a:cs typeface="Courier New"/>
+                <a:sym typeface="Courier New"/>
+              </a:rPr>
+              <a:t>beside = TRUE</a:t>
+            </a:r>
+            <a:r>
+              <a:rPr b="0" i="0" lang="en-US" sz="830" u="none" strike="noStrike">
+                <a:solidFill>
+                  <a:srgbClr val="475569"/>
+                </a:solidFill>
+                <a:latin typeface="Arial"/>
+                <a:ea typeface="Arial"/>
+                <a:cs typeface="Arial"/>
+                <a:sym typeface="Arial"/>
+              </a:rPr>
+              <a:t> (grouped vs. stacked bars)</a:t>
+            </a:r>
+            <a:endParaRPr b="1" i="0" sz="1600" u="none" strike="noStrike">
+              <a:solidFill>
+                <a:srgbClr val="059669"/>
+              </a:solidFill>
+              <a:latin typeface="Courier New"/>
+              <a:ea typeface="Courier New"/>
+              <a:cs typeface="Courier New"/>
+              <a:sym typeface="Courier New"/>
+            </a:endParaRPr>
+          </a:p>
+          <a:p>
+            <a:pPr indent="0" lvl="0" marL="0" marR="0" rtl="0" algn="l">
+              <a:lnSpc>
+                <a:spcPct val="100000"/>
+              </a:lnSpc>
+              <a:spcBef>
+                <a:spcPts val="200"/>
+              </a:spcBef>
+              <a:spcAft>
+                <a:spcPts val="0"/>
+              </a:spcAft>
+              <a:buNone/>
+            </a:pPr>
+            <a:r>
+              <a:rPr b="1" i="0" lang="en-US" sz="830" u="none" strike="noStrike">
+                <a:solidFill>
+                  <a:srgbClr val="1E293B"/>
+                </a:solidFill>
+                <a:latin typeface="Courier New"/>
+                <a:ea typeface="Courier New"/>
+                <a:cs typeface="Courier New"/>
+                <a:sym typeface="Courier New"/>
+              </a:rPr>
+              <a:t>horiz = TRUE</a:t>
+            </a:r>
+            <a:r>
+              <a:rPr b="0" i="0" lang="en-US" sz="830" u="none" strike="noStrike">
+                <a:solidFill>
+                  <a:srgbClr val="475569"/>
+                </a:solidFill>
+                <a:latin typeface="Arial"/>
+                <a:ea typeface="Arial"/>
+                <a:cs typeface="Arial"/>
+                <a:sym typeface="Arial"/>
+              </a:rPr>
+              <a:t> (horizontal bars for long names)</a:t>
+            </a:r>
+            <a:endParaRPr b="1" i="0" sz="1600" u="none" strike="noStrike">
+              <a:solidFill>
+                <a:srgbClr val="059669"/>
+              </a:solidFill>
+              <a:latin typeface="Courier New"/>
+              <a:ea typeface="Courier New"/>
+              <a:cs typeface="Courier New"/>
+              <a:sym typeface="Courier New"/>
+            </a:endParaRPr>
+          </a:p>
+          <a:p>
+            <a:pPr indent="0" lvl="0" marL="0" marR="0" rtl="0" algn="l">
+              <a:lnSpc>
+                <a:spcPct val="100000"/>
+              </a:lnSpc>
+              <a:spcBef>
+                <a:spcPts val="200"/>
+              </a:spcBef>
+              <a:spcAft>
+                <a:spcPts val="0"/>
+              </a:spcAft>
+              <a:buNone/>
+            </a:pPr>
+            <a:r>
+              <a:rPr b="1" i="0" lang="en-US" sz="830" u="none" strike="noStrike">
+                <a:solidFill>
+                  <a:srgbClr val="1E293B"/>
+                </a:solidFill>
+                <a:latin typeface="Courier New"/>
+                <a:ea typeface="Courier New"/>
+                <a:cs typeface="Courier New"/>
+                <a:sym typeface="Courier New"/>
+              </a:rPr>
+              <a:t>names.arg</a:t>
+            </a:r>
+            <a:r>
+              <a:rPr b="0" i="0" lang="en-US" sz="830" u="none" strike="noStrike">
+                <a:solidFill>
+                  <a:srgbClr val="475569"/>
+                </a:solidFill>
+                <a:latin typeface="Arial"/>
+                <a:ea typeface="Arial"/>
+                <a:cs typeface="Arial"/>
+                <a:sym typeface="Arial"/>
+              </a:rPr>
+              <a:t> (custom category label vector)</a:t>
+            </a:r>
+            <a:endParaRPr b="1" i="0" sz="1600" u="none" strike="noStrike">
+              <a:solidFill>
+                <a:srgbClr val="059669"/>
+              </a:solidFill>
+              <a:latin typeface="Courier New"/>
+              <a:ea typeface="Courier New"/>
+              <a:cs typeface="Courier New"/>
+              <a:sym typeface="Courier New"/>
+            </a:endParaRPr>
+          </a:p>
+          <a:p>
+            <a:pPr indent="0" lvl="0" marL="0" marR="0" rtl="0" algn="l">
+              <a:lnSpc>
+                <a:spcPct val="100000"/>
+              </a:lnSpc>
+              <a:spcBef>
+                <a:spcPts val="200"/>
+              </a:spcBef>
+              <a:spcAft>
+                <a:spcPts val="200"/>
+              </a:spcAft>
+              <a:buNone/>
+            </a:pPr>
+            <a:r>
+              <a:rPr b="1" i="0" lang="en-US" sz="830" u="none" strike="noStrike">
+                <a:solidFill>
+                  <a:srgbClr val="1E293B"/>
+                </a:solidFill>
+                <a:latin typeface="Courier New"/>
+                <a:ea typeface="Courier New"/>
+                <a:cs typeface="Courier New"/>
+                <a:sym typeface="Courier New"/>
+              </a:rPr>
+              <a:t>legend.text, ylim</a:t>
+            </a:r>
+            <a:r>
+              <a:rPr b="0" i="0" lang="en-US" sz="830" u="none" strike="noStrike">
+                <a:solidFill>
+                  <a:srgbClr val="475569"/>
+                </a:solidFill>
+                <a:latin typeface="Arial"/>
+                <a:ea typeface="Arial"/>
+                <a:cs typeface="Arial"/>
+                <a:sym typeface="Arial"/>
+              </a:rPr>
+              <a:t> (legend &amp; headroom expansion)</a:t>
+            </a:r>
+            <a:endParaRPr b="1" i="0" sz="1600" u="none" strike="noStrike">
+              <a:solidFill>
+                <a:srgbClr val="059669"/>
+              </a:solidFill>
+              <a:latin typeface="Courier New"/>
+              <a:ea typeface="Courier New"/>
+              <a:cs typeface="Courier New"/>
+              <a:sym typeface="Courier New"/>
+            </a:endParaRPr>
+          </a:p>
+        </p:txBody>
+      </p:sp>
+      <p:sp>
+        <p:nvSpPr>
+          <p:cNvPr id="151" name="Google Shape;151;p20"/>
+          <p:cNvSpPr/>
+          <p:nvPr/>
+        </p:nvSpPr>
+        <p:spPr>
+          <a:xfrm>
+            <a:off x="731520" y="1638300"/>
+            <a:ext cx="3400500" cy="3219600"/>
+          </a:xfrm>
+          <a:prstGeom prst="roundRect">
+            <a:avLst>
+              <a:gd fmla="val 4142" name="adj"/>
+            </a:avLst>
+          </a:prstGeom>
+          <a:solidFill>
+            <a:srgbClr val="FFFFFF"/>
+          </a:solidFill>
+          <a:ln cap="flat" cmpd="sng" w="9525">
+            <a:solidFill>
+              <a:srgbClr val="0284C7"/>
+            </a:solidFill>
+            <a:prstDash val="solid"/>
+            <a:round/>
+            <a:headEnd len="sm" w="sm" type="none"/>
+            <a:tailEnd len="sm" w="sm" type="none"/>
+          </a:ln>
+        </p:spPr>
+        <p:txBody>
+          <a:bodyPr anchorCtr="0" anchor="t" bIns="133350" lIns="152400" spcFirstLastPara="1" rIns="152400" wrap="square" tIns="133350">
+            <a:noAutofit/>
+          </a:bodyPr>
+          <a:lstStyle/>
+          <a:p>
+            <a:pPr indent="0" lvl="0" marL="0" marR="0" rtl="0" algn="l">
+              <a:lnSpc>
+                <a:spcPct val="100000"/>
+              </a:lnSpc>
+              <a:spcBef>
+                <a:spcPts val="0"/>
+              </a:spcBef>
+              <a:spcAft>
+                <a:spcPts val="0"/>
+              </a:spcAft>
+              <a:buNone/>
+            </a:pPr>
+            <a:r>
+              <a:rPr b="1" i="0" lang="en-US" sz="1600" u="none" strike="noStrike">
+                <a:solidFill>
+                  <a:srgbClr val="0284C7"/>
+                </a:solidFill>
+                <a:latin typeface="Courier New"/>
+                <a:ea typeface="Courier New"/>
+                <a:cs typeface="Courier New"/>
+                <a:sym typeface="Courier New"/>
+              </a:rPr>
+              <a:t>plot(x, y, ...)</a:t>
+            </a:r>
+            <a:endParaRPr b="1" i="0" sz="1600" u="none" strike="noStrike">
+              <a:solidFill>
+                <a:srgbClr val="0284C7"/>
+              </a:solidFill>
+              <a:latin typeface="Courier New"/>
+              <a:ea typeface="Courier New"/>
+              <a:cs typeface="Courier New"/>
+              <a:sym typeface="Courier New"/>
+            </a:endParaRPr>
+          </a:p>
+          <a:p>
+            <a:pPr indent="0" lvl="0" marL="0" marR="0" rtl="0" algn="l">
+              <a:lnSpc>
+                <a:spcPct val="100000"/>
+              </a:lnSpc>
+              <a:spcBef>
+                <a:spcPts val="200"/>
+              </a:spcBef>
+              <a:spcAft>
+                <a:spcPts val="0"/>
+              </a:spcAft>
+              <a:buNone/>
+            </a:pPr>
+            <a:r>
+              <a:rPr b="1" i="0" lang="en-US" sz="800" u="none" strike="noStrike">
+                <a:solidFill>
+                  <a:srgbClr val="64748B"/>
+                </a:solidFill>
+                <a:latin typeface="Arial"/>
+                <a:ea typeface="Arial"/>
+                <a:cs typeface="Arial"/>
+                <a:sym typeface="Arial"/>
+              </a:rPr>
+              <a:t>INPUT: </a:t>
+            </a:r>
+            <a:r>
+              <a:rPr b="0" i="0" lang="en-US" sz="850" u="none" strike="noStrike">
+                <a:solidFill>
+                  <a:srgbClr val="0F172A"/>
+                </a:solidFill>
+                <a:latin typeface="Arial"/>
+                <a:ea typeface="Arial"/>
+                <a:cs typeface="Arial"/>
+                <a:sym typeface="Arial"/>
+              </a:rPr>
+              <a:t>2 Continuous (dbh_cm, height_m)</a:t>
+            </a:r>
+            <a:endParaRPr b="1" i="0" sz="1600" u="none" strike="noStrike">
+              <a:solidFill>
+                <a:srgbClr val="0284C7"/>
+              </a:solidFill>
+              <a:latin typeface="Courier New"/>
+              <a:ea typeface="Courier New"/>
+              <a:cs typeface="Courier New"/>
+              <a:sym typeface="Courier New"/>
+            </a:endParaRPr>
+          </a:p>
+          <a:p>
+            <a:pPr indent="0" lvl="0" marL="0" marR="0" rtl="0" algn="l">
+              <a:lnSpc>
+                <a:spcPct val="100000"/>
+              </a:lnSpc>
+              <a:spcBef>
+                <a:spcPts val="700"/>
+              </a:spcBef>
+              <a:spcAft>
+                <a:spcPts val="0"/>
+              </a:spcAft>
+              <a:buNone/>
+            </a:pPr>
+            <a:r>
+              <a:rPr b="1" i="0" lang="en-US" sz="780" u="none" strike="noStrike">
+                <a:solidFill>
+                  <a:srgbClr val="0284C7"/>
+                </a:solidFill>
+                <a:latin typeface="Arial"/>
+                <a:ea typeface="Arial"/>
+                <a:cs typeface="Arial"/>
+                <a:sym typeface="Arial"/>
+              </a:rPr>
+              <a:t>FORESTRY APPLICATION (WHEN &amp; WHY)</a:t>
+            </a:r>
+            <a:endParaRPr b="1" i="0" sz="1600" u="none" strike="noStrike">
+              <a:solidFill>
+                <a:srgbClr val="0284C7"/>
+              </a:solidFill>
+              <a:latin typeface="Courier New"/>
+              <a:ea typeface="Courier New"/>
+              <a:cs typeface="Courier New"/>
+              <a:sym typeface="Courier New"/>
+            </a:endParaRPr>
+          </a:p>
+          <a:p>
+            <a:pPr indent="0" lvl="0" marL="0" marR="0" rtl="0" algn="l">
+              <a:lnSpc>
+                <a:spcPct val="114000"/>
+              </a:lnSpc>
+              <a:spcBef>
+                <a:spcPts val="200"/>
+              </a:spcBef>
+              <a:spcAft>
+                <a:spcPts val="0"/>
+              </a:spcAft>
+              <a:buNone/>
+            </a:pPr>
+            <a:r>
+              <a:rPr b="0" i="0" lang="en-US" sz="880" u="none" strike="noStrike">
+                <a:solidFill>
+                  <a:srgbClr val="334155"/>
+                </a:solidFill>
+                <a:latin typeface="Arial"/>
+                <a:ea typeface="Arial"/>
+                <a:cs typeface="Arial"/>
+                <a:sym typeface="Arial"/>
+              </a:rPr>
+              <a:t>Inspect height–diameter or biomass allometry, check linearity vs. saturation curves, and spot transcription outliers.</a:t>
+            </a:r>
+            <a:endParaRPr b="1" i="0" sz="1600" u="none" strike="noStrike">
+              <a:solidFill>
+                <a:srgbClr val="0284C7"/>
+              </a:solidFill>
+              <a:latin typeface="Courier New"/>
+              <a:ea typeface="Courier New"/>
+              <a:cs typeface="Courier New"/>
+              <a:sym typeface="Courier New"/>
+            </a:endParaRPr>
+          </a:p>
+          <a:p>
+            <a:pPr indent="0" lvl="0" marL="0" marR="0" rtl="0" algn="l">
+              <a:lnSpc>
+                <a:spcPct val="100000"/>
+              </a:lnSpc>
+              <a:spcBef>
+                <a:spcPts val="700"/>
+              </a:spcBef>
+              <a:spcAft>
+                <a:spcPts val="0"/>
+              </a:spcAft>
+              <a:buNone/>
+            </a:pPr>
+            <a:r>
+              <a:rPr b="1" i="0" lang="en-US" sz="780" u="none" strike="noStrike">
+                <a:solidFill>
+                  <a:srgbClr val="0284C7"/>
+                </a:solidFill>
+                <a:latin typeface="Arial"/>
+                <a:ea typeface="Arial"/>
+                <a:cs typeface="Arial"/>
+                <a:sym typeface="Arial"/>
+              </a:rPr>
+              <a:t>TOP PARAMETERS TO TWEAK IN CLASS</a:t>
+            </a:r>
+            <a:endParaRPr b="1" i="0" sz="1600" u="none" strike="noStrike">
+              <a:solidFill>
+                <a:srgbClr val="0284C7"/>
+              </a:solidFill>
+              <a:latin typeface="Courier New"/>
+              <a:ea typeface="Courier New"/>
+              <a:cs typeface="Courier New"/>
+              <a:sym typeface="Courier New"/>
+            </a:endParaRPr>
+          </a:p>
+          <a:p>
+            <a:pPr indent="0" lvl="0" marL="0" marR="0" rtl="0" algn="l">
+              <a:lnSpc>
+                <a:spcPct val="100000"/>
+              </a:lnSpc>
+              <a:spcBef>
+                <a:spcPts val="200"/>
+              </a:spcBef>
+              <a:spcAft>
+                <a:spcPts val="0"/>
+              </a:spcAft>
+              <a:buNone/>
+            </a:pPr>
+            <a:r>
+              <a:rPr b="1" i="0" lang="en-US" sz="830" u="none" strike="noStrike">
+                <a:solidFill>
+                  <a:srgbClr val="1E293B"/>
+                </a:solidFill>
+                <a:latin typeface="Courier New"/>
+                <a:ea typeface="Courier New"/>
+                <a:cs typeface="Courier New"/>
+                <a:sym typeface="Courier New"/>
+              </a:rPr>
+              <a:t>pch = 19, cex</a:t>
+            </a:r>
+            <a:r>
+              <a:rPr b="0" i="0" lang="en-US" sz="830" u="none" strike="noStrike">
+                <a:solidFill>
+                  <a:srgbClr val="475569"/>
+                </a:solidFill>
+                <a:latin typeface="Arial"/>
+                <a:ea typeface="Arial"/>
+                <a:cs typeface="Arial"/>
+                <a:sym typeface="Arial"/>
+              </a:rPr>
+              <a:t> (point shape &amp; size scaling)</a:t>
+            </a:r>
+            <a:endParaRPr b="1" i="0" sz="1600" u="none" strike="noStrike">
+              <a:solidFill>
+                <a:srgbClr val="0284C7"/>
+              </a:solidFill>
+              <a:latin typeface="Courier New"/>
+              <a:ea typeface="Courier New"/>
+              <a:cs typeface="Courier New"/>
+              <a:sym typeface="Courier New"/>
+            </a:endParaRPr>
+          </a:p>
+          <a:p>
+            <a:pPr indent="0" lvl="0" marL="0" marR="0" rtl="0" algn="l">
+              <a:lnSpc>
+                <a:spcPct val="100000"/>
+              </a:lnSpc>
+              <a:spcBef>
+                <a:spcPts val="200"/>
+              </a:spcBef>
+              <a:spcAft>
+                <a:spcPts val="0"/>
+              </a:spcAft>
+              <a:buNone/>
+            </a:pPr>
+            <a:r>
+              <a:rPr b="1" i="0" lang="en-US" sz="830" u="none" strike="noStrike">
+                <a:solidFill>
+                  <a:srgbClr val="1E293B"/>
+                </a:solidFill>
+                <a:latin typeface="Courier New"/>
+                <a:ea typeface="Courier New"/>
+                <a:cs typeface="Courier New"/>
+                <a:sym typeface="Courier New"/>
+              </a:rPr>
+              <a:t>col, bty = "L"</a:t>
+            </a:r>
+            <a:r>
+              <a:rPr b="0" i="0" lang="en-US" sz="830" u="none" strike="noStrike">
+                <a:solidFill>
+                  <a:srgbClr val="475569"/>
+                </a:solidFill>
+                <a:latin typeface="Arial"/>
+                <a:ea typeface="Arial"/>
+                <a:cs typeface="Arial"/>
+                <a:sym typeface="Arial"/>
+              </a:rPr>
+              <a:t> (clean 2-sided axis frame)</a:t>
+            </a:r>
+            <a:endParaRPr b="1" i="0" sz="1600" u="none" strike="noStrike">
+              <a:solidFill>
+                <a:srgbClr val="0284C7"/>
+              </a:solidFill>
+              <a:latin typeface="Courier New"/>
+              <a:ea typeface="Courier New"/>
+              <a:cs typeface="Courier New"/>
+              <a:sym typeface="Courier New"/>
+            </a:endParaRPr>
+          </a:p>
+          <a:p>
+            <a:pPr indent="0" lvl="0" marL="0" marR="0" rtl="0" algn="l">
+              <a:lnSpc>
+                <a:spcPct val="100000"/>
+              </a:lnSpc>
+              <a:spcBef>
+                <a:spcPts val="200"/>
+              </a:spcBef>
+              <a:spcAft>
+                <a:spcPts val="0"/>
+              </a:spcAft>
+              <a:buNone/>
+            </a:pPr>
+            <a:r>
+              <a:rPr b="1" i="0" lang="en-US" sz="830" u="none" strike="noStrike">
+                <a:solidFill>
+                  <a:srgbClr val="1E293B"/>
+                </a:solidFill>
+                <a:latin typeface="Courier New"/>
+                <a:ea typeface="Courier New"/>
+                <a:cs typeface="Courier New"/>
+                <a:sym typeface="Courier New"/>
+              </a:rPr>
+              <a:t>abline()</a:t>
+            </a:r>
+            <a:r>
+              <a:rPr b="0" i="0" lang="en-US" sz="830" u="none" strike="noStrike">
+                <a:solidFill>
+                  <a:srgbClr val="475569"/>
+                </a:solidFill>
+                <a:latin typeface="Arial"/>
+                <a:ea typeface="Arial"/>
+                <a:cs typeface="Arial"/>
+                <a:sym typeface="Arial"/>
+              </a:rPr>
+              <a:t> (add fitted allometry regression)</a:t>
+            </a:r>
+            <a:endParaRPr b="1" i="0" sz="1600" u="none" strike="noStrike">
+              <a:solidFill>
+                <a:srgbClr val="0284C7"/>
+              </a:solidFill>
+              <a:latin typeface="Courier New"/>
+              <a:ea typeface="Courier New"/>
+              <a:cs typeface="Courier New"/>
+              <a:sym typeface="Courier New"/>
+            </a:endParaRPr>
+          </a:p>
+          <a:p>
+            <a:pPr indent="0" lvl="0" marL="0" marR="0" rtl="0" algn="l">
+              <a:lnSpc>
+                <a:spcPct val="100000"/>
+              </a:lnSpc>
+              <a:spcBef>
+                <a:spcPts val="200"/>
+              </a:spcBef>
+              <a:spcAft>
+                <a:spcPts val="200"/>
+              </a:spcAft>
+              <a:buNone/>
+            </a:pPr>
+            <a:r>
+              <a:rPr b="1" i="0" lang="en-US" sz="830" u="none" strike="noStrike">
+                <a:solidFill>
+                  <a:srgbClr val="1E293B"/>
+                </a:solidFill>
+                <a:latin typeface="Courier New"/>
+                <a:ea typeface="Courier New"/>
+                <a:cs typeface="Courier New"/>
+                <a:sym typeface="Courier New"/>
+              </a:rPr>
+              <a:t>lines(), text()</a:t>
+            </a:r>
+            <a:r>
+              <a:rPr b="0" i="0" lang="en-US" sz="830" u="none" strike="noStrike">
+                <a:solidFill>
+                  <a:srgbClr val="475569"/>
+                </a:solidFill>
+                <a:latin typeface="Arial"/>
+                <a:ea typeface="Arial"/>
+                <a:cs typeface="Arial"/>
+                <a:sym typeface="Arial"/>
+              </a:rPr>
+              <a:t> (model overlays &amp; annotations)</a:t>
+            </a:r>
+            <a:endParaRPr b="1" i="0" sz="1600" u="none" strike="noStrike">
+              <a:solidFill>
+                <a:srgbClr val="0284C7"/>
+              </a:solidFill>
+              <a:latin typeface="Courier New"/>
+              <a:ea typeface="Courier New"/>
+              <a:cs typeface="Courier New"/>
+              <a:sym typeface="Courier New"/>
+            </a:endParaRPr>
+          </a:p>
+        </p:txBody>
+      </p:sp>
+      <p:pic>
+        <p:nvPicPr>
+          <p:cNvPr id="152" name="Google Shape;152;p20"/>
+          <p:cNvPicPr preferRelativeResize="0"/>
+          <p:nvPr/>
+        </p:nvPicPr>
+        <p:blipFill rotWithShape="1">
+          <a:blip r:embed="rId3">
+            <a:alphaModFix/>
+          </a:blip>
+          <a:srcRect b="0" l="0" r="0" t="0"/>
+          <a:stretch/>
+        </p:blipFill>
+        <p:spPr>
+          <a:xfrm>
+            <a:off x="8263465" y="4953000"/>
+            <a:ext cx="2993700" cy="1447800"/>
+          </a:xfrm>
+          <a:prstGeom prst="rect">
+            <a:avLst/>
+          </a:prstGeom>
+          <a:noFill/>
+          <a:ln>
+            <a:noFill/>
+          </a:ln>
+        </p:spPr>
+      </p:pic>
+      <p:pic>
+        <p:nvPicPr>
+          <p:cNvPr id="153" name="Google Shape;153;p20"/>
+          <p:cNvPicPr preferRelativeResize="0"/>
+          <p:nvPr/>
+        </p:nvPicPr>
+        <p:blipFill rotWithShape="1">
+          <a:blip r:embed="rId4">
+            <a:alphaModFix/>
+          </a:blip>
+          <a:srcRect b="0" l="0" r="0" t="0"/>
+          <a:stretch/>
+        </p:blipFill>
+        <p:spPr>
+          <a:xfrm>
+            <a:off x="4418564" y="4953000"/>
+            <a:ext cx="3354900" cy="1447800"/>
+          </a:xfrm>
+          <a:prstGeom prst="rect">
+            <a:avLst/>
+          </a:prstGeom>
+          <a:noFill/>
+          <a:ln>
+            <a:noFill/>
+          </a:ln>
+        </p:spPr>
+      </p:pic>
+      <p:pic>
+        <p:nvPicPr>
+          <p:cNvPr id="154" name="Google Shape;154;p20"/>
+          <p:cNvPicPr preferRelativeResize="0"/>
+          <p:nvPr/>
+        </p:nvPicPr>
+        <p:blipFill rotWithShape="1">
+          <a:blip r:embed="rId5">
+            <a:alphaModFix/>
+          </a:blip>
+          <a:srcRect b="0" l="0" r="0" t="0"/>
+          <a:stretch/>
+        </p:blipFill>
+        <p:spPr>
+          <a:xfrm>
+            <a:off x="754297" y="4953000"/>
+            <a:ext cx="3354900" cy="1447800"/>
+          </a:xfrm>
+          <a:prstGeom prst="rect">
+            <a:avLst/>
+          </a:prstGeom>
+          <a:noFill/>
+          <a:ln>
+            <a:noFill/>
+          </a:ln>
+        </p:spPr>
+      </p:pic>
+    </p:spTree>
+  </p:cSld>
+  <p:clrMapOvr>
+    <a:masterClrMapping/>
+  </p:clrMapOvr>
+</p:sld>
+</file>
+
+<file path=ppt/slides/slide8.xml><?xml version="1.0" encoding="utf-8"?>
+<p:sld xmlns:a="http://schemas.openxmlformats.org/drawingml/2006/main" xmlns:r="http://schemas.openxmlformats.org/officeDocument/2006/relationships" xmlns:mc="http://schemas.openxmlformats.org/markup-compatibility/2006" xmlns:mv="urn:schemas-microsoft-com:mac:vml" xmlns:p="http://schemas.openxmlformats.org/presentationml/2006/main" xmlns:c="http://schemas.openxmlformats.org/drawingml/2006/chart" xmlns:dgm="http://schemas.openxmlformats.org/drawingml/2006/diagram" xmlns:o="urn:schemas-microsoft-com:office:office" xmlns:v="urn:schemas-microsoft-com:vml" xmlns:pvml="urn:schemas-microsoft-com:office:powerpoint" xmlns:com="http://schemas.openxmlformats.org/drawingml/2006/compatibility" xmlns:p14="http://schemas.microsoft.com/office/powerpoint/2010/main" xmlns:p15="http://schemas.microsoft.com/office/powerpoint/2012/main" xmlns:ahyp="http://schemas.microsoft.com/office/drawing/2018/hyperlinkcolor">
+  <p:cSld>
+    <p:bg>
+      <p:bgPr>
+        <a:solidFill>
+          <a:srgbClr val="F8FAFC"/>
+        </a:solidFill>
+      </p:bgPr>
+    </p:bg>
+    <p:spTree>
+      <p:nvGrpSpPr>
+        <p:cNvPr id="159" name="Shape 159"/>
+        <p:cNvGrpSpPr/>
+        <p:nvPr/>
+      </p:nvGrpSpPr>
+      <p:grpSpPr>
+        <a:xfrm>
+          <a:off x="0" y="0"/>
+          <a:ext cx="0" cy="0"/>
+          <a:chOff x="0" y="0"/>
+          <a:chExt cx="0" cy="0"/>
+        </a:xfrm>
+      </p:grpSpPr>
+      <p:sp>
+        <p:nvSpPr>
+          <p:cNvPr id="160" name="Google Shape;160;p21"/>
           <p:cNvSpPr/>
           <p:nvPr/>
         </p:nvSpPr>
@@ -16480,7 +21189,7 @@
       </p:sp>
       <p:sp>
         <p:nvSpPr>
-          <p:cNvPr id="137" name="Google Shape;137;p19"/>
+          <p:cNvPr id="161" name="Google Shape;161;p21"/>
           <p:cNvSpPr txBox="1"/>
           <p:nvPr/>
         </p:nvSpPr>
@@ -16541,7 +21250,7 @@
       </p:sp>
       <p:sp>
         <p:nvSpPr>
-          <p:cNvPr id="138" name="Google Shape;138;p19"/>
+          <p:cNvPr id="162" name="Google Shape;162;p21"/>
           <p:cNvSpPr/>
           <p:nvPr/>
         </p:nvSpPr>
@@ -16689,7 +21398,7 @@
       </p:sp>
       <p:sp>
         <p:nvSpPr>
-          <p:cNvPr id="139" name="Google Shape;139;p19"/>
+          <p:cNvPr id="163" name="Google Shape;163;p21"/>
           <p:cNvSpPr/>
           <p:nvPr/>
         </p:nvSpPr>
@@ -16837,7 +21546,7 @@
       </p:sp>
       <p:sp>
         <p:nvSpPr>
-          <p:cNvPr id="140" name="Google Shape;140;p19"/>
+          <p:cNvPr id="164" name="Google Shape;164;p21"/>
           <p:cNvSpPr/>
           <p:nvPr/>
         </p:nvSpPr>
@@ -16985,7 +21694,7 @@
       </p:sp>
       <p:sp>
         <p:nvSpPr>
-          <p:cNvPr id="141" name="Google Shape;141;p19"/>
+          <p:cNvPr id="165" name="Google Shape;165;p21"/>
           <p:cNvSpPr/>
           <p:nvPr/>
         </p:nvSpPr>
@@ -17133,7 +21842,7 @@
       </p:sp>
       <p:sp>
         <p:nvSpPr>
-          <p:cNvPr id="142" name="Google Shape;142;p19"/>
+          <p:cNvPr id="166" name="Google Shape;166;p21"/>
           <p:cNvSpPr/>
           <p:nvPr/>
         </p:nvSpPr>
@@ -17281,7 +21990,7 @@
       </p:sp>
       <p:sp>
         <p:nvSpPr>
-          <p:cNvPr id="143" name="Google Shape;143;p19"/>
+          <p:cNvPr id="167" name="Google Shape;167;p21"/>
           <p:cNvSpPr/>
           <p:nvPr/>
         </p:nvSpPr>
@@ -17435,7 +22144,7 @@
 </p:sld>
 </file>
 
-<file path=ppt/slides/slide7.xml><?xml version="1.0" encoding="utf-8"?>
+<file path=ppt/slides/slide9.xml><?xml version="1.0" encoding="utf-8"?>
 <p:sld xmlns:a="http://schemas.openxmlformats.org/drawingml/2006/main" xmlns:r="http://schemas.openxmlformats.org/officeDocument/2006/relationships" xmlns:mc="http://schemas.openxmlformats.org/markup-compatibility/2006" xmlns:mv="urn:schemas-microsoft-com:mac:vml" xmlns:p="http://schemas.openxmlformats.org/presentationml/2006/main" xmlns:c="http://schemas.openxmlformats.org/drawingml/2006/chart" xmlns:dgm="http://schemas.openxmlformats.org/drawingml/2006/diagram" xmlns:o="urn:schemas-microsoft-com:office:office" xmlns:v="urn:schemas-microsoft-com:vml" xmlns:pvml="urn:schemas-microsoft-com:office:powerpoint" xmlns:com="http://schemas.openxmlformats.org/drawingml/2006/compatibility" xmlns:p14="http://schemas.microsoft.com/office/powerpoint/2010/main" xmlns:p15="http://schemas.microsoft.com/office/powerpoint/2012/main" xmlns:ahyp="http://schemas.microsoft.com/office/drawing/2018/hyperlinkcolor">
   <p:cSld>
     <p:bg>
@@ -17447,7 +22156,7 @@
     </p:bg>
     <p:spTree>
       <p:nvGrpSpPr>
-        <p:cNvPr id="148" name="Shape 148"/>
+        <p:cNvPr id="172" name="Shape 172"/>
         <p:cNvGrpSpPr/>
         <p:nvPr/>
       </p:nvGrpSpPr>
@@ -17461,7 +22170,7 @@
       </p:grpSpPr>
       <p:sp>
         <p:nvSpPr>
-          <p:cNvPr id="149" name="Google Shape;149;p20"/>
+          <p:cNvPr id="173" name="Google Shape;173;p22"/>
           <p:cNvSpPr/>
           <p:nvPr/>
         </p:nvSpPr>
@@ -17539,7 +22248,7 @@
       </p:sp>
       <p:sp>
         <p:nvSpPr>
-          <p:cNvPr id="150" name="Google Shape;150;p20"/>
+          <p:cNvPr id="174" name="Google Shape;174;p22"/>
           <p:cNvSpPr txBox="1"/>
           <p:nvPr/>
         </p:nvSpPr>
@@ -17600,7 +22309,7 @@
       </p:sp>
       <p:sp>
         <p:nvSpPr>
-          <p:cNvPr id="151" name="Google Shape;151;p20"/>
+          <p:cNvPr id="175" name="Google Shape;175;p22"/>
           <p:cNvSpPr/>
           <p:nvPr/>
         </p:nvSpPr>
@@ -17794,7 +22503,7 @@
       </p:sp>
       <p:sp>
         <p:nvSpPr>
-          <p:cNvPr id="152" name="Google Shape;152;p20"/>
+          <p:cNvPr id="176" name="Google Shape;176;p22"/>
           <p:cNvSpPr/>
           <p:nvPr/>
         </p:nvSpPr>
@@ -18078,1295 +22787,6 @@
               <a:t>• Enforces automatic unit conversion and domain assertion.</a:t>
             </a:r>
             <a:endParaRPr b="1" i="0" sz="930" u="none" strike="noStrike">
-              <a:solidFill>
-                <a:srgbClr val="059669"/>
-              </a:solidFill>
-              <a:latin typeface="Arial"/>
-              <a:ea typeface="Arial"/>
-              <a:cs typeface="Arial"/>
-              <a:sym typeface="Arial"/>
-            </a:endParaRPr>
-          </a:p>
-        </p:txBody>
-      </p:sp>
-    </p:spTree>
-  </p:cSld>
-  <p:clrMapOvr>
-    <a:masterClrMapping/>
-  </p:clrMapOvr>
-</p:sld>
-</file>
-
-<file path=ppt/slides/slide8.xml><?xml version="1.0" encoding="utf-8"?>
-<p:sld xmlns:a="http://schemas.openxmlformats.org/drawingml/2006/main" xmlns:r="http://schemas.openxmlformats.org/officeDocument/2006/relationships" xmlns:mc="http://schemas.openxmlformats.org/markup-compatibility/2006" xmlns:mv="urn:schemas-microsoft-com:mac:vml" xmlns:p="http://schemas.openxmlformats.org/presentationml/2006/main" xmlns:c="http://schemas.openxmlformats.org/drawingml/2006/chart" xmlns:dgm="http://schemas.openxmlformats.org/drawingml/2006/diagram" xmlns:o="urn:schemas-microsoft-com:office:office" xmlns:v="urn:schemas-microsoft-com:vml" xmlns:pvml="urn:schemas-microsoft-com:office:powerpoint" xmlns:com="http://schemas.openxmlformats.org/drawingml/2006/compatibility" xmlns:p14="http://schemas.microsoft.com/office/powerpoint/2010/main" xmlns:p15="http://schemas.microsoft.com/office/powerpoint/2012/main" xmlns:ahyp="http://schemas.microsoft.com/office/drawing/2018/hyperlinkcolor">
-  <p:cSld>
-    <p:bg>
-      <p:bgPr>
-        <a:solidFill>
-          <a:srgbClr val="F8FAFC"/>
-        </a:solidFill>
-      </p:bgPr>
-    </p:bg>
-    <p:spTree>
-      <p:nvGrpSpPr>
-        <p:cNvPr id="157" name="Shape 157"/>
-        <p:cNvGrpSpPr/>
-        <p:nvPr/>
-      </p:nvGrpSpPr>
-      <p:grpSpPr>
-        <a:xfrm>
-          <a:off x="0" y="0"/>
-          <a:ext cx="0" cy="0"/>
-          <a:chOff x="0" y="0"/>
-          <a:chExt cx="0" cy="0"/>
-        </a:xfrm>
-      </p:grpSpPr>
-      <p:sp>
-        <p:nvSpPr>
-          <p:cNvPr id="158" name="Google Shape;158;p21"/>
-          <p:cNvSpPr/>
-          <p:nvPr/>
-        </p:nvSpPr>
-        <p:spPr>
-          <a:xfrm>
-            <a:off x="731520" y="365760"/>
-            <a:ext cx="3840600" cy="320100"/>
-          </a:xfrm>
-          <a:prstGeom prst="roundRect">
-            <a:avLst>
-              <a:gd fmla="val 16667" name="adj"/>
-            </a:avLst>
-          </a:prstGeom>
-          <a:solidFill>
-            <a:srgbClr val="E2E8F0"/>
-          </a:solidFill>
-          <a:ln cap="flat" cmpd="sng" w="9525">
-            <a:solidFill>
-              <a:srgbClr val="CBD5E1"/>
-            </a:solidFill>
-            <a:prstDash val="solid"/>
-            <a:round/>
-            <a:headEnd len="sm" w="sm" type="none"/>
-            <a:tailEnd len="sm" w="sm" type="none"/>
-          </a:ln>
-          <a:effectLst>
-            <a:outerShdw blurRad="40000" rotWithShape="0" dir="5400000" dist="23000">
-              <a:srgbClr val="000000">
-                <a:alpha val="34902"/>
-              </a:srgbClr>
-            </a:outerShdw>
-          </a:effectLst>
-        </p:spPr>
-        <p:txBody>
-          <a:bodyPr anchorCtr="0" anchor="ctr" bIns="45700" lIns="91425" spcFirstLastPara="1" rIns="91425" wrap="square" tIns="45700">
-            <a:noAutofit/>
-          </a:bodyPr>
-          <a:lstStyle/>
-          <a:p>
-            <a:pPr indent="0" lvl="0" marL="0" marR="0" rtl="0" algn="ctr">
-              <a:lnSpc>
-                <a:spcPct val="100000"/>
-              </a:lnSpc>
-              <a:spcBef>
-                <a:spcPts val="0"/>
-              </a:spcBef>
-              <a:spcAft>
-                <a:spcPts val="0"/>
-              </a:spcAft>
-              <a:buNone/>
-            </a:pPr>
-            <a:r>
-              <a:rPr b="1" i="0" lang="en-US" sz="1100" u="none" strike="noStrike">
-                <a:solidFill>
-                  <a:srgbClr val="334155"/>
-                </a:solidFill>
-                <a:latin typeface="Arial"/>
-                <a:ea typeface="Arial"/>
-                <a:cs typeface="Arial"/>
-                <a:sym typeface="Arial"/>
-              </a:rPr>
-              <a:t>TABULAR DATA STANDARDS</a:t>
-            </a:r>
-            <a:endParaRPr b="1" i="0" sz="1100" u="none" strike="noStrike">
-              <a:solidFill>
-                <a:srgbClr val="334155"/>
-              </a:solidFill>
-              <a:latin typeface="Arial"/>
-              <a:ea typeface="Arial"/>
-              <a:cs typeface="Arial"/>
-              <a:sym typeface="Arial"/>
-            </a:endParaRPr>
-          </a:p>
-        </p:txBody>
-      </p:sp>
-      <p:sp>
-        <p:nvSpPr>
-          <p:cNvPr id="159" name="Google Shape;159;p21"/>
-          <p:cNvSpPr txBox="1"/>
-          <p:nvPr/>
-        </p:nvSpPr>
-        <p:spPr>
-          <a:xfrm>
-            <a:off x="731520" y="777240"/>
-            <a:ext cx="10728600" cy="492600"/>
-          </a:xfrm>
-          <a:prstGeom prst="rect">
-            <a:avLst/>
-          </a:prstGeom>
-          <a:noFill/>
-          <a:ln>
-            <a:noFill/>
-          </a:ln>
-        </p:spPr>
-        <p:txBody>
-          <a:bodyPr anchorCtr="0" anchor="t" bIns="45700" lIns="91425" spcFirstLastPara="1" rIns="91425" wrap="square" tIns="45700">
-            <a:spAutoFit/>
-          </a:bodyPr>
-          <a:lstStyle/>
-          <a:p>
-            <a:pPr indent="0" lvl="0" marL="0" marR="0" rtl="0" algn="l">
-              <a:lnSpc>
-                <a:spcPct val="100000"/>
-              </a:lnSpc>
-              <a:spcBef>
-                <a:spcPts val="0"/>
-              </a:spcBef>
-              <a:spcAft>
-                <a:spcPts val="0"/>
-              </a:spcAft>
-              <a:buNone/>
-            </a:pPr>
-            <a:r>
-              <a:rPr b="1" i="0" lang="en-US" sz="2600" u="none" strike="noStrike">
-                <a:solidFill>
-                  <a:srgbClr val="0F172A"/>
-                </a:solidFill>
-                <a:latin typeface="Georgia"/>
-                <a:ea typeface="Georgia"/>
-                <a:cs typeface="Georgia"/>
-                <a:sym typeface="Georgia"/>
-              </a:rPr>
-              <a:t>Tidy Data Principles for Forest Inventory Tables</a:t>
-            </a:r>
-            <a:endParaRPr b="1" i="0" sz="2600" u="none" strike="noStrike">
-              <a:solidFill>
-                <a:srgbClr val="0F172A"/>
-              </a:solidFill>
-              <a:latin typeface="Georgia"/>
-              <a:ea typeface="Georgia"/>
-              <a:cs typeface="Georgia"/>
-              <a:sym typeface="Georgia"/>
-            </a:endParaRPr>
-          </a:p>
-        </p:txBody>
-      </p:sp>
-      <p:sp>
-        <p:nvSpPr>
-          <p:cNvPr id="160" name="Google Shape;160;p21"/>
-          <p:cNvSpPr/>
-          <p:nvPr/>
-        </p:nvSpPr>
-        <p:spPr>
-          <a:xfrm>
-            <a:off x="731520" y="1645920"/>
-            <a:ext cx="3291900" cy="4572000"/>
-          </a:xfrm>
-          <a:prstGeom prst="roundRect">
-            <a:avLst>
-              <a:gd fmla="val 16667" name="adj"/>
-            </a:avLst>
-          </a:prstGeom>
-          <a:solidFill>
-            <a:srgbClr val="FFFFFF"/>
-          </a:solidFill>
-          <a:ln cap="flat" cmpd="sng" w="9525">
-            <a:solidFill>
-              <a:srgbClr val="059669"/>
-            </a:solidFill>
-            <a:prstDash val="solid"/>
-            <a:round/>
-            <a:headEnd len="sm" w="sm" type="none"/>
-            <a:tailEnd len="sm" w="sm" type="none"/>
-          </a:ln>
-          <a:effectLst>
-            <a:outerShdw blurRad="40000" rotWithShape="0" dir="5400000" dist="23000">
-              <a:srgbClr val="000000">
-                <a:alpha val="34902"/>
-              </a:srgbClr>
-            </a:outerShdw>
-          </a:effectLst>
-        </p:spPr>
-        <p:txBody>
-          <a:bodyPr anchorCtr="0" anchor="ctr" bIns="182850" lIns="228600" spcFirstLastPara="1" rIns="228600" wrap="square" tIns="228600">
-            <a:noAutofit/>
-          </a:bodyPr>
-          <a:lstStyle/>
-          <a:p>
-            <a:pPr indent="0" lvl="0" marL="0" marR="0" rtl="0" algn="ctr">
-              <a:lnSpc>
-                <a:spcPct val="100000"/>
-              </a:lnSpc>
-              <a:spcBef>
-                <a:spcPts val="0"/>
-              </a:spcBef>
-              <a:spcAft>
-                <a:spcPts val="0"/>
-              </a:spcAft>
-              <a:buNone/>
-            </a:pPr>
-            <a:r>
-              <a:rPr b="1" i="0" lang="en-US" sz="1020" u="none" strike="noStrike">
-                <a:solidFill>
-                  <a:srgbClr val="059669"/>
-                </a:solidFill>
-                <a:latin typeface="Arial"/>
-                <a:ea typeface="Arial"/>
-                <a:cs typeface="Arial"/>
-                <a:sym typeface="Arial"/>
-              </a:rPr>
-              <a:t>RULE 1: EACH STEM IS A ROW</a:t>
-            </a:r>
-            <a:endParaRPr b="1" i="0" sz="1020" u="none" strike="noStrike">
-              <a:solidFill>
-                <a:srgbClr val="059669"/>
-              </a:solidFill>
-              <a:latin typeface="Arial"/>
-              <a:ea typeface="Arial"/>
-              <a:cs typeface="Arial"/>
-              <a:sym typeface="Arial"/>
-            </a:endParaRPr>
-          </a:p>
-          <a:p>
-            <a:pPr indent="0" lvl="0" marL="0" marR="0" rtl="0" algn="l">
-              <a:lnSpc>
-                <a:spcPct val="100000"/>
-              </a:lnSpc>
-              <a:spcBef>
-                <a:spcPts val="600"/>
-              </a:spcBef>
-              <a:spcAft>
-                <a:spcPts val="0"/>
-              </a:spcAft>
-              <a:buNone/>
-            </a:pPr>
-            <a:r>
-              <a:rPr b="1" i="0" lang="en-US" sz="3060" u="none" strike="noStrike">
-                <a:solidFill>
-                  <a:srgbClr val="0F172A"/>
-                </a:solidFill>
-                <a:latin typeface="Georgia"/>
-                <a:ea typeface="Georgia"/>
-                <a:cs typeface="Georgia"/>
-                <a:sym typeface="Georgia"/>
-              </a:rPr>
-              <a:t>Unique Observation</a:t>
-            </a:r>
-            <a:endParaRPr b="1" i="0" sz="1020" u="none" strike="noStrike">
-              <a:solidFill>
-                <a:srgbClr val="059669"/>
-              </a:solidFill>
-              <a:latin typeface="Arial"/>
-              <a:ea typeface="Arial"/>
-              <a:cs typeface="Arial"/>
-              <a:sym typeface="Arial"/>
-            </a:endParaRPr>
-          </a:p>
-          <a:p>
-            <a:pPr indent="0" lvl="0" marL="0" marR="0" rtl="0" algn="l">
-              <a:lnSpc>
-                <a:spcPct val="100000"/>
-              </a:lnSpc>
-              <a:spcBef>
-                <a:spcPts val="600"/>
-              </a:spcBef>
-              <a:spcAft>
-                <a:spcPts val="0"/>
-              </a:spcAft>
-              <a:buNone/>
-            </a:pPr>
-            <a:r>
-              <a:rPr b="0" i="0" lang="en-US" sz="1105" u="none" strike="noStrike">
-                <a:solidFill>
-                  <a:srgbClr val="475569"/>
-                </a:solidFill>
-                <a:latin typeface="Arial"/>
-                <a:ea typeface="Arial"/>
-                <a:cs typeface="Arial"/>
-                <a:sym typeface="Arial"/>
-              </a:rPr>
-              <a:t>Every single row in the data frame represents exactly one measured tree or plot entity.</a:t>
-            </a:r>
-            <a:br>
-              <a:rPr b="0" i="0" lang="en-US" sz="1105" u="none" strike="noStrike">
-                <a:solidFill>
-                  <a:srgbClr val="475569"/>
-                </a:solidFill>
-                <a:latin typeface="Arial"/>
-                <a:ea typeface="Arial"/>
-                <a:cs typeface="Arial"/>
-                <a:sym typeface="Arial"/>
-              </a:rPr>
-            </a:br>
-            <a:r>
-              <a:rPr b="0" i="0" lang="en-US" sz="1105" u="none" strike="noStrike">
-                <a:solidFill>
-                  <a:srgbClr val="475569"/>
-                </a:solidFill>
-                <a:latin typeface="Arial"/>
-                <a:ea typeface="Arial"/>
-                <a:cs typeface="Arial"/>
-                <a:sym typeface="Arial"/>
-              </a:rPr>
-              <a:t>Never combine multi-stem clump measurements into one row cell.</a:t>
-            </a:r>
-            <a:endParaRPr b="1" i="0" sz="1020" u="none" strike="noStrike">
-              <a:solidFill>
-                <a:srgbClr val="059669"/>
-              </a:solidFill>
-              <a:latin typeface="Arial"/>
-              <a:ea typeface="Arial"/>
-              <a:cs typeface="Arial"/>
-              <a:sym typeface="Arial"/>
-            </a:endParaRPr>
-          </a:p>
-        </p:txBody>
-      </p:sp>
-      <p:sp>
-        <p:nvSpPr>
-          <p:cNvPr id="161" name="Google Shape;161;p21"/>
-          <p:cNvSpPr/>
-          <p:nvPr/>
-        </p:nvSpPr>
-        <p:spPr>
-          <a:xfrm>
-            <a:off x="4389120" y="1645920"/>
-            <a:ext cx="3291900" cy="4572000"/>
-          </a:xfrm>
-          <a:prstGeom prst="roundRect">
-            <a:avLst>
-              <a:gd fmla="val 16667" name="adj"/>
-            </a:avLst>
-          </a:prstGeom>
-          <a:solidFill>
-            <a:srgbClr val="FFFFFF"/>
-          </a:solidFill>
-          <a:ln cap="flat" cmpd="sng" w="9525">
-            <a:solidFill>
-              <a:srgbClr val="0284C7"/>
-            </a:solidFill>
-            <a:prstDash val="solid"/>
-            <a:round/>
-            <a:headEnd len="sm" w="sm" type="none"/>
-            <a:tailEnd len="sm" w="sm" type="none"/>
-          </a:ln>
-          <a:effectLst>
-            <a:outerShdw blurRad="40000" rotWithShape="0" dir="5400000" dist="23000">
-              <a:srgbClr val="000000">
-                <a:alpha val="34902"/>
-              </a:srgbClr>
-            </a:outerShdw>
-          </a:effectLst>
-        </p:spPr>
-        <p:txBody>
-          <a:bodyPr anchorCtr="0" anchor="ctr" bIns="182850" lIns="228600" spcFirstLastPara="1" rIns="228600" wrap="square" tIns="228600">
-            <a:noAutofit/>
-          </a:bodyPr>
-          <a:lstStyle/>
-          <a:p>
-            <a:pPr indent="0" lvl="0" marL="0" marR="0" rtl="0" algn="ctr">
-              <a:lnSpc>
-                <a:spcPct val="100000"/>
-              </a:lnSpc>
-              <a:spcBef>
-                <a:spcPts val="0"/>
-              </a:spcBef>
-              <a:spcAft>
-                <a:spcPts val="0"/>
-              </a:spcAft>
-              <a:buNone/>
-            </a:pPr>
-            <a:r>
-              <a:rPr b="1" i="0" lang="en-US" sz="1200" u="none" strike="noStrike">
-                <a:solidFill>
-                  <a:srgbClr val="0284C7"/>
-                </a:solidFill>
-                <a:latin typeface="Arial"/>
-                <a:ea typeface="Arial"/>
-                <a:cs typeface="Arial"/>
-                <a:sym typeface="Arial"/>
-              </a:rPr>
-              <a:t>RULE 2: EACH ATTRIBUTE IS A COLUMN</a:t>
-            </a:r>
-            <a:endParaRPr b="1" i="0" sz="1200" u="none" strike="noStrike">
-              <a:solidFill>
-                <a:srgbClr val="0284C7"/>
-              </a:solidFill>
-              <a:latin typeface="Arial"/>
-              <a:ea typeface="Arial"/>
-              <a:cs typeface="Arial"/>
-              <a:sym typeface="Arial"/>
-            </a:endParaRPr>
-          </a:p>
-          <a:p>
-            <a:pPr indent="0" lvl="0" marL="0" marR="0" rtl="0" algn="l">
-              <a:lnSpc>
-                <a:spcPct val="100000"/>
-              </a:lnSpc>
-              <a:spcBef>
-                <a:spcPts val="600"/>
-              </a:spcBef>
-              <a:spcAft>
-                <a:spcPts val="0"/>
-              </a:spcAft>
-              <a:buNone/>
-            </a:pPr>
-            <a:r>
-              <a:rPr b="1" i="0" lang="en-US" sz="3600" u="none" strike="noStrike">
-                <a:solidFill>
-                  <a:srgbClr val="0F172A"/>
-                </a:solidFill>
-                <a:latin typeface="Georgia"/>
-                <a:ea typeface="Georgia"/>
-                <a:cs typeface="Georgia"/>
-                <a:sym typeface="Georgia"/>
-              </a:rPr>
-              <a:t>Distinct Variable</a:t>
-            </a:r>
-            <a:endParaRPr b="1" i="0" sz="1200" u="none" strike="noStrike">
-              <a:solidFill>
-                <a:srgbClr val="0284C7"/>
-              </a:solidFill>
-              <a:latin typeface="Arial"/>
-              <a:ea typeface="Arial"/>
-              <a:cs typeface="Arial"/>
-              <a:sym typeface="Arial"/>
-            </a:endParaRPr>
-          </a:p>
-          <a:p>
-            <a:pPr indent="0" lvl="0" marL="0" marR="0" rtl="0" algn="l">
-              <a:lnSpc>
-                <a:spcPct val="100000"/>
-              </a:lnSpc>
-              <a:spcBef>
-                <a:spcPts val="600"/>
-              </a:spcBef>
-              <a:spcAft>
-                <a:spcPts val="0"/>
-              </a:spcAft>
-              <a:buNone/>
-            </a:pPr>
-            <a:r>
-              <a:rPr b="0" i="0" lang="en-US" sz="1300" u="none" strike="noStrike">
-                <a:solidFill>
-                  <a:srgbClr val="475569"/>
-                </a:solidFill>
-                <a:latin typeface="Arial"/>
-                <a:ea typeface="Arial"/>
-                <a:cs typeface="Arial"/>
-                <a:sym typeface="Arial"/>
-              </a:rPr>
-              <a:t>Plot_ID, Stem_ID, Species, DBH_cm, Height_m, Decay_Class must each occupy distinct columns with explicit data types.</a:t>
-            </a:r>
-            <a:endParaRPr b="1" i="0" sz="1200" u="none" strike="noStrike">
-              <a:solidFill>
-                <a:srgbClr val="0284C7"/>
-              </a:solidFill>
-              <a:latin typeface="Arial"/>
-              <a:ea typeface="Arial"/>
-              <a:cs typeface="Arial"/>
-              <a:sym typeface="Arial"/>
-            </a:endParaRPr>
-          </a:p>
-        </p:txBody>
-      </p:sp>
-      <p:sp>
-        <p:nvSpPr>
-          <p:cNvPr id="162" name="Google Shape;162;p21"/>
-          <p:cNvSpPr/>
-          <p:nvPr/>
-        </p:nvSpPr>
-        <p:spPr>
-          <a:xfrm>
-            <a:off x="8046720" y="1645920"/>
-            <a:ext cx="3413400" cy="4572000"/>
-          </a:xfrm>
-          <a:prstGeom prst="roundRect">
-            <a:avLst>
-              <a:gd fmla="val 16667" name="adj"/>
-            </a:avLst>
-          </a:prstGeom>
-          <a:solidFill>
-            <a:srgbClr val="FFFFFF"/>
-          </a:solidFill>
-          <a:ln cap="flat" cmpd="sng" w="9525">
-            <a:solidFill>
-              <a:srgbClr val="D97706"/>
-            </a:solidFill>
-            <a:prstDash val="solid"/>
-            <a:round/>
-            <a:headEnd len="sm" w="sm" type="none"/>
-            <a:tailEnd len="sm" w="sm" type="none"/>
-          </a:ln>
-          <a:effectLst>
-            <a:outerShdw blurRad="40000" rotWithShape="0" dir="5400000" dist="23000">
-              <a:srgbClr val="000000">
-                <a:alpha val="34902"/>
-              </a:srgbClr>
-            </a:outerShdw>
-          </a:effectLst>
-        </p:spPr>
-        <p:txBody>
-          <a:bodyPr anchorCtr="0" anchor="ctr" bIns="182850" lIns="228600" spcFirstLastPara="1" rIns="228600" wrap="square" tIns="228600">
-            <a:noAutofit/>
-          </a:bodyPr>
-          <a:lstStyle/>
-          <a:p>
-            <a:pPr indent="0" lvl="0" marL="0" marR="0" rtl="0" algn="ctr">
-              <a:lnSpc>
-                <a:spcPct val="100000"/>
-              </a:lnSpc>
-              <a:spcBef>
-                <a:spcPts val="0"/>
-              </a:spcBef>
-              <a:spcAft>
-                <a:spcPts val="0"/>
-              </a:spcAft>
-              <a:buNone/>
-            </a:pPr>
-            <a:r>
-              <a:rPr b="1" i="0" lang="en-US" sz="1200" u="none" strike="noStrike">
-                <a:solidFill>
-                  <a:srgbClr val="D97706"/>
-                </a:solidFill>
-                <a:latin typeface="Arial"/>
-                <a:ea typeface="Arial"/>
-                <a:cs typeface="Arial"/>
-                <a:sym typeface="Arial"/>
-              </a:rPr>
-              <a:t>RULE 3: ONE OBSERVATION LEVEL PER TABLE</a:t>
-            </a:r>
-            <a:endParaRPr b="1" i="0" sz="1200" u="none" strike="noStrike">
-              <a:solidFill>
-                <a:srgbClr val="D97706"/>
-              </a:solidFill>
-              <a:latin typeface="Arial"/>
-              <a:ea typeface="Arial"/>
-              <a:cs typeface="Arial"/>
-              <a:sym typeface="Arial"/>
-            </a:endParaRPr>
-          </a:p>
-          <a:p>
-            <a:pPr indent="0" lvl="0" marL="0" marR="0" rtl="0" algn="l">
-              <a:lnSpc>
-                <a:spcPct val="100000"/>
-              </a:lnSpc>
-              <a:spcBef>
-                <a:spcPts val="600"/>
-              </a:spcBef>
-              <a:spcAft>
-                <a:spcPts val="0"/>
-              </a:spcAft>
-              <a:buNone/>
-            </a:pPr>
-            <a:r>
-              <a:rPr b="1" i="0" lang="en-US" sz="3600" u="none" strike="noStrike">
-                <a:solidFill>
-                  <a:srgbClr val="0F172A"/>
-                </a:solidFill>
-                <a:latin typeface="Georgia"/>
-                <a:ea typeface="Georgia"/>
-                <a:cs typeface="Georgia"/>
-                <a:sym typeface="Georgia"/>
-              </a:rPr>
-              <a:t>Relational Integrity</a:t>
-            </a:r>
-            <a:endParaRPr b="1" i="0" sz="1200" u="none" strike="noStrike">
-              <a:solidFill>
-                <a:srgbClr val="D97706"/>
-              </a:solidFill>
-              <a:latin typeface="Arial"/>
-              <a:ea typeface="Arial"/>
-              <a:cs typeface="Arial"/>
-              <a:sym typeface="Arial"/>
-            </a:endParaRPr>
-          </a:p>
-          <a:p>
-            <a:pPr indent="0" lvl="0" marL="0" marR="0" rtl="0" algn="l">
-              <a:lnSpc>
-                <a:spcPct val="100000"/>
-              </a:lnSpc>
-              <a:spcBef>
-                <a:spcPts val="600"/>
-              </a:spcBef>
-              <a:spcAft>
-                <a:spcPts val="0"/>
-              </a:spcAft>
-              <a:buNone/>
-            </a:pPr>
-            <a:r>
-              <a:rPr b="0" i="0" lang="en-US" sz="1300" u="none" strike="noStrike">
-                <a:solidFill>
-                  <a:srgbClr val="475569"/>
-                </a:solidFill>
-                <a:latin typeface="Arial"/>
-                <a:ea typeface="Arial"/>
-                <a:cs typeface="Arial"/>
-                <a:sym typeface="Arial"/>
-              </a:rPr>
-              <a:t>Tree-level measurements belong in tree_data.csv.</a:t>
-            </a:r>
-            <a:br>
-              <a:rPr b="0" i="0" lang="en-US" sz="1300" u="none" strike="noStrike">
-                <a:solidFill>
-                  <a:srgbClr val="475569"/>
-                </a:solidFill>
-                <a:latin typeface="Arial"/>
-                <a:ea typeface="Arial"/>
-                <a:cs typeface="Arial"/>
-                <a:sym typeface="Arial"/>
-              </a:rPr>
-            </a:br>
-            <a:r>
-              <a:rPr b="0" i="0" lang="en-US" sz="1300" u="none" strike="noStrike">
-                <a:solidFill>
-                  <a:srgbClr val="475569"/>
-                </a:solidFill>
-                <a:latin typeface="Arial"/>
-                <a:ea typeface="Arial"/>
-                <a:cs typeface="Arial"/>
-                <a:sym typeface="Arial"/>
-              </a:rPr>
-              <a:t>Plot-level coordinates and slope belong in plot_metadata.csv.</a:t>
-            </a:r>
-            <a:br>
-              <a:rPr b="0" i="0" lang="en-US" sz="1300" u="none" strike="noStrike">
-                <a:solidFill>
-                  <a:srgbClr val="475569"/>
-                </a:solidFill>
-                <a:latin typeface="Arial"/>
-                <a:ea typeface="Arial"/>
-                <a:cs typeface="Arial"/>
-                <a:sym typeface="Arial"/>
-              </a:rPr>
-            </a:br>
-            <a:r>
-              <a:rPr b="0" i="0" lang="en-US" sz="1300" u="none" strike="noStrike">
-                <a:solidFill>
-                  <a:srgbClr val="475569"/>
-                </a:solidFill>
-                <a:latin typeface="Arial"/>
-                <a:ea typeface="Arial"/>
-                <a:cs typeface="Arial"/>
-                <a:sym typeface="Arial"/>
-              </a:rPr>
-              <a:t>Joined by Plot_ID key.</a:t>
-            </a:r>
-            <a:endParaRPr b="1" i="0" sz="1200" u="none" strike="noStrike">
-              <a:solidFill>
-                <a:srgbClr val="D97706"/>
-              </a:solidFill>
-              <a:latin typeface="Arial"/>
-              <a:ea typeface="Arial"/>
-              <a:cs typeface="Arial"/>
-              <a:sym typeface="Arial"/>
-            </a:endParaRPr>
-          </a:p>
-        </p:txBody>
-      </p:sp>
-    </p:spTree>
-  </p:cSld>
-  <p:clrMapOvr>
-    <a:masterClrMapping/>
-  </p:clrMapOvr>
-</p:sld>
-</file>
-
-<file path=ppt/slides/slide9.xml><?xml version="1.0" encoding="utf-8"?>
-<p:sld xmlns:a="http://schemas.openxmlformats.org/drawingml/2006/main" xmlns:r="http://schemas.openxmlformats.org/officeDocument/2006/relationships" xmlns:mc="http://schemas.openxmlformats.org/markup-compatibility/2006" xmlns:mv="urn:schemas-microsoft-com:mac:vml" xmlns:p="http://schemas.openxmlformats.org/presentationml/2006/main" xmlns:c="http://schemas.openxmlformats.org/drawingml/2006/chart" xmlns:dgm="http://schemas.openxmlformats.org/drawingml/2006/diagram" xmlns:o="urn:schemas-microsoft-com:office:office" xmlns:v="urn:schemas-microsoft-com:vml" xmlns:pvml="urn:schemas-microsoft-com:office:powerpoint" xmlns:com="http://schemas.openxmlformats.org/drawingml/2006/compatibility" xmlns:p14="http://schemas.microsoft.com/office/powerpoint/2010/main" xmlns:p15="http://schemas.microsoft.com/office/powerpoint/2012/main" xmlns:ahyp="http://schemas.microsoft.com/office/drawing/2018/hyperlinkcolor">
-  <p:cSld>
-    <p:bg>
-      <p:bgPr>
-        <a:solidFill>
-          <a:srgbClr val="F8FAFC"/>
-        </a:solidFill>
-      </p:bgPr>
-    </p:bg>
-    <p:spTree>
-      <p:nvGrpSpPr>
-        <p:cNvPr id="167" name="Shape 167"/>
-        <p:cNvGrpSpPr/>
-        <p:nvPr/>
-      </p:nvGrpSpPr>
-      <p:grpSpPr>
-        <a:xfrm>
-          <a:off x="0" y="0"/>
-          <a:ext cx="0" cy="0"/>
-          <a:chOff x="0" y="0"/>
-          <a:chExt cx="0" cy="0"/>
-        </a:xfrm>
-      </p:grpSpPr>
-      <p:sp>
-        <p:nvSpPr>
-          <p:cNvPr id="168" name="Google Shape;168;p22"/>
-          <p:cNvSpPr/>
-          <p:nvPr/>
-        </p:nvSpPr>
-        <p:spPr>
-          <a:xfrm>
-            <a:off x="731520" y="365760"/>
-            <a:ext cx="3840600" cy="320100"/>
-          </a:xfrm>
-          <a:prstGeom prst="roundRect">
-            <a:avLst>
-              <a:gd fmla="val 16667" name="adj"/>
-            </a:avLst>
-          </a:prstGeom>
-          <a:solidFill>
-            <a:srgbClr val="E2E8F0"/>
-          </a:solidFill>
-          <a:ln cap="flat" cmpd="sng" w="9525">
-            <a:solidFill>
-              <a:srgbClr val="CBD5E1"/>
-            </a:solidFill>
-            <a:prstDash val="solid"/>
-            <a:round/>
-            <a:headEnd len="sm" w="sm" type="none"/>
-            <a:tailEnd len="sm" w="sm" type="none"/>
-          </a:ln>
-          <a:effectLst>
-            <a:outerShdw blurRad="40000" rotWithShape="0" dir="5400000" dist="23000">
-              <a:srgbClr val="000000">
-                <a:alpha val="34902"/>
-              </a:srgbClr>
-            </a:outerShdw>
-          </a:effectLst>
-        </p:spPr>
-        <p:txBody>
-          <a:bodyPr anchorCtr="0" anchor="ctr" bIns="45700" lIns="91425" spcFirstLastPara="1" rIns="91425" wrap="square" tIns="45700">
-            <a:noAutofit/>
-          </a:bodyPr>
-          <a:lstStyle/>
-          <a:p>
-            <a:pPr indent="0" lvl="0" marL="0" marR="0" rtl="0" algn="ctr">
-              <a:lnSpc>
-                <a:spcPct val="100000"/>
-              </a:lnSpc>
-              <a:spcBef>
-                <a:spcPts val="0"/>
-              </a:spcBef>
-              <a:spcAft>
-                <a:spcPts val="0"/>
-              </a:spcAft>
-              <a:buNone/>
-            </a:pPr>
-            <a:r>
-              <a:rPr b="1" i="0" lang="en-US" sz="1100" u="none" strike="noStrike">
-                <a:solidFill>
-                  <a:srgbClr val="334155"/>
-                </a:solidFill>
-                <a:latin typeface="Arial"/>
-                <a:ea typeface="Arial"/>
-                <a:cs typeface="Arial"/>
-                <a:sym typeface="Arial"/>
-              </a:rPr>
-              <a:t>UNIT II SYNTHESIS</a:t>
-            </a:r>
-            <a:endParaRPr b="1" i="0" sz="1100" u="none" strike="noStrike">
-              <a:solidFill>
-                <a:srgbClr val="334155"/>
-              </a:solidFill>
-              <a:latin typeface="Arial"/>
-              <a:ea typeface="Arial"/>
-              <a:cs typeface="Arial"/>
-              <a:sym typeface="Arial"/>
-            </a:endParaRPr>
-          </a:p>
-        </p:txBody>
-      </p:sp>
-      <p:sp>
-        <p:nvSpPr>
-          <p:cNvPr id="169" name="Google Shape;169;p22"/>
-          <p:cNvSpPr txBox="1"/>
-          <p:nvPr/>
-        </p:nvSpPr>
-        <p:spPr>
-          <a:xfrm>
-            <a:off x="731520" y="777240"/>
-            <a:ext cx="10728600" cy="731400"/>
-          </a:xfrm>
-          <a:prstGeom prst="rect">
-            <a:avLst/>
-          </a:prstGeom>
-          <a:noFill/>
-          <a:ln>
-            <a:noFill/>
-          </a:ln>
-        </p:spPr>
-        <p:txBody>
-          <a:bodyPr anchorCtr="0" anchor="t" bIns="45700" lIns="91425" spcFirstLastPara="1" rIns="91425" wrap="square" tIns="45700">
-            <a:spAutoFit/>
-          </a:bodyPr>
-          <a:lstStyle/>
-          <a:p>
-            <a:pPr indent="0" lvl="0" marL="0" marR="0" rtl="0" algn="l">
-              <a:lnSpc>
-                <a:spcPct val="100000"/>
-              </a:lnSpc>
-              <a:spcBef>
-                <a:spcPts val="0"/>
-              </a:spcBef>
-              <a:spcAft>
-                <a:spcPts val="0"/>
-              </a:spcAft>
-              <a:buNone/>
-            </a:pPr>
-            <a:r>
-              <a:rPr b="1" i="0" lang="en-US" sz="2600" u="none" strike="noStrike">
-                <a:solidFill>
-                  <a:srgbClr val="0F172A"/>
-                </a:solidFill>
-                <a:latin typeface="Georgia"/>
-                <a:ea typeface="Georgia"/>
-                <a:cs typeface="Georgia"/>
-                <a:sym typeface="Georgia"/>
-              </a:rPr>
-              <a:t>Summary: Core Programming Rules for Foresters</a:t>
-            </a:r>
-            <a:endParaRPr b="1" i="0" sz="2600" u="none" strike="noStrike">
-              <a:solidFill>
-                <a:srgbClr val="0F172A"/>
-              </a:solidFill>
-              <a:latin typeface="Georgia"/>
-              <a:ea typeface="Georgia"/>
-              <a:cs typeface="Georgia"/>
-              <a:sym typeface="Georgia"/>
-            </a:endParaRPr>
-          </a:p>
-        </p:txBody>
-      </p:sp>
-      <p:sp>
-        <p:nvSpPr>
-          <p:cNvPr id="170" name="Google Shape;170;p22"/>
-          <p:cNvSpPr/>
-          <p:nvPr/>
-        </p:nvSpPr>
-        <p:spPr>
-          <a:xfrm>
-            <a:off x="731520" y="1645920"/>
-            <a:ext cx="5120700" cy="4572000"/>
-          </a:xfrm>
-          <a:prstGeom prst="roundRect">
-            <a:avLst>
-              <a:gd fmla="val 16667" name="adj"/>
-            </a:avLst>
-          </a:prstGeom>
-          <a:solidFill>
-            <a:srgbClr val="FFFFFF"/>
-          </a:solidFill>
-          <a:ln cap="flat" cmpd="sng" w="9525">
-            <a:solidFill>
-              <a:srgbClr val="D97706"/>
-            </a:solidFill>
-            <a:prstDash val="solid"/>
-            <a:round/>
-            <a:headEnd len="sm" w="sm" type="none"/>
-            <a:tailEnd len="sm" w="sm" type="none"/>
-          </a:ln>
-          <a:effectLst>
-            <a:outerShdw blurRad="40000" rotWithShape="0" dir="5400000" dist="23000">
-              <a:srgbClr val="000000">
-                <a:alpha val="34902"/>
-              </a:srgbClr>
-            </a:outerShdw>
-          </a:effectLst>
-        </p:spPr>
-        <p:txBody>
-          <a:bodyPr anchorCtr="0" anchor="ctr" bIns="182850" lIns="228600" spcFirstLastPara="1" rIns="228600" wrap="square" tIns="228600">
-            <a:noAutofit/>
-          </a:bodyPr>
-          <a:lstStyle/>
-          <a:p>
-            <a:pPr indent="0" lvl="0" marL="0" marR="0" rtl="0" algn="ctr">
-              <a:lnSpc>
-                <a:spcPct val="100000"/>
-              </a:lnSpc>
-              <a:spcBef>
-                <a:spcPts val="0"/>
-              </a:spcBef>
-              <a:spcAft>
-                <a:spcPts val="0"/>
-              </a:spcAft>
-              <a:buNone/>
-            </a:pPr>
-            <a:r>
-              <a:rPr b="1" i="0" lang="en-US" sz="1200" u="none" strike="noStrike">
-                <a:solidFill>
-                  <a:srgbClr val="D97706"/>
-                </a:solidFill>
-                <a:latin typeface="Arial"/>
-                <a:ea typeface="Arial"/>
-                <a:cs typeface="Arial"/>
-                <a:sym typeface="Arial"/>
-              </a:rPr>
-              <a:t>DEFENSIVE HABITS</a:t>
-            </a:r>
-            <a:endParaRPr b="1" i="0" sz="1200" u="none" strike="noStrike">
-              <a:solidFill>
-                <a:srgbClr val="D97706"/>
-              </a:solidFill>
-              <a:latin typeface="Arial"/>
-              <a:ea typeface="Arial"/>
-              <a:cs typeface="Arial"/>
-              <a:sym typeface="Arial"/>
-            </a:endParaRPr>
-          </a:p>
-          <a:p>
-            <a:pPr indent="0" lvl="0" marL="0" marR="0" rtl="0" algn="l">
-              <a:lnSpc>
-                <a:spcPct val="100000"/>
-              </a:lnSpc>
-              <a:spcBef>
-                <a:spcPts val="600"/>
-              </a:spcBef>
-              <a:spcAft>
-                <a:spcPts val="0"/>
-              </a:spcAft>
-              <a:buNone/>
-            </a:pPr>
-            <a:r>
-              <a:rPr b="1" i="0" lang="en-US" sz="3600" u="none" strike="noStrike">
-                <a:solidFill>
-                  <a:srgbClr val="0F172A"/>
-                </a:solidFill>
-                <a:latin typeface="Georgia"/>
-                <a:ea typeface="Georgia"/>
-                <a:cs typeface="Georgia"/>
-                <a:sym typeface="Georgia"/>
-              </a:rPr>
-              <a:t>Never Trust Input Data</a:t>
-            </a:r>
-            <a:endParaRPr b="1" i="0" sz="1200" u="none" strike="noStrike">
-              <a:solidFill>
-                <a:srgbClr val="D97706"/>
-              </a:solidFill>
-              <a:latin typeface="Arial"/>
-              <a:ea typeface="Arial"/>
-              <a:cs typeface="Arial"/>
-              <a:sym typeface="Arial"/>
-            </a:endParaRPr>
-          </a:p>
-          <a:p>
-            <a:pPr indent="0" lvl="0" marL="0" marR="0" rtl="0" algn="l">
-              <a:lnSpc>
-                <a:spcPct val="100000"/>
-              </a:lnSpc>
-              <a:spcBef>
-                <a:spcPts val="600"/>
-              </a:spcBef>
-              <a:spcAft>
-                <a:spcPts val="0"/>
-              </a:spcAft>
-              <a:buNone/>
-            </a:pPr>
-            <a:r>
-              <a:rPr b="0" i="0" lang="en-US" sz="1300" u="none" strike="noStrike">
-                <a:solidFill>
-                  <a:srgbClr val="475569"/>
-                </a:solidFill>
-                <a:latin typeface="Arial"/>
-                <a:ea typeface="Arial"/>
-                <a:cs typeface="Arial"/>
-                <a:sym typeface="Arial"/>
-              </a:rPr>
-              <a:t>1. Always inspect column structures with str() and summary().</a:t>
-            </a:r>
-            <a:br>
-              <a:rPr b="0" i="0" lang="en-US" sz="1300" u="none" strike="noStrike">
-                <a:solidFill>
-                  <a:srgbClr val="475569"/>
-                </a:solidFill>
-                <a:latin typeface="Arial"/>
-                <a:ea typeface="Arial"/>
-                <a:cs typeface="Arial"/>
-                <a:sym typeface="Arial"/>
-              </a:rPr>
-            </a:br>
-            <a:r>
-              <a:rPr b="0" i="0" lang="en-US" sz="1300" u="none" strike="noStrike">
-                <a:solidFill>
-                  <a:srgbClr val="475569"/>
-                </a:solidFill>
-                <a:latin typeface="Arial"/>
-                <a:ea typeface="Arial"/>
-                <a:cs typeface="Arial"/>
-                <a:sym typeface="Arial"/>
-              </a:rPr>
-              <a:t>2. Use vectorized assertions to verify biological boundaries (5 &lt;= DBH &lt;= 350).</a:t>
-            </a:r>
-            <a:br>
-              <a:rPr b="0" i="0" lang="en-US" sz="1300" u="none" strike="noStrike">
-                <a:solidFill>
-                  <a:srgbClr val="475569"/>
-                </a:solidFill>
-                <a:latin typeface="Arial"/>
-                <a:ea typeface="Arial"/>
-                <a:cs typeface="Arial"/>
-                <a:sym typeface="Arial"/>
-              </a:rPr>
-            </a:br>
-            <a:r>
-              <a:rPr b="0" i="0" lang="en-US" sz="1300" u="none" strike="noStrike">
-                <a:solidFill>
-                  <a:srgbClr val="475569"/>
-                </a:solidFill>
-                <a:latin typeface="Arial"/>
-                <a:ea typeface="Arial"/>
-                <a:cs typeface="Arial"/>
-                <a:sym typeface="Arial"/>
-              </a:rPr>
-              <a:t>3. Avoid scalar 'if' for multi-tree operations.</a:t>
-            </a:r>
-            <a:br>
-              <a:rPr b="0" i="0" lang="en-US" sz="1300" u="none" strike="noStrike">
-                <a:solidFill>
-                  <a:srgbClr val="475569"/>
-                </a:solidFill>
-                <a:latin typeface="Arial"/>
-                <a:ea typeface="Arial"/>
-                <a:cs typeface="Arial"/>
-                <a:sym typeface="Arial"/>
-              </a:rPr>
-            </a:br>
-            <a:r>
-              <a:rPr b="0" i="0" lang="en-US" sz="1300" u="none" strike="noStrike">
-                <a:solidFill>
-                  <a:srgbClr val="475569"/>
-                </a:solidFill>
-                <a:latin typeface="Arial"/>
-                <a:ea typeface="Arial"/>
-                <a:cs typeface="Arial"/>
-                <a:sym typeface="Arial"/>
-              </a:rPr>
-              <a:t>4. Save custom functions in R/ directory scripts.</a:t>
-            </a:r>
-            <a:endParaRPr b="1" i="0" sz="1200" u="none" strike="noStrike">
-              <a:solidFill>
-                <a:srgbClr val="D97706"/>
-              </a:solidFill>
-              <a:latin typeface="Arial"/>
-              <a:ea typeface="Arial"/>
-              <a:cs typeface="Arial"/>
-              <a:sym typeface="Arial"/>
-            </a:endParaRPr>
-          </a:p>
-        </p:txBody>
-      </p:sp>
-      <p:sp>
-        <p:nvSpPr>
-          <p:cNvPr id="171" name="Google Shape;171;p22"/>
-          <p:cNvSpPr/>
-          <p:nvPr/>
-        </p:nvSpPr>
-        <p:spPr>
-          <a:xfrm>
-            <a:off x="6217920" y="1645920"/>
-            <a:ext cx="5242200" cy="4572000"/>
-          </a:xfrm>
-          <a:prstGeom prst="roundRect">
-            <a:avLst>
-              <a:gd fmla="val 16667" name="adj"/>
-            </a:avLst>
-          </a:prstGeom>
-          <a:solidFill>
-            <a:srgbClr val="FFFFFF"/>
-          </a:solidFill>
-          <a:ln cap="flat" cmpd="sng" w="9525">
-            <a:solidFill>
-              <a:srgbClr val="059669"/>
-            </a:solidFill>
-            <a:prstDash val="solid"/>
-            <a:round/>
-            <a:headEnd len="sm" w="sm" type="none"/>
-            <a:tailEnd len="sm" w="sm" type="none"/>
-          </a:ln>
-          <a:effectLst>
-            <a:outerShdw blurRad="40000" rotWithShape="0" dir="5400000" dist="23000">
-              <a:srgbClr val="000000">
-                <a:alpha val="34902"/>
-              </a:srgbClr>
-            </a:outerShdw>
-          </a:effectLst>
-        </p:spPr>
-        <p:txBody>
-          <a:bodyPr anchorCtr="0" anchor="ctr" bIns="182850" lIns="228600" spcFirstLastPara="1" rIns="228600" wrap="square" tIns="228600">
-            <a:noAutofit/>
-          </a:bodyPr>
-          <a:lstStyle/>
-          <a:p>
-            <a:pPr indent="0" lvl="0" marL="0" marR="0" rtl="0" algn="ctr">
-              <a:lnSpc>
-                <a:spcPct val="100000"/>
-              </a:lnSpc>
-              <a:spcBef>
-                <a:spcPts val="0"/>
-              </a:spcBef>
-              <a:spcAft>
-                <a:spcPts val="0"/>
-              </a:spcAft>
-              <a:buNone/>
-            </a:pPr>
-            <a:r>
-              <a:rPr b="1" i="0" lang="en-US" sz="1200" u="none" strike="noStrike">
-                <a:solidFill>
-                  <a:srgbClr val="059669"/>
-                </a:solidFill>
-                <a:latin typeface="Arial"/>
-                <a:ea typeface="Arial"/>
-                <a:cs typeface="Arial"/>
-                <a:sym typeface="Arial"/>
-              </a:rPr>
-              <a:t>THE AUTOMATION PAYOFF</a:t>
-            </a:r>
-            <a:endParaRPr b="1" i="0" sz="1200" u="none" strike="noStrike">
-              <a:solidFill>
-                <a:srgbClr val="059669"/>
-              </a:solidFill>
-              <a:latin typeface="Arial"/>
-              <a:ea typeface="Arial"/>
-              <a:cs typeface="Arial"/>
-              <a:sym typeface="Arial"/>
-            </a:endParaRPr>
-          </a:p>
-          <a:p>
-            <a:pPr indent="0" lvl="0" marL="0" marR="0" rtl="0" algn="l">
-              <a:lnSpc>
-                <a:spcPct val="100000"/>
-              </a:lnSpc>
-              <a:spcBef>
-                <a:spcPts val="600"/>
-              </a:spcBef>
-              <a:spcAft>
-                <a:spcPts val="0"/>
-              </a:spcAft>
-              <a:buNone/>
-            </a:pPr>
-            <a:r>
-              <a:rPr b="1" i="0" lang="en-US" sz="3600" u="none" strike="noStrike">
-                <a:solidFill>
-                  <a:srgbClr val="0F172A"/>
-                </a:solidFill>
-                <a:latin typeface="Georgia"/>
-                <a:ea typeface="Georgia"/>
-                <a:cs typeface="Georgia"/>
-                <a:sym typeface="Georgia"/>
-              </a:rPr>
-              <a:t>5,000 Stems in 0.02s</a:t>
-            </a:r>
-            <a:endParaRPr b="1" i="0" sz="1200" u="none" strike="noStrike">
-              <a:solidFill>
-                <a:srgbClr val="059669"/>
-              </a:solidFill>
-              <a:latin typeface="Arial"/>
-              <a:ea typeface="Arial"/>
-              <a:cs typeface="Arial"/>
-              <a:sym typeface="Arial"/>
-            </a:endParaRPr>
-          </a:p>
-          <a:p>
-            <a:pPr indent="0" lvl="0" marL="0" marR="0" rtl="0" algn="l">
-              <a:lnSpc>
-                <a:spcPct val="100000"/>
-              </a:lnSpc>
-              <a:spcBef>
-                <a:spcPts val="600"/>
-              </a:spcBef>
-              <a:spcAft>
-                <a:spcPts val="0"/>
-              </a:spcAft>
-              <a:buNone/>
-            </a:pPr>
-            <a:r>
-              <a:rPr b="0" i="0" lang="en-US" sz="1300" u="none" strike="noStrike">
-                <a:solidFill>
-                  <a:srgbClr val="475569"/>
-                </a:solidFill>
-                <a:latin typeface="Arial"/>
-                <a:ea typeface="Arial"/>
-                <a:cs typeface="Arial"/>
-                <a:sym typeface="Arial"/>
-              </a:rPr>
-              <a:t>By vectorizing calculations:</a:t>
-            </a:r>
-            <a:br>
-              <a:rPr b="0" i="0" lang="en-US" sz="1300" u="none" strike="noStrike">
-                <a:solidFill>
-                  <a:srgbClr val="475569"/>
-                </a:solidFill>
-                <a:latin typeface="Arial"/>
-                <a:ea typeface="Arial"/>
-                <a:cs typeface="Arial"/>
-                <a:sym typeface="Arial"/>
-              </a:rPr>
-            </a:br>
-            <a:r>
-              <a:rPr b="0" i="0" lang="en-US" sz="1300" u="none" strike="noStrike">
-                <a:solidFill>
-                  <a:srgbClr val="475569"/>
-                </a:solidFill>
-                <a:latin typeface="Arial"/>
-                <a:ea typeface="Arial"/>
-                <a:cs typeface="Arial"/>
-                <a:sym typeface="Arial"/>
-              </a:rPr>
-              <a:t>• 100 forest inventory plots process in milliseconds.</a:t>
-            </a:r>
-            <a:br>
-              <a:rPr b="0" i="0" lang="en-US" sz="1300" u="none" strike="noStrike">
-                <a:solidFill>
-                  <a:srgbClr val="475569"/>
-                </a:solidFill>
-                <a:latin typeface="Arial"/>
-                <a:ea typeface="Arial"/>
-                <a:cs typeface="Arial"/>
-                <a:sym typeface="Arial"/>
-              </a:rPr>
-            </a:br>
-            <a:r>
-              <a:rPr b="0" i="0" lang="en-US" sz="1300" u="none" strike="noStrike">
-                <a:solidFill>
-                  <a:srgbClr val="475569"/>
-                </a:solidFill>
-                <a:latin typeface="Arial"/>
-                <a:ea typeface="Arial"/>
-                <a:cs typeface="Arial"/>
-                <a:sym typeface="Arial"/>
-              </a:rPr>
-              <a:t>• Human transcription errors are eliminated.</a:t>
-            </a:r>
-            <a:br>
-              <a:rPr b="0" i="0" lang="en-US" sz="1300" u="none" strike="noStrike">
-                <a:solidFill>
-                  <a:srgbClr val="475569"/>
-                </a:solidFill>
-                <a:latin typeface="Arial"/>
-                <a:ea typeface="Arial"/>
-                <a:cs typeface="Arial"/>
-                <a:sym typeface="Arial"/>
-              </a:rPr>
-            </a:br>
-            <a:r>
-              <a:rPr b="0" i="0" lang="en-US" sz="1300" u="none" strike="noStrike">
-                <a:solidFill>
-                  <a:srgbClr val="475569"/>
-                </a:solidFill>
-                <a:latin typeface="Arial"/>
-                <a:ea typeface="Arial"/>
-                <a:cs typeface="Arial"/>
-                <a:sym typeface="Arial"/>
-              </a:rPr>
-              <a:t>• The entire dataset can be audited by external reviewers instantly.</a:t>
-            </a:r>
-            <a:endParaRPr b="1" i="0" sz="1200" u="none" strike="noStrike">
               <a:solidFill>
                 <a:srgbClr val="059669"/>
               </a:solidFill>
